--- a/Aula 02/Aula02.pptx
+++ b/Aula 02/Aula02.pptx
@@ -17,6 +17,13 @@
     <p:sldId id="273" r:id="rId11"/>
     <p:sldId id="274" r:id="rId12"/>
     <p:sldId id="275" r:id="rId13"/>
+    <p:sldId id="276" r:id="rId14"/>
+    <p:sldId id="278" r:id="rId15"/>
+    <p:sldId id="279" r:id="rId16"/>
+    <p:sldId id="280" r:id="rId17"/>
+    <p:sldId id="281" r:id="rId18"/>
+    <p:sldId id="282" r:id="rId19"/>
+    <p:sldId id="283" r:id="rId20"/>
   </p:sldIdLst>
   <p:sldSz cx="12192000" cy="6858000"/>
   <p:notesSz cx="6858000" cy="9144000"/>
@@ -291,7 +298,7 @@
           <a:p>
             <a:fld id="{9E016143-E03C-4CFD-AFDC-14E5BDEA754C}" type="datetimeFigureOut">
               <a:rPr lang="en-US" dirty="0"/>
-              <a:t>6/20/2025</a:t>
+              <a:t>6/21/2025</a:t>
             </a:fld>
             <a:endParaRPr lang="en-US" dirty="0"/>
           </a:p>
@@ -515,7 +522,7 @@
           <a:p>
             <a:fld id="{C033E54A-A8CA-48C1-9504-691B58049D29}" type="datetimeFigureOut">
               <a:rPr lang="en-US" dirty="0"/>
-              <a:t>6/20/2025</a:t>
+              <a:t>6/21/2025</a:t>
             </a:fld>
             <a:endParaRPr lang="en-US" dirty="0"/>
           </a:p>
@@ -690,7 +697,7 @@
           <a:p>
             <a:fld id="{B5F6C806-BBF7-471C-9527-881CE2266695}" type="datetimeFigureOut">
               <a:rPr lang="en-US" dirty="0"/>
-              <a:t>6/20/2025</a:t>
+              <a:t>6/21/2025</a:t>
             </a:fld>
             <a:endParaRPr lang="en-US" dirty="0"/>
           </a:p>
@@ -855,7 +862,7 @@
           <a:p>
             <a:fld id="{78C94063-DF36-4330-A365-08DA1FA5B7D6}" type="datetimeFigureOut">
               <a:rPr lang="en-US" dirty="0"/>
-              <a:t>6/20/2025</a:t>
+              <a:t>6/21/2025</a:t>
             </a:fld>
             <a:endParaRPr lang="en-US" dirty="0"/>
           </a:p>
@@ -1104,7 +1111,7 @@
           <a:p>
             <a:fld id="{908A7C6C-0F39-4D70-8E8D-FE5B9C95FA73}" type="datetimeFigureOut">
               <a:rPr lang="en-US" dirty="0"/>
-              <a:t>6/20/2025</a:t>
+              <a:t>6/21/2025</a:t>
             </a:fld>
             <a:endParaRPr lang="en-US" dirty="0"/>
           </a:p>
@@ -1425,7 +1432,7 @@
           <a:p>
             <a:fld id="{DFCFA4AC-08CC-42CE-BD01-C191750A04EC}" type="datetimeFigureOut">
               <a:rPr lang="en-US" dirty="0"/>
-              <a:t>6/20/2025</a:t>
+              <a:t>6/21/2025</a:t>
             </a:fld>
             <a:endParaRPr lang="en-US" dirty="0"/>
           </a:p>
@@ -1871,7 +1878,7 @@
           <a:p>
             <a:fld id="{1BA7A723-92A7-435B-B681-F25B092FEFEB}" type="datetimeFigureOut">
               <a:rPr lang="en-US" dirty="0"/>
-              <a:t>6/20/2025</a:t>
+              <a:t>6/21/2025</a:t>
             </a:fld>
             <a:endParaRPr lang="en-US" dirty="0"/>
           </a:p>
@@ -1984,7 +1991,7 @@
           <a:p>
             <a:fld id="{4F170639-886C-4FCF-9EAB-ABB5DA3F3F4A}" type="datetimeFigureOut">
               <a:rPr lang="en-US" dirty="0"/>
-              <a:t>6/20/2025</a:t>
+              <a:t>6/21/2025</a:t>
             </a:fld>
             <a:endParaRPr lang="en-US" dirty="0"/>
           </a:p>
@@ -2074,7 +2081,7 @@
           <a:p>
             <a:fld id="{22230651-31F4-45D2-98AE-A2108F41BC07}" type="datetimeFigureOut">
               <a:rPr lang="en-US" dirty="0"/>
-              <a:t>6/20/2025</a:t>
+              <a:t>6/21/2025</a:t>
             </a:fld>
             <a:endParaRPr lang="en-US" dirty="0"/>
           </a:p>
@@ -2356,7 +2363,7 @@
           <a:p>
             <a:fld id="{6F53789A-C914-4DB1-8815-80B5EC7335C5}" type="datetimeFigureOut">
               <a:rPr lang="en-US" dirty="0"/>
-              <a:t>6/20/2025</a:t>
+              <a:t>6/21/2025</a:t>
             </a:fld>
             <a:endParaRPr lang="en-US" dirty="0"/>
           </a:p>
@@ -2673,7 +2680,7 @@
           <a:p>
             <a:fld id="{5E6440AA-91A0-436F-8FDB-C0F939DCAE21}" type="datetimeFigureOut">
               <a:rPr lang="en-US" dirty="0"/>
-              <a:t>6/20/2025</a:t>
+              <a:t>6/21/2025</a:t>
             </a:fld>
             <a:endParaRPr lang="en-US" dirty="0"/>
           </a:p>
@@ -2922,7 +2929,7 @@
           <a:p>
             <a:fld id="{0E59FD0C-5451-4CA0-86AF-E70AE3279989}" type="datetimeFigureOut">
               <a:rPr lang="en-US" dirty="0"/>
-              <a:t>6/20/2025</a:t>
+              <a:t>6/21/2025</a:t>
             </a:fld>
             <a:endParaRPr lang="en-US" dirty="0"/>
           </a:p>
@@ -8627,6 +8634,5688 @@
     <p:extLst>
       <p:ext uri="{BB962C8B-B14F-4D97-AF65-F5344CB8AC3E}">
         <p14:creationId xmlns:p14="http://schemas.microsoft.com/office/powerpoint/2010/main" val="105735971"/>
+      </p:ext>
+    </p:extLst>
+  </p:cSld>
+  <p:clrMapOvr>
+    <a:masterClrMapping/>
+  </p:clrMapOvr>
+</p:sld>
+</file>
+
+<file path=ppt/slides/slide13.xml><?xml version="1.0" encoding="utf-8"?>
+<p:sld xmlns:a="http://schemas.openxmlformats.org/drawingml/2006/main" xmlns:r="http://schemas.openxmlformats.org/officeDocument/2006/relationships" xmlns:p="http://schemas.openxmlformats.org/presentationml/2006/main">
+  <p:cSld>
+    <p:spTree>
+      <p:nvGrpSpPr>
+        <p:cNvPr id="1" name=""/>
+        <p:cNvGrpSpPr/>
+        <p:nvPr/>
+      </p:nvGrpSpPr>
+      <p:grpSpPr>
+        <a:xfrm>
+          <a:off x="0" y="0"/>
+          <a:ext cx="0" cy="0"/>
+          <a:chOff x="0" y="0"/>
+          <a:chExt cx="0" cy="0"/>
+        </a:xfrm>
+      </p:grpSpPr>
+      <p:sp>
+        <p:nvSpPr>
+          <p:cNvPr id="2" name="Título 1">
+            <a:extLst>
+              <a:ext uri="{FF2B5EF4-FFF2-40B4-BE49-F238E27FC236}">
+                <a16:creationId xmlns:a16="http://schemas.microsoft.com/office/drawing/2014/main" id="{2FC20E8B-B665-4276-9EE8-B82B29DF17CB}"/>
+              </a:ext>
+            </a:extLst>
+          </p:cNvPr>
+          <p:cNvSpPr>
+            <a:spLocks noGrp="1"/>
+          </p:cNvSpPr>
+          <p:nvPr>
+            <p:ph type="ctrTitle"/>
+          </p:nvPr>
+        </p:nvSpPr>
+        <p:spPr>
+          <a:xfrm>
+            <a:off x="1261872" y="1331920"/>
+            <a:ext cx="9418320" cy="3063240"/>
+          </a:xfrm>
+        </p:spPr>
+        <p:txBody>
+          <a:bodyPr>
+            <a:normAutofit fontScale="90000"/>
+          </a:bodyPr>
+          <a:lstStyle/>
+          <a:p>
+            <a:br>
+              <a:rPr lang="pt-BR" dirty="0"/>
+            </a:br>
+            <a:r>
+              <a:rPr lang="pt-BR" dirty="0">
+                <a:solidFill>
+                  <a:srgbClr val="00758F"/>
+                </a:solidFill>
+              </a:rPr>
+              <a:t>Hora dos </a:t>
+            </a:r>
+            <a:r>
+              <a:rPr lang="pt-BR" dirty="0">
+                <a:solidFill>
+                  <a:srgbClr val="F39211"/>
+                </a:solidFill>
+              </a:rPr>
+              <a:t>Exercícios!</a:t>
+            </a:r>
+            <a:r>
+              <a:rPr lang="pt-BR" dirty="0">
+                <a:solidFill>
+                  <a:srgbClr val="00758F"/>
+                </a:solidFill>
+              </a:rPr>
+              <a:t> </a:t>
+            </a:r>
+            <a:br>
+              <a:rPr lang="pt-BR" dirty="0"/>
+            </a:br>
+            <a:br>
+              <a:rPr lang="pt-BR" dirty="0"/>
+            </a:br>
+            <a:r>
+              <a:rPr lang="pt-BR" dirty="0">
+                <a:solidFill>
+                  <a:srgbClr val="00758F"/>
+                </a:solidFill>
+              </a:rPr>
+              <a:t>My</a:t>
+            </a:r>
+            <a:r>
+              <a:rPr lang="pt-BR" dirty="0">
+                <a:solidFill>
+                  <a:srgbClr val="F39211"/>
+                </a:solidFill>
+              </a:rPr>
+              <a:t>SQL</a:t>
+            </a:r>
+            <a:r>
+              <a:rPr lang="pt-BR" dirty="0"/>
+              <a:t>: Aula 02</a:t>
+            </a:r>
+          </a:p>
+        </p:txBody>
+      </p:sp>
+      <p:sp>
+        <p:nvSpPr>
+          <p:cNvPr id="3" name="Subtítulo 2">
+            <a:extLst>
+              <a:ext uri="{FF2B5EF4-FFF2-40B4-BE49-F238E27FC236}">
+                <a16:creationId xmlns:a16="http://schemas.microsoft.com/office/drawing/2014/main" id="{17E03497-30AD-4754-A43A-72A8D0158E03}"/>
+              </a:ext>
+            </a:extLst>
+          </p:cNvPr>
+          <p:cNvSpPr>
+            <a:spLocks noGrp="1"/>
+          </p:cNvSpPr>
+          <p:nvPr>
+            <p:ph type="subTitle" idx="1"/>
+          </p:nvPr>
+        </p:nvSpPr>
+        <p:spPr/>
+        <p:txBody>
+          <a:bodyPr>
+            <a:normAutofit/>
+          </a:bodyPr>
+          <a:lstStyle/>
+          <a:p>
+            <a:r>
+              <a:rPr lang="pt-BR" sz="2000" dirty="0"/>
+              <a:t>Exercícios de INSERT e SELECT.</a:t>
+            </a:r>
+          </a:p>
+        </p:txBody>
+      </p:sp>
+      <p:pic>
+        <p:nvPicPr>
+          <p:cNvPr id="14" name="Picture 6" descr="https://www.mysql.com/common/logos/logo-mysql-170x115.png">
+            <a:extLst>
+              <a:ext uri="{FF2B5EF4-FFF2-40B4-BE49-F238E27FC236}">
+                <a16:creationId xmlns:a16="http://schemas.microsoft.com/office/drawing/2014/main" id="{14C8504F-8DD4-4170-A866-8452D0C109E6}"/>
+              </a:ext>
+            </a:extLst>
+          </p:cNvPr>
+          <p:cNvPicPr>
+            <a:picLocks noChangeAspect="1" noChangeArrowheads="1"/>
+          </p:cNvPicPr>
+          <p:nvPr/>
+        </p:nvPicPr>
+        <p:blipFill>
+          <a:blip r:embed="rId2">
+            <a:extLst>
+              <a:ext uri="{28A0092B-C50C-407E-A947-70E740481C1C}">
+                <a14:useLocalDpi xmlns:a14="http://schemas.microsoft.com/office/drawing/2010/main" val="0"/>
+              </a:ext>
+            </a:extLst>
+          </a:blip>
+          <a:srcRect/>
+          <a:stretch>
+            <a:fillRect/>
+          </a:stretch>
+        </p:blipFill>
+        <p:spPr bwMode="auto">
+          <a:xfrm>
+            <a:off x="9774793" y="5753675"/>
+            <a:ext cx="1385775" cy="936973"/>
+          </a:xfrm>
+          <a:prstGeom prst="rect">
+            <a:avLst/>
+          </a:prstGeom>
+          <a:noFill/>
+          <a:extLst>
+            <a:ext uri="{909E8E84-426E-40DD-AFC4-6F175D3DCCD1}">
+              <a14:hiddenFill xmlns:a14="http://schemas.microsoft.com/office/drawing/2010/main">
+                <a:solidFill>
+                  <a:srgbClr val="FFFFFF"/>
+                </a:solidFill>
+              </a14:hiddenFill>
+            </a:ext>
+          </a:extLst>
+        </p:spPr>
+      </p:pic>
+    </p:spTree>
+    <p:extLst>
+      <p:ext uri="{BB962C8B-B14F-4D97-AF65-F5344CB8AC3E}">
+        <p14:creationId xmlns:p14="http://schemas.microsoft.com/office/powerpoint/2010/main" val="1661071734"/>
+      </p:ext>
+    </p:extLst>
+  </p:cSld>
+  <p:clrMapOvr>
+    <a:masterClrMapping/>
+  </p:clrMapOvr>
+</p:sld>
+</file>
+
+<file path=ppt/slides/slide14.xml><?xml version="1.0" encoding="utf-8"?>
+<p:sld xmlns:a="http://schemas.openxmlformats.org/drawingml/2006/main" xmlns:r="http://schemas.openxmlformats.org/officeDocument/2006/relationships" xmlns:p="http://schemas.openxmlformats.org/presentationml/2006/main">
+  <p:cSld>
+    <p:spTree>
+      <p:nvGrpSpPr>
+        <p:cNvPr id="1" name=""/>
+        <p:cNvGrpSpPr/>
+        <p:nvPr/>
+      </p:nvGrpSpPr>
+      <p:grpSpPr>
+        <a:xfrm>
+          <a:off x="0" y="0"/>
+          <a:ext cx="0" cy="0"/>
+          <a:chOff x="0" y="0"/>
+          <a:chExt cx="0" cy="0"/>
+        </a:xfrm>
+      </p:grpSpPr>
+      <p:sp>
+        <p:nvSpPr>
+          <p:cNvPr id="2" name="Título 1">
+            <a:extLst>
+              <a:ext uri="{FF2B5EF4-FFF2-40B4-BE49-F238E27FC236}">
+                <a16:creationId xmlns:a16="http://schemas.microsoft.com/office/drawing/2014/main" id="{E1BF4364-A6CD-4460-A48D-6779B48ADDBE}"/>
+              </a:ext>
+            </a:extLst>
+          </p:cNvPr>
+          <p:cNvSpPr>
+            <a:spLocks noGrp="1"/>
+          </p:cNvSpPr>
+          <p:nvPr>
+            <p:ph type="title"/>
+          </p:nvPr>
+        </p:nvSpPr>
+        <p:spPr>
+          <a:xfrm>
+            <a:off x="338845" y="1030102"/>
+            <a:ext cx="9692640" cy="811983"/>
+          </a:xfrm>
+        </p:spPr>
+        <p:txBody>
+          <a:bodyPr>
+            <a:noAutofit/>
+          </a:bodyPr>
+          <a:lstStyle/>
+          <a:p>
+            <a:r>
+              <a:rPr lang="pt-BR" sz="3600" b="1" dirty="0">
+                <a:solidFill>
+                  <a:srgbClr val="00758F"/>
+                </a:solidFill>
+              </a:rPr>
+              <a:t>Exercícios:</a:t>
+            </a:r>
+            <a:br>
+              <a:rPr lang="pt-BR" sz="3600" b="1" dirty="0">
+                <a:solidFill>
+                  <a:srgbClr val="F39211"/>
+                </a:solidFill>
+              </a:rPr>
+            </a:br>
+            <a:r>
+              <a:rPr lang="pt-BR" sz="3600" b="1" dirty="0">
+                <a:solidFill>
+                  <a:srgbClr val="F39211"/>
+                </a:solidFill>
+              </a:rPr>
+              <a:t>DROP TABLE da aula passada</a:t>
+            </a:r>
+            <a:br>
+              <a:rPr lang="pt-BR" sz="3600" b="1" dirty="0">
+                <a:solidFill>
+                  <a:srgbClr val="F39211"/>
+                </a:solidFill>
+              </a:rPr>
+            </a:br>
+            <a:endParaRPr lang="pt-BR" sz="3600" i="1" dirty="0">
+              <a:solidFill>
+                <a:srgbClr val="F39211"/>
+              </a:solidFill>
+            </a:endParaRPr>
+          </a:p>
+        </p:txBody>
+      </p:sp>
+      <p:pic>
+        <p:nvPicPr>
+          <p:cNvPr id="4" name="Picture 6" descr="https://www.mysql.com/common/logos/logo-mysql-170x115.png">
+            <a:extLst>
+              <a:ext uri="{FF2B5EF4-FFF2-40B4-BE49-F238E27FC236}">
+                <a16:creationId xmlns:a16="http://schemas.microsoft.com/office/drawing/2014/main" id="{441DFD02-E8A2-4690-9CD7-1CC407F2024E}"/>
+              </a:ext>
+            </a:extLst>
+          </p:cNvPr>
+          <p:cNvPicPr>
+            <a:picLocks noChangeAspect="1" noChangeArrowheads="1"/>
+          </p:cNvPicPr>
+          <p:nvPr/>
+        </p:nvPicPr>
+        <p:blipFill>
+          <a:blip r:embed="rId2">
+            <a:extLst>
+              <a:ext uri="{28A0092B-C50C-407E-A947-70E740481C1C}">
+                <a14:useLocalDpi xmlns:a14="http://schemas.microsoft.com/office/drawing/2010/main" val="0"/>
+              </a:ext>
+            </a:extLst>
+          </a:blip>
+          <a:srcRect/>
+          <a:stretch>
+            <a:fillRect/>
+          </a:stretch>
+        </p:blipFill>
+        <p:spPr bwMode="auto">
+          <a:xfrm>
+            <a:off x="9774793" y="5753675"/>
+            <a:ext cx="1385775" cy="936973"/>
+          </a:xfrm>
+          <a:prstGeom prst="rect">
+            <a:avLst/>
+          </a:prstGeom>
+          <a:noFill/>
+          <a:extLst>
+            <a:ext uri="{909E8E84-426E-40DD-AFC4-6F175D3DCCD1}">
+              <a14:hiddenFill xmlns:a14="http://schemas.microsoft.com/office/drawing/2010/main">
+                <a:solidFill>
+                  <a:srgbClr val="FFFFFF"/>
+                </a:solidFill>
+              </a14:hiddenFill>
+            </a:ext>
+          </a:extLst>
+        </p:spPr>
+      </p:pic>
+      <p:sp>
+        <p:nvSpPr>
+          <p:cNvPr id="5" name="CaixaDeTexto 4">
+            <a:extLst>
+              <a:ext uri="{FF2B5EF4-FFF2-40B4-BE49-F238E27FC236}">
+                <a16:creationId xmlns:a16="http://schemas.microsoft.com/office/drawing/2014/main" id="{890DD339-B99C-43BD-99AF-28040E9B3E9C}"/>
+              </a:ext>
+            </a:extLst>
+          </p:cNvPr>
+          <p:cNvSpPr txBox="1"/>
+          <p:nvPr/>
+        </p:nvSpPr>
+        <p:spPr>
+          <a:xfrm>
+            <a:off x="338844" y="1436093"/>
+            <a:ext cx="11002924" cy="2860463"/>
+          </a:xfrm>
+          <a:prstGeom prst="rect">
+            <a:avLst/>
+          </a:prstGeom>
+          <a:noFill/>
+        </p:spPr>
+        <p:txBody>
+          <a:bodyPr wrap="square" rtlCol="0">
+            <a:spAutoFit/>
+          </a:bodyPr>
+          <a:lstStyle/>
+          <a:p>
+            <a:pPr>
+              <a:lnSpc>
+                <a:spcPct val="107000"/>
+              </a:lnSpc>
+            </a:pPr>
+            <a:r>
+              <a:rPr lang="pt-BR" sz="2200" dirty="0"/>
+              <a:t>Use o seguinte comando para listar tabelas:</a:t>
+            </a:r>
+            <a:endParaRPr lang="pt-BR" sz="2200" dirty="0">
+              <a:solidFill>
+                <a:srgbClr val="0000FF"/>
+              </a:solidFill>
+              <a:ea typeface="Times New Roman" panose="02020603050405020304" pitchFamily="18" charset="0"/>
+              <a:cs typeface="Times New Roman" panose="02020603050405020304" pitchFamily="18" charset="0"/>
+            </a:endParaRPr>
+          </a:p>
+          <a:p>
+            <a:pPr>
+              <a:lnSpc>
+                <a:spcPct val="107000"/>
+              </a:lnSpc>
+              <a:spcAft>
+                <a:spcPts val="0"/>
+              </a:spcAft>
+            </a:pPr>
+            <a:r>
+              <a:rPr lang="pt-BR" sz="1700" b="1" dirty="0">
+                <a:solidFill>
+                  <a:srgbClr val="0000FF"/>
+                </a:solidFill>
+                <a:latin typeface="Courier New" panose="02070309020205020404" pitchFamily="49" charset="0"/>
+                <a:cs typeface="Times New Roman" panose="02020603050405020304" pitchFamily="18" charset="0"/>
+              </a:rPr>
+              <a:t>SHOW TABLES</a:t>
+            </a:r>
+            <a:r>
+              <a:rPr lang="pt-BR" sz="2200" b="1" dirty="0">
+                <a:solidFill>
+                  <a:srgbClr val="000080"/>
+                </a:solidFill>
+                <a:latin typeface="Courier New" panose="02070309020205020404" pitchFamily="49" charset="0"/>
+                <a:ea typeface="Times New Roman" panose="02020603050405020304" pitchFamily="18" charset="0"/>
+                <a:cs typeface="Times New Roman" panose="02020603050405020304" pitchFamily="18" charset="0"/>
+              </a:rPr>
+              <a:t>;</a:t>
+            </a:r>
+            <a:endParaRPr lang="pt-BR" sz="2200" dirty="0">
+              <a:latin typeface="Calibri" panose="020F0502020204030204" pitchFamily="34" charset="0"/>
+              <a:ea typeface="Calibri" panose="020F0502020204030204" pitchFamily="34" charset="0"/>
+              <a:cs typeface="Times New Roman" panose="02020603050405020304" pitchFamily="18" charset="0"/>
+            </a:endParaRPr>
+          </a:p>
+          <a:p>
+            <a:pPr>
+              <a:lnSpc>
+                <a:spcPct val="107000"/>
+              </a:lnSpc>
+              <a:spcAft>
+                <a:spcPts val="800"/>
+              </a:spcAft>
+            </a:pPr>
+            <a:r>
+              <a:rPr lang="pt-BR" sz="2200" dirty="0">
+                <a:ea typeface="Calibri" panose="020F0502020204030204" pitchFamily="34" charset="0"/>
+                <a:cs typeface="Arial" panose="020B0604020202020204" pitchFamily="34" charset="0"/>
+              </a:rPr>
+              <a:t>E não esqueça de selecionar o Banco de Dados antes de executar o comando acima!</a:t>
+            </a:r>
+            <a:endParaRPr lang="pt-BR" sz="2200" dirty="0">
+              <a:ea typeface="Calibri" panose="020F0502020204030204" pitchFamily="34" charset="0"/>
+              <a:cs typeface="Times New Roman" panose="02020603050405020304" pitchFamily="18" charset="0"/>
+            </a:endParaRPr>
+          </a:p>
+          <a:p>
+            <a:pPr>
+              <a:lnSpc>
+                <a:spcPct val="107000"/>
+              </a:lnSpc>
+              <a:spcAft>
+                <a:spcPts val="0"/>
+              </a:spcAft>
+            </a:pPr>
+            <a:r>
+              <a:rPr lang="pt-BR" sz="1700" b="1" dirty="0">
+                <a:solidFill>
+                  <a:srgbClr val="0000FF"/>
+                </a:solidFill>
+                <a:latin typeface="Courier New" panose="02070309020205020404" pitchFamily="49" charset="0"/>
+                <a:cs typeface="Times New Roman" panose="02020603050405020304" pitchFamily="18" charset="0"/>
+              </a:rPr>
+              <a:t>USE</a:t>
+            </a:r>
+            <a:r>
+              <a:rPr lang="pt-BR" sz="2200" dirty="0">
+                <a:solidFill>
+                  <a:srgbClr val="000000"/>
+                </a:solidFill>
+                <a:latin typeface="Courier New" panose="02070309020205020404" pitchFamily="49" charset="0"/>
+                <a:ea typeface="Times New Roman" panose="02020603050405020304" pitchFamily="18" charset="0"/>
+                <a:cs typeface="Times New Roman" panose="02020603050405020304" pitchFamily="18" charset="0"/>
+              </a:rPr>
+              <a:t> </a:t>
+            </a:r>
+            <a:r>
+              <a:rPr lang="pt-BR" sz="2200" dirty="0" err="1">
+                <a:solidFill>
+                  <a:srgbClr val="000000"/>
+                </a:solidFill>
+                <a:latin typeface="Courier New" panose="02070309020205020404" pitchFamily="49" charset="0"/>
+                <a:ea typeface="Times New Roman" panose="02020603050405020304" pitchFamily="18" charset="0"/>
+                <a:cs typeface="Times New Roman" panose="02020603050405020304" pitchFamily="18" charset="0"/>
+              </a:rPr>
+              <a:t>nome_do_seu_banco</a:t>
+            </a:r>
+            <a:r>
+              <a:rPr lang="pt-BR" sz="2200" b="1" dirty="0">
+                <a:solidFill>
+                  <a:srgbClr val="000080"/>
+                </a:solidFill>
+                <a:latin typeface="Courier New" panose="02070309020205020404" pitchFamily="49" charset="0"/>
+                <a:ea typeface="Times New Roman" panose="02020603050405020304" pitchFamily="18" charset="0"/>
+                <a:cs typeface="Times New Roman" panose="02020603050405020304" pitchFamily="18" charset="0"/>
+              </a:rPr>
+              <a:t>;</a:t>
+            </a:r>
+            <a:endParaRPr lang="pt-BR" sz="2200" dirty="0">
+              <a:latin typeface="Calibri" panose="020F0502020204030204" pitchFamily="34" charset="0"/>
+              <a:ea typeface="Calibri" panose="020F0502020204030204" pitchFamily="34" charset="0"/>
+              <a:cs typeface="Times New Roman" panose="02020603050405020304" pitchFamily="18" charset="0"/>
+            </a:endParaRPr>
+          </a:p>
+          <a:p>
+            <a:pPr>
+              <a:lnSpc>
+                <a:spcPct val="107000"/>
+              </a:lnSpc>
+              <a:spcAft>
+                <a:spcPts val="800"/>
+              </a:spcAft>
+            </a:pPr>
+            <a:r>
+              <a:rPr lang="pt-BR" sz="2200" dirty="0">
+                <a:ea typeface="Calibri" panose="020F0502020204030204" pitchFamily="34" charset="0"/>
+                <a:cs typeface="Arial" panose="020B0604020202020204" pitchFamily="34" charset="0"/>
+              </a:rPr>
+              <a:t>E caso você queira saber quais tipos e </a:t>
+            </a:r>
+            <a:r>
+              <a:rPr lang="pt-BR" sz="2200" dirty="0" err="1">
+                <a:ea typeface="Calibri" panose="020F0502020204030204" pitchFamily="34" charset="0"/>
+                <a:cs typeface="Arial" panose="020B0604020202020204" pitchFamily="34" charset="0"/>
+              </a:rPr>
+              <a:t>Constraints</a:t>
+            </a:r>
+            <a:r>
+              <a:rPr lang="pt-BR" sz="2200" dirty="0">
+                <a:ea typeface="Calibri" panose="020F0502020204030204" pitchFamily="34" charset="0"/>
+                <a:cs typeface="Arial" panose="020B0604020202020204" pitchFamily="34" charset="0"/>
+              </a:rPr>
+              <a:t> fazem parte/configuração das tabelas, use o comando:</a:t>
+            </a:r>
+            <a:endParaRPr lang="pt-BR" sz="2200" dirty="0">
+              <a:ea typeface="Calibri" panose="020F0502020204030204" pitchFamily="34" charset="0"/>
+              <a:cs typeface="Times New Roman" panose="02020603050405020304" pitchFamily="18" charset="0"/>
+            </a:endParaRPr>
+          </a:p>
+          <a:p>
+            <a:pPr>
+              <a:lnSpc>
+                <a:spcPct val="107000"/>
+              </a:lnSpc>
+              <a:spcAft>
+                <a:spcPts val="0"/>
+              </a:spcAft>
+            </a:pPr>
+            <a:r>
+              <a:rPr lang="pt-BR" sz="1700" b="1" dirty="0">
+                <a:solidFill>
+                  <a:srgbClr val="0000FF"/>
+                </a:solidFill>
+                <a:latin typeface="Courier New" panose="02070309020205020404" pitchFamily="49" charset="0"/>
+                <a:cs typeface="Times New Roman" panose="02020603050405020304" pitchFamily="18" charset="0"/>
+              </a:rPr>
+              <a:t>DESCRIBE</a:t>
+            </a:r>
+            <a:r>
+              <a:rPr lang="pt-BR" sz="2200" dirty="0">
+                <a:solidFill>
+                  <a:srgbClr val="000000"/>
+                </a:solidFill>
+                <a:latin typeface="Courier New" panose="02070309020205020404" pitchFamily="49" charset="0"/>
+                <a:ea typeface="Times New Roman" panose="02020603050405020304" pitchFamily="18" charset="0"/>
+                <a:cs typeface="Times New Roman" panose="02020603050405020304" pitchFamily="18" charset="0"/>
+              </a:rPr>
+              <a:t> </a:t>
+            </a:r>
+            <a:r>
+              <a:rPr lang="pt-BR" sz="2200" dirty="0" err="1">
+                <a:solidFill>
+                  <a:srgbClr val="000000"/>
+                </a:solidFill>
+                <a:latin typeface="Courier New" panose="02070309020205020404" pitchFamily="49" charset="0"/>
+                <a:ea typeface="Times New Roman" panose="02020603050405020304" pitchFamily="18" charset="0"/>
+                <a:cs typeface="Times New Roman" panose="02020603050405020304" pitchFamily="18" charset="0"/>
+              </a:rPr>
+              <a:t>nome_da_tabela</a:t>
+            </a:r>
+            <a:r>
+              <a:rPr lang="pt-BR" sz="2200" dirty="0">
+                <a:solidFill>
+                  <a:srgbClr val="000000"/>
+                </a:solidFill>
+                <a:latin typeface="Courier New" panose="02070309020205020404" pitchFamily="49" charset="0"/>
+                <a:ea typeface="Times New Roman" panose="02020603050405020304" pitchFamily="18" charset="0"/>
+                <a:cs typeface="Times New Roman" panose="02020603050405020304" pitchFamily="18" charset="0"/>
+              </a:rPr>
+              <a:t>; ou </a:t>
+            </a:r>
+            <a:r>
+              <a:rPr lang="pt-BR" sz="1700" b="1" dirty="0">
+                <a:solidFill>
+                  <a:srgbClr val="0000FF"/>
+                </a:solidFill>
+                <a:latin typeface="Courier New" panose="02070309020205020404" pitchFamily="49" charset="0"/>
+                <a:cs typeface="Times New Roman" panose="02020603050405020304" pitchFamily="18" charset="0"/>
+              </a:rPr>
+              <a:t>DESC</a:t>
+            </a:r>
+            <a:r>
+              <a:rPr lang="pt-BR" sz="2200" dirty="0">
+                <a:solidFill>
+                  <a:srgbClr val="0000FF"/>
+                </a:solidFill>
+                <a:latin typeface="Courier New" panose="02070309020205020404" pitchFamily="49" charset="0"/>
+                <a:ea typeface="Times New Roman" panose="02020603050405020304" pitchFamily="18" charset="0"/>
+                <a:cs typeface="Times New Roman" panose="02020603050405020304" pitchFamily="18" charset="0"/>
+              </a:rPr>
+              <a:t> </a:t>
+            </a:r>
+            <a:r>
+              <a:rPr lang="pt-BR" sz="2200" dirty="0" err="1">
+                <a:solidFill>
+                  <a:srgbClr val="000000"/>
+                </a:solidFill>
+                <a:latin typeface="Courier New" panose="02070309020205020404" pitchFamily="49" charset="0"/>
+                <a:ea typeface="Times New Roman" panose="02020603050405020304" pitchFamily="18" charset="0"/>
+                <a:cs typeface="Times New Roman" panose="02020603050405020304" pitchFamily="18" charset="0"/>
+              </a:rPr>
+              <a:t>nome_da_tabela</a:t>
+            </a:r>
+            <a:r>
+              <a:rPr lang="pt-BR" sz="2200" dirty="0">
+                <a:solidFill>
+                  <a:srgbClr val="000000"/>
+                </a:solidFill>
+                <a:latin typeface="Courier New" panose="02070309020205020404" pitchFamily="49" charset="0"/>
+                <a:ea typeface="Times New Roman" panose="02020603050405020304" pitchFamily="18" charset="0"/>
+                <a:cs typeface="Times New Roman" panose="02020603050405020304" pitchFamily="18" charset="0"/>
+              </a:rPr>
+              <a:t>;</a:t>
+            </a:r>
+            <a:endParaRPr lang="pt-BR" sz="2200" dirty="0">
+              <a:latin typeface="Calibri" panose="020F0502020204030204" pitchFamily="34" charset="0"/>
+              <a:ea typeface="Calibri" panose="020F0502020204030204" pitchFamily="34" charset="0"/>
+              <a:cs typeface="Times New Roman" panose="02020603050405020304" pitchFamily="18" charset="0"/>
+            </a:endParaRPr>
+          </a:p>
+        </p:txBody>
+      </p:sp>
+    </p:spTree>
+    <p:extLst>
+      <p:ext uri="{BB962C8B-B14F-4D97-AF65-F5344CB8AC3E}">
+        <p14:creationId xmlns:p14="http://schemas.microsoft.com/office/powerpoint/2010/main" val="3801709676"/>
+      </p:ext>
+    </p:extLst>
+  </p:cSld>
+  <p:clrMapOvr>
+    <a:masterClrMapping/>
+  </p:clrMapOvr>
+</p:sld>
+</file>
+
+<file path=ppt/slides/slide15.xml><?xml version="1.0" encoding="utf-8"?>
+<p:sld xmlns:a="http://schemas.openxmlformats.org/drawingml/2006/main" xmlns:r="http://schemas.openxmlformats.org/officeDocument/2006/relationships" xmlns:p="http://schemas.openxmlformats.org/presentationml/2006/main">
+  <p:cSld>
+    <p:spTree>
+      <p:nvGrpSpPr>
+        <p:cNvPr id="1" name=""/>
+        <p:cNvGrpSpPr/>
+        <p:nvPr/>
+      </p:nvGrpSpPr>
+      <p:grpSpPr>
+        <a:xfrm>
+          <a:off x="0" y="0"/>
+          <a:ext cx="0" cy="0"/>
+          <a:chOff x="0" y="0"/>
+          <a:chExt cx="0" cy="0"/>
+        </a:xfrm>
+      </p:grpSpPr>
+      <p:sp>
+        <p:nvSpPr>
+          <p:cNvPr id="2" name="Título 1">
+            <a:extLst>
+              <a:ext uri="{FF2B5EF4-FFF2-40B4-BE49-F238E27FC236}">
+                <a16:creationId xmlns:a16="http://schemas.microsoft.com/office/drawing/2014/main" id="{E1BF4364-A6CD-4460-A48D-6779B48ADDBE}"/>
+              </a:ext>
+            </a:extLst>
+          </p:cNvPr>
+          <p:cNvSpPr>
+            <a:spLocks noGrp="1"/>
+          </p:cNvSpPr>
+          <p:nvPr>
+            <p:ph type="title"/>
+          </p:nvPr>
+        </p:nvSpPr>
+        <p:spPr>
+          <a:xfrm>
+            <a:off x="338845" y="1030102"/>
+            <a:ext cx="9692640" cy="811983"/>
+          </a:xfrm>
+        </p:spPr>
+        <p:txBody>
+          <a:bodyPr>
+            <a:noAutofit/>
+          </a:bodyPr>
+          <a:lstStyle/>
+          <a:p>
+            <a:r>
+              <a:rPr lang="pt-BR" sz="3600" b="1" dirty="0">
+                <a:solidFill>
+                  <a:srgbClr val="00758F"/>
+                </a:solidFill>
+              </a:rPr>
+              <a:t>Exercícios:</a:t>
+            </a:r>
+            <a:br>
+              <a:rPr lang="pt-BR" sz="3600" b="1" dirty="0">
+                <a:solidFill>
+                  <a:srgbClr val="F39211"/>
+                </a:solidFill>
+              </a:rPr>
+            </a:br>
+            <a:r>
+              <a:rPr lang="pt-BR" sz="3600" b="1" dirty="0">
+                <a:solidFill>
+                  <a:srgbClr val="F39211"/>
+                </a:solidFill>
+              </a:rPr>
+              <a:t>1.0 - SELECT e INSERT de informações</a:t>
+            </a:r>
+            <a:br>
+              <a:rPr lang="pt-BR" sz="3600" b="1" dirty="0">
+                <a:solidFill>
+                  <a:srgbClr val="F39211"/>
+                </a:solidFill>
+              </a:rPr>
+            </a:br>
+            <a:endParaRPr lang="pt-BR" sz="3600" i="1" dirty="0">
+              <a:solidFill>
+                <a:srgbClr val="F39211"/>
+              </a:solidFill>
+            </a:endParaRPr>
+          </a:p>
+        </p:txBody>
+      </p:sp>
+      <p:pic>
+        <p:nvPicPr>
+          <p:cNvPr id="4" name="Picture 6" descr="https://www.mysql.com/common/logos/logo-mysql-170x115.png">
+            <a:extLst>
+              <a:ext uri="{FF2B5EF4-FFF2-40B4-BE49-F238E27FC236}">
+                <a16:creationId xmlns:a16="http://schemas.microsoft.com/office/drawing/2014/main" id="{441DFD02-E8A2-4690-9CD7-1CC407F2024E}"/>
+              </a:ext>
+            </a:extLst>
+          </p:cNvPr>
+          <p:cNvPicPr>
+            <a:picLocks noChangeAspect="1" noChangeArrowheads="1"/>
+          </p:cNvPicPr>
+          <p:nvPr/>
+        </p:nvPicPr>
+        <p:blipFill>
+          <a:blip r:embed="rId2">
+            <a:extLst>
+              <a:ext uri="{28A0092B-C50C-407E-A947-70E740481C1C}">
+                <a14:useLocalDpi xmlns:a14="http://schemas.microsoft.com/office/drawing/2010/main" val="0"/>
+              </a:ext>
+            </a:extLst>
+          </a:blip>
+          <a:srcRect/>
+          <a:stretch>
+            <a:fillRect/>
+          </a:stretch>
+        </p:blipFill>
+        <p:spPr bwMode="auto">
+          <a:xfrm>
+            <a:off x="9774793" y="5753675"/>
+            <a:ext cx="1385775" cy="936973"/>
+          </a:xfrm>
+          <a:prstGeom prst="rect">
+            <a:avLst/>
+          </a:prstGeom>
+          <a:noFill/>
+          <a:extLst>
+            <a:ext uri="{909E8E84-426E-40DD-AFC4-6F175D3DCCD1}">
+              <a14:hiddenFill xmlns:a14="http://schemas.microsoft.com/office/drawing/2010/main">
+                <a:solidFill>
+                  <a:srgbClr val="FFFFFF"/>
+                </a:solidFill>
+              </a14:hiddenFill>
+            </a:ext>
+          </a:extLst>
+        </p:spPr>
+      </p:pic>
+      <p:sp>
+        <p:nvSpPr>
+          <p:cNvPr id="5" name="CaixaDeTexto 4">
+            <a:extLst>
+              <a:ext uri="{FF2B5EF4-FFF2-40B4-BE49-F238E27FC236}">
+                <a16:creationId xmlns:a16="http://schemas.microsoft.com/office/drawing/2014/main" id="{890DD339-B99C-43BD-99AF-28040E9B3E9C}"/>
+              </a:ext>
+            </a:extLst>
+          </p:cNvPr>
+          <p:cNvSpPr txBox="1"/>
+          <p:nvPr/>
+        </p:nvSpPr>
+        <p:spPr>
+          <a:xfrm>
+            <a:off x="338844" y="1436093"/>
+            <a:ext cx="10938756" cy="5295424"/>
+          </a:xfrm>
+          <a:prstGeom prst="rect">
+            <a:avLst/>
+          </a:prstGeom>
+          <a:noFill/>
+        </p:spPr>
+        <p:txBody>
+          <a:bodyPr wrap="square" rtlCol="0">
+            <a:spAutoFit/>
+          </a:bodyPr>
+          <a:lstStyle/>
+          <a:p>
+            <a:pPr>
+              <a:lnSpc>
+                <a:spcPct val="107000"/>
+              </a:lnSpc>
+              <a:spcAft>
+                <a:spcPts val="800"/>
+              </a:spcAft>
+            </a:pPr>
+            <a:r>
+              <a:rPr lang="pt-BR" sz="2400" b="1" dirty="0">
+                <a:solidFill>
+                  <a:srgbClr val="000000"/>
+                </a:solidFill>
+                <a:ea typeface="Calibri" panose="020F0502020204030204" pitchFamily="34" charset="0"/>
+                <a:cs typeface="Times New Roman" panose="02020603050405020304" pitchFamily="18" charset="0"/>
+              </a:rPr>
+              <a:t>1 - Tabela: </a:t>
+            </a:r>
+            <a:r>
+              <a:rPr lang="pt-BR" sz="2400" i="1" dirty="0">
+                <a:solidFill>
+                  <a:srgbClr val="000000"/>
+                </a:solidFill>
+                <a:ea typeface="Calibri" panose="020F0502020204030204" pitchFamily="34" charset="0"/>
+                <a:cs typeface="Times New Roman" panose="02020603050405020304" pitchFamily="18" charset="0"/>
+              </a:rPr>
+              <a:t>clientes</a:t>
+            </a:r>
+            <a:endParaRPr lang="pt-BR" sz="2400" dirty="0">
+              <a:ea typeface="Calibri" panose="020F0502020204030204" pitchFamily="34" charset="0"/>
+              <a:cs typeface="Times New Roman" panose="02020603050405020304" pitchFamily="18" charset="0"/>
+            </a:endParaRPr>
+          </a:p>
+          <a:p>
+            <a:pPr>
+              <a:lnSpc>
+                <a:spcPct val="107000"/>
+              </a:lnSpc>
+              <a:spcAft>
+                <a:spcPts val="800"/>
+              </a:spcAft>
+            </a:pPr>
+            <a:r>
+              <a:rPr lang="pt-BR" sz="1900" b="1" dirty="0">
+                <a:ea typeface="Calibri" panose="020F0502020204030204" pitchFamily="34" charset="0"/>
+                <a:cs typeface="Times New Roman" panose="02020603050405020304" pitchFamily="18" charset="0"/>
+              </a:rPr>
+              <a:t>Exemplo de </a:t>
+            </a:r>
+            <a:r>
+              <a:rPr lang="pt-BR" sz="1900" b="1" dirty="0">
+                <a:solidFill>
+                  <a:srgbClr val="000000"/>
+                </a:solidFill>
+                <a:ea typeface="Calibri" panose="020F0502020204030204" pitchFamily="34" charset="0"/>
+                <a:cs typeface="Times New Roman" panose="02020603050405020304" pitchFamily="18" charset="0"/>
+              </a:rPr>
+              <a:t>INSERT</a:t>
+            </a:r>
+            <a:r>
+              <a:rPr lang="pt-BR" sz="1900" b="1" dirty="0">
+                <a:ea typeface="Calibri" panose="020F0502020204030204" pitchFamily="34" charset="0"/>
+                <a:cs typeface="Times New Roman" panose="02020603050405020304" pitchFamily="18" charset="0"/>
+              </a:rPr>
+              <a:t>:</a:t>
+            </a:r>
+            <a:endParaRPr lang="pt-BR" sz="1900" dirty="0">
+              <a:ea typeface="Calibri" panose="020F0502020204030204" pitchFamily="34" charset="0"/>
+              <a:cs typeface="Times New Roman" panose="02020603050405020304" pitchFamily="18" charset="0"/>
+            </a:endParaRPr>
+          </a:p>
+          <a:p>
+            <a:pPr>
+              <a:lnSpc>
+                <a:spcPct val="107000"/>
+              </a:lnSpc>
+              <a:spcAft>
+                <a:spcPts val="0"/>
+              </a:spcAft>
+            </a:pPr>
+            <a:r>
+              <a:rPr lang="pt-BR" b="1" dirty="0">
+                <a:solidFill>
+                  <a:srgbClr val="0000FF"/>
+                </a:solidFill>
+                <a:latin typeface="Courier New" panose="02070309020205020404" pitchFamily="49" charset="0"/>
+                <a:ea typeface="Times New Roman" panose="02020603050405020304" pitchFamily="18" charset="0"/>
+                <a:cs typeface="Times New Roman" panose="02020603050405020304" pitchFamily="18" charset="0"/>
+              </a:rPr>
+              <a:t>INSERT</a:t>
+            </a:r>
+            <a:r>
+              <a:rPr lang="pt-BR" dirty="0">
+                <a:solidFill>
+                  <a:srgbClr val="000000"/>
+                </a:solidFill>
+                <a:latin typeface="Courier New" panose="02070309020205020404" pitchFamily="49" charset="0"/>
+                <a:ea typeface="Times New Roman" panose="02020603050405020304" pitchFamily="18" charset="0"/>
+                <a:cs typeface="Times New Roman" panose="02020603050405020304" pitchFamily="18" charset="0"/>
+              </a:rPr>
+              <a:t> </a:t>
+            </a:r>
+            <a:r>
+              <a:rPr lang="pt-BR" b="1" dirty="0">
+                <a:solidFill>
+                  <a:srgbClr val="0000FF"/>
+                </a:solidFill>
+                <a:latin typeface="Courier New" panose="02070309020205020404" pitchFamily="49" charset="0"/>
+                <a:ea typeface="Times New Roman" panose="02020603050405020304" pitchFamily="18" charset="0"/>
+                <a:cs typeface="Times New Roman" panose="02020603050405020304" pitchFamily="18" charset="0"/>
+              </a:rPr>
+              <a:t>INTO</a:t>
+            </a:r>
+            <a:r>
+              <a:rPr lang="pt-BR" dirty="0">
+                <a:solidFill>
+                  <a:srgbClr val="000000"/>
+                </a:solidFill>
+                <a:latin typeface="Courier New" panose="02070309020205020404" pitchFamily="49" charset="0"/>
+                <a:ea typeface="Times New Roman" panose="02020603050405020304" pitchFamily="18" charset="0"/>
+                <a:cs typeface="Times New Roman" panose="02020603050405020304" pitchFamily="18" charset="0"/>
+              </a:rPr>
+              <a:t> clientes </a:t>
+            </a:r>
+            <a:r>
+              <a:rPr lang="pt-BR" b="1" dirty="0">
+                <a:solidFill>
+                  <a:srgbClr val="000080"/>
+                </a:solidFill>
+                <a:latin typeface="Courier New" panose="02070309020205020404" pitchFamily="49" charset="0"/>
+                <a:ea typeface="Times New Roman" panose="02020603050405020304" pitchFamily="18" charset="0"/>
+                <a:cs typeface="Times New Roman" panose="02020603050405020304" pitchFamily="18" charset="0"/>
+              </a:rPr>
+              <a:t>(</a:t>
+            </a:r>
+            <a:r>
+              <a:rPr lang="pt-BR" dirty="0" err="1">
+                <a:solidFill>
+                  <a:srgbClr val="000000"/>
+                </a:solidFill>
+                <a:latin typeface="Courier New" panose="02070309020205020404" pitchFamily="49" charset="0"/>
+                <a:ea typeface="Times New Roman" panose="02020603050405020304" pitchFamily="18" charset="0"/>
+                <a:cs typeface="Times New Roman" panose="02020603050405020304" pitchFamily="18" charset="0"/>
+              </a:rPr>
+              <a:t>nome_cliente</a:t>
+            </a:r>
+            <a:r>
+              <a:rPr lang="pt-BR" b="1" dirty="0">
+                <a:solidFill>
+                  <a:srgbClr val="000080"/>
+                </a:solidFill>
+                <a:latin typeface="Courier New" panose="02070309020205020404" pitchFamily="49" charset="0"/>
+                <a:ea typeface="Times New Roman" panose="02020603050405020304" pitchFamily="18" charset="0"/>
+                <a:cs typeface="Times New Roman" panose="02020603050405020304" pitchFamily="18" charset="0"/>
+              </a:rPr>
+              <a:t>,</a:t>
+            </a:r>
+            <a:r>
+              <a:rPr lang="pt-BR" dirty="0">
+                <a:solidFill>
+                  <a:srgbClr val="000000"/>
+                </a:solidFill>
+                <a:latin typeface="Courier New" panose="02070309020205020404" pitchFamily="49" charset="0"/>
+                <a:ea typeface="Times New Roman" panose="02020603050405020304" pitchFamily="18" charset="0"/>
+                <a:cs typeface="Times New Roman" panose="02020603050405020304" pitchFamily="18" charset="0"/>
+              </a:rPr>
+              <a:t> </a:t>
+            </a:r>
+            <a:r>
+              <a:rPr lang="pt-BR" dirty="0" err="1">
+                <a:solidFill>
+                  <a:srgbClr val="000000"/>
+                </a:solidFill>
+                <a:latin typeface="Courier New" panose="02070309020205020404" pitchFamily="49" charset="0"/>
+                <a:ea typeface="Times New Roman" panose="02020603050405020304" pitchFamily="18" charset="0"/>
+                <a:cs typeface="Times New Roman" panose="02020603050405020304" pitchFamily="18" charset="0"/>
+              </a:rPr>
+              <a:t>cpf</a:t>
+            </a:r>
+            <a:r>
+              <a:rPr lang="pt-BR" b="1" dirty="0">
+                <a:solidFill>
+                  <a:srgbClr val="000080"/>
+                </a:solidFill>
+                <a:latin typeface="Courier New" panose="02070309020205020404" pitchFamily="49" charset="0"/>
+                <a:ea typeface="Times New Roman" panose="02020603050405020304" pitchFamily="18" charset="0"/>
+                <a:cs typeface="Times New Roman" panose="02020603050405020304" pitchFamily="18" charset="0"/>
+              </a:rPr>
+              <a:t>,</a:t>
+            </a:r>
+            <a:r>
+              <a:rPr lang="pt-BR" dirty="0">
+                <a:solidFill>
+                  <a:srgbClr val="000000"/>
+                </a:solidFill>
+                <a:latin typeface="Courier New" panose="02070309020205020404" pitchFamily="49" charset="0"/>
+                <a:ea typeface="Times New Roman" panose="02020603050405020304" pitchFamily="18" charset="0"/>
+                <a:cs typeface="Times New Roman" panose="02020603050405020304" pitchFamily="18" charset="0"/>
+              </a:rPr>
+              <a:t> cidade</a:t>
+            </a:r>
+            <a:r>
+              <a:rPr lang="pt-BR" b="1" dirty="0">
+                <a:solidFill>
+                  <a:srgbClr val="000080"/>
+                </a:solidFill>
+                <a:latin typeface="Courier New" panose="02070309020205020404" pitchFamily="49" charset="0"/>
+                <a:ea typeface="Times New Roman" panose="02020603050405020304" pitchFamily="18" charset="0"/>
+                <a:cs typeface="Times New Roman" panose="02020603050405020304" pitchFamily="18" charset="0"/>
+              </a:rPr>
+              <a:t>,</a:t>
+            </a:r>
+            <a:r>
+              <a:rPr lang="pt-BR" dirty="0">
+                <a:solidFill>
+                  <a:srgbClr val="000000"/>
+                </a:solidFill>
+                <a:latin typeface="Courier New" panose="02070309020205020404" pitchFamily="49" charset="0"/>
+                <a:ea typeface="Times New Roman" panose="02020603050405020304" pitchFamily="18" charset="0"/>
+                <a:cs typeface="Times New Roman" panose="02020603050405020304" pitchFamily="18" charset="0"/>
+              </a:rPr>
+              <a:t> estado</a:t>
+            </a:r>
+            <a:r>
+              <a:rPr lang="pt-BR" b="1" dirty="0">
+                <a:solidFill>
+                  <a:srgbClr val="000080"/>
+                </a:solidFill>
+                <a:latin typeface="Courier New" panose="02070309020205020404" pitchFamily="49" charset="0"/>
+                <a:ea typeface="Times New Roman" panose="02020603050405020304" pitchFamily="18" charset="0"/>
+                <a:cs typeface="Times New Roman" panose="02020603050405020304" pitchFamily="18" charset="0"/>
+              </a:rPr>
+              <a:t>,</a:t>
+            </a:r>
+            <a:r>
+              <a:rPr lang="pt-BR" dirty="0">
+                <a:solidFill>
+                  <a:srgbClr val="000000"/>
+                </a:solidFill>
+                <a:latin typeface="Courier New" panose="02070309020205020404" pitchFamily="49" charset="0"/>
+                <a:ea typeface="Times New Roman" panose="02020603050405020304" pitchFamily="18" charset="0"/>
+                <a:cs typeface="Times New Roman" panose="02020603050405020304" pitchFamily="18" charset="0"/>
+              </a:rPr>
+              <a:t> telefone</a:t>
+            </a:r>
+            <a:r>
+              <a:rPr lang="pt-BR" b="1" dirty="0">
+                <a:solidFill>
+                  <a:srgbClr val="000080"/>
+                </a:solidFill>
+                <a:latin typeface="Courier New" panose="02070309020205020404" pitchFamily="49" charset="0"/>
+                <a:ea typeface="Times New Roman" panose="02020603050405020304" pitchFamily="18" charset="0"/>
+                <a:cs typeface="Times New Roman" panose="02020603050405020304" pitchFamily="18" charset="0"/>
+              </a:rPr>
+              <a:t>,</a:t>
+            </a:r>
+            <a:r>
+              <a:rPr lang="pt-BR" dirty="0">
+                <a:solidFill>
+                  <a:srgbClr val="000000"/>
+                </a:solidFill>
+                <a:latin typeface="Courier New" panose="02070309020205020404" pitchFamily="49" charset="0"/>
+                <a:ea typeface="Times New Roman" panose="02020603050405020304" pitchFamily="18" charset="0"/>
+                <a:cs typeface="Times New Roman" panose="02020603050405020304" pitchFamily="18" charset="0"/>
+              </a:rPr>
+              <a:t> ativo</a:t>
+            </a:r>
+            <a:r>
+              <a:rPr lang="pt-BR" b="1" dirty="0">
+                <a:solidFill>
+                  <a:srgbClr val="000080"/>
+                </a:solidFill>
+                <a:latin typeface="Courier New" panose="02070309020205020404" pitchFamily="49" charset="0"/>
+                <a:ea typeface="Times New Roman" panose="02020603050405020304" pitchFamily="18" charset="0"/>
+                <a:cs typeface="Times New Roman" panose="02020603050405020304" pitchFamily="18" charset="0"/>
+              </a:rPr>
+              <a:t>)</a:t>
+            </a:r>
+            <a:endParaRPr lang="pt-BR" dirty="0">
+              <a:latin typeface="Calibri" panose="020F0502020204030204" pitchFamily="34" charset="0"/>
+              <a:ea typeface="Calibri" panose="020F0502020204030204" pitchFamily="34" charset="0"/>
+              <a:cs typeface="Times New Roman" panose="02020603050405020304" pitchFamily="18" charset="0"/>
+            </a:endParaRPr>
+          </a:p>
+          <a:p>
+            <a:pPr>
+              <a:lnSpc>
+                <a:spcPct val="107000"/>
+              </a:lnSpc>
+              <a:spcAft>
+                <a:spcPts val="0"/>
+              </a:spcAft>
+            </a:pPr>
+            <a:r>
+              <a:rPr lang="pt-BR" b="1" dirty="0">
+                <a:solidFill>
+                  <a:srgbClr val="0000FF"/>
+                </a:solidFill>
+                <a:latin typeface="Courier New" panose="02070309020205020404" pitchFamily="49" charset="0"/>
+                <a:ea typeface="Times New Roman" panose="02020603050405020304" pitchFamily="18" charset="0"/>
+                <a:cs typeface="Times New Roman" panose="02020603050405020304" pitchFamily="18" charset="0"/>
+              </a:rPr>
+              <a:t>VALUES</a:t>
+            </a:r>
+            <a:r>
+              <a:rPr lang="pt-BR" dirty="0">
+                <a:solidFill>
+                  <a:srgbClr val="000000"/>
+                </a:solidFill>
+                <a:latin typeface="Courier New" panose="02070309020205020404" pitchFamily="49" charset="0"/>
+                <a:ea typeface="Times New Roman" panose="02020603050405020304" pitchFamily="18" charset="0"/>
+                <a:cs typeface="Times New Roman" panose="02020603050405020304" pitchFamily="18" charset="0"/>
+              </a:rPr>
+              <a:t> </a:t>
+            </a:r>
+            <a:r>
+              <a:rPr lang="pt-BR" b="1" dirty="0">
+                <a:solidFill>
+                  <a:srgbClr val="000080"/>
+                </a:solidFill>
+                <a:latin typeface="Courier New" panose="02070309020205020404" pitchFamily="49" charset="0"/>
+                <a:ea typeface="Times New Roman" panose="02020603050405020304" pitchFamily="18" charset="0"/>
+                <a:cs typeface="Times New Roman" panose="02020603050405020304" pitchFamily="18" charset="0"/>
+              </a:rPr>
+              <a:t>(</a:t>
+            </a:r>
+            <a:r>
+              <a:rPr lang="pt-BR" dirty="0">
+                <a:solidFill>
+                  <a:srgbClr val="808080"/>
+                </a:solidFill>
+                <a:latin typeface="Courier New" panose="02070309020205020404" pitchFamily="49" charset="0"/>
+                <a:ea typeface="Times New Roman" panose="02020603050405020304" pitchFamily="18" charset="0"/>
+                <a:cs typeface="Times New Roman" panose="02020603050405020304" pitchFamily="18" charset="0"/>
+              </a:rPr>
+              <a:t>'Ana Souza'</a:t>
+            </a:r>
+            <a:r>
+              <a:rPr lang="pt-BR" b="1" dirty="0">
+                <a:solidFill>
+                  <a:srgbClr val="000080"/>
+                </a:solidFill>
+                <a:latin typeface="Courier New" panose="02070309020205020404" pitchFamily="49" charset="0"/>
+                <a:ea typeface="Times New Roman" panose="02020603050405020304" pitchFamily="18" charset="0"/>
+                <a:cs typeface="Times New Roman" panose="02020603050405020304" pitchFamily="18" charset="0"/>
+              </a:rPr>
+              <a:t>,</a:t>
+            </a:r>
+            <a:r>
+              <a:rPr lang="pt-BR" dirty="0">
+                <a:solidFill>
+                  <a:srgbClr val="000000"/>
+                </a:solidFill>
+                <a:latin typeface="Courier New" panose="02070309020205020404" pitchFamily="49" charset="0"/>
+                <a:ea typeface="Times New Roman" panose="02020603050405020304" pitchFamily="18" charset="0"/>
+                <a:cs typeface="Times New Roman" panose="02020603050405020304" pitchFamily="18" charset="0"/>
+              </a:rPr>
+              <a:t> </a:t>
+            </a:r>
+            <a:r>
+              <a:rPr lang="pt-BR" dirty="0">
+                <a:solidFill>
+                  <a:srgbClr val="808080"/>
+                </a:solidFill>
+                <a:latin typeface="Courier New" panose="02070309020205020404" pitchFamily="49" charset="0"/>
+                <a:ea typeface="Times New Roman" panose="02020603050405020304" pitchFamily="18" charset="0"/>
+                <a:cs typeface="Times New Roman" panose="02020603050405020304" pitchFamily="18" charset="0"/>
+              </a:rPr>
+              <a:t>'12345678901'</a:t>
+            </a:r>
+            <a:r>
+              <a:rPr lang="pt-BR" b="1" dirty="0">
+                <a:solidFill>
+                  <a:srgbClr val="000080"/>
+                </a:solidFill>
+                <a:latin typeface="Courier New" panose="02070309020205020404" pitchFamily="49" charset="0"/>
+                <a:ea typeface="Times New Roman" panose="02020603050405020304" pitchFamily="18" charset="0"/>
+                <a:cs typeface="Times New Roman" panose="02020603050405020304" pitchFamily="18" charset="0"/>
+              </a:rPr>
+              <a:t>,</a:t>
+            </a:r>
+            <a:r>
+              <a:rPr lang="pt-BR" dirty="0">
+                <a:solidFill>
+                  <a:srgbClr val="000000"/>
+                </a:solidFill>
+                <a:latin typeface="Courier New" panose="02070309020205020404" pitchFamily="49" charset="0"/>
+                <a:ea typeface="Times New Roman" panose="02020603050405020304" pitchFamily="18" charset="0"/>
+                <a:cs typeface="Times New Roman" panose="02020603050405020304" pitchFamily="18" charset="0"/>
+              </a:rPr>
+              <a:t> </a:t>
+            </a:r>
+            <a:r>
+              <a:rPr lang="pt-BR" dirty="0">
+                <a:solidFill>
+                  <a:srgbClr val="808080"/>
+                </a:solidFill>
+                <a:latin typeface="Courier New" panose="02070309020205020404" pitchFamily="49" charset="0"/>
+                <a:ea typeface="Times New Roman" panose="02020603050405020304" pitchFamily="18" charset="0"/>
+                <a:cs typeface="Times New Roman" panose="02020603050405020304" pitchFamily="18" charset="0"/>
+              </a:rPr>
+              <a:t>'São Paulo'</a:t>
+            </a:r>
+            <a:r>
+              <a:rPr lang="pt-BR" b="1" dirty="0">
+                <a:solidFill>
+                  <a:srgbClr val="000080"/>
+                </a:solidFill>
+                <a:latin typeface="Courier New" panose="02070309020205020404" pitchFamily="49" charset="0"/>
+                <a:ea typeface="Times New Roman" panose="02020603050405020304" pitchFamily="18" charset="0"/>
+                <a:cs typeface="Times New Roman" panose="02020603050405020304" pitchFamily="18" charset="0"/>
+              </a:rPr>
+              <a:t>,</a:t>
+            </a:r>
+            <a:r>
+              <a:rPr lang="pt-BR" dirty="0">
+                <a:solidFill>
+                  <a:srgbClr val="000000"/>
+                </a:solidFill>
+                <a:latin typeface="Courier New" panose="02070309020205020404" pitchFamily="49" charset="0"/>
+                <a:ea typeface="Times New Roman" panose="02020603050405020304" pitchFamily="18" charset="0"/>
+                <a:cs typeface="Times New Roman" panose="02020603050405020304" pitchFamily="18" charset="0"/>
+              </a:rPr>
+              <a:t> </a:t>
+            </a:r>
+            <a:r>
+              <a:rPr lang="pt-BR" dirty="0">
+                <a:solidFill>
+                  <a:srgbClr val="808080"/>
+                </a:solidFill>
+                <a:latin typeface="Courier New" panose="02070309020205020404" pitchFamily="49" charset="0"/>
+                <a:ea typeface="Times New Roman" panose="02020603050405020304" pitchFamily="18" charset="0"/>
+                <a:cs typeface="Times New Roman" panose="02020603050405020304" pitchFamily="18" charset="0"/>
+              </a:rPr>
+              <a:t>'SP'</a:t>
+            </a:r>
+            <a:r>
+              <a:rPr lang="pt-BR" b="1" dirty="0">
+                <a:solidFill>
+                  <a:srgbClr val="000080"/>
+                </a:solidFill>
+                <a:latin typeface="Courier New" panose="02070309020205020404" pitchFamily="49" charset="0"/>
+                <a:ea typeface="Times New Roman" panose="02020603050405020304" pitchFamily="18" charset="0"/>
+                <a:cs typeface="Times New Roman" panose="02020603050405020304" pitchFamily="18" charset="0"/>
+              </a:rPr>
+              <a:t>,</a:t>
+            </a:r>
+            <a:r>
+              <a:rPr lang="pt-BR" dirty="0">
+                <a:solidFill>
+                  <a:srgbClr val="000000"/>
+                </a:solidFill>
+                <a:latin typeface="Courier New" panose="02070309020205020404" pitchFamily="49" charset="0"/>
+                <a:ea typeface="Times New Roman" panose="02020603050405020304" pitchFamily="18" charset="0"/>
+                <a:cs typeface="Times New Roman" panose="02020603050405020304" pitchFamily="18" charset="0"/>
+              </a:rPr>
+              <a:t> </a:t>
+            </a:r>
+            <a:r>
+              <a:rPr lang="pt-BR" dirty="0">
+                <a:solidFill>
+                  <a:srgbClr val="808080"/>
+                </a:solidFill>
+                <a:latin typeface="Courier New" panose="02070309020205020404" pitchFamily="49" charset="0"/>
+                <a:ea typeface="Times New Roman" panose="02020603050405020304" pitchFamily="18" charset="0"/>
+                <a:cs typeface="Times New Roman" panose="02020603050405020304" pitchFamily="18" charset="0"/>
+              </a:rPr>
+              <a:t>'(11)91234-5678'</a:t>
+            </a:r>
+            <a:r>
+              <a:rPr lang="pt-BR" b="1" dirty="0">
+                <a:solidFill>
+                  <a:srgbClr val="000080"/>
+                </a:solidFill>
+                <a:latin typeface="Courier New" panose="02070309020205020404" pitchFamily="49" charset="0"/>
+                <a:ea typeface="Times New Roman" panose="02020603050405020304" pitchFamily="18" charset="0"/>
+                <a:cs typeface="Times New Roman" panose="02020603050405020304" pitchFamily="18" charset="0"/>
+              </a:rPr>
+              <a:t>,</a:t>
+            </a:r>
+            <a:r>
+              <a:rPr lang="pt-BR" dirty="0">
+                <a:solidFill>
+                  <a:srgbClr val="000000"/>
+                </a:solidFill>
+                <a:latin typeface="Courier New" panose="02070309020205020404" pitchFamily="49" charset="0"/>
+                <a:ea typeface="Times New Roman" panose="02020603050405020304" pitchFamily="18" charset="0"/>
+                <a:cs typeface="Times New Roman" panose="02020603050405020304" pitchFamily="18" charset="0"/>
+              </a:rPr>
+              <a:t> </a:t>
+            </a:r>
+            <a:r>
+              <a:rPr lang="pt-BR" dirty="0">
+                <a:solidFill>
+                  <a:srgbClr val="FF8000"/>
+                </a:solidFill>
+                <a:latin typeface="Courier New" panose="02070309020205020404" pitchFamily="49" charset="0"/>
+                <a:ea typeface="Times New Roman" panose="02020603050405020304" pitchFamily="18" charset="0"/>
+                <a:cs typeface="Times New Roman" panose="02020603050405020304" pitchFamily="18" charset="0"/>
+              </a:rPr>
+              <a:t>1</a:t>
+            </a:r>
+            <a:r>
+              <a:rPr lang="pt-BR" b="1" dirty="0">
+                <a:solidFill>
+                  <a:srgbClr val="000080"/>
+                </a:solidFill>
+                <a:latin typeface="Courier New" panose="02070309020205020404" pitchFamily="49" charset="0"/>
+                <a:ea typeface="Times New Roman" panose="02020603050405020304" pitchFamily="18" charset="0"/>
+                <a:cs typeface="Times New Roman" panose="02020603050405020304" pitchFamily="18" charset="0"/>
+              </a:rPr>
+              <a:t>);</a:t>
+            </a:r>
+            <a:br>
+              <a:rPr lang="pt-BR" sz="1900" b="1" dirty="0">
+                <a:solidFill>
+                  <a:srgbClr val="000080"/>
+                </a:solidFill>
+                <a:latin typeface="Calibri" panose="020F0502020204030204" pitchFamily="34" charset="0"/>
+                <a:ea typeface="Calibri" panose="020F0502020204030204" pitchFamily="34" charset="0"/>
+                <a:cs typeface="Times New Roman" panose="02020603050405020304" pitchFamily="18" charset="0"/>
+              </a:rPr>
+            </a:br>
+            <a:endParaRPr lang="pt-BR" sz="1900" dirty="0">
+              <a:latin typeface="Calibri" panose="020F0502020204030204" pitchFamily="34" charset="0"/>
+              <a:ea typeface="Calibri" panose="020F0502020204030204" pitchFamily="34" charset="0"/>
+              <a:cs typeface="Times New Roman" panose="02020603050405020304" pitchFamily="18" charset="0"/>
+            </a:endParaRPr>
+          </a:p>
+          <a:p>
+            <a:pPr>
+              <a:lnSpc>
+                <a:spcPct val="107000"/>
+              </a:lnSpc>
+              <a:spcAft>
+                <a:spcPts val="800"/>
+              </a:spcAft>
+            </a:pPr>
+            <a:r>
+              <a:rPr lang="pt-BR" sz="1900" b="1" dirty="0">
+                <a:ea typeface="Calibri" panose="020F0502020204030204" pitchFamily="34" charset="0"/>
+                <a:cs typeface="Times New Roman" panose="02020603050405020304" pitchFamily="18" charset="0"/>
+              </a:rPr>
+              <a:t>Exemplo de </a:t>
+            </a:r>
+            <a:r>
+              <a:rPr lang="pt-BR" sz="1900" b="1" dirty="0">
+                <a:solidFill>
+                  <a:srgbClr val="000000"/>
+                </a:solidFill>
+                <a:ea typeface="Calibri" panose="020F0502020204030204" pitchFamily="34" charset="0"/>
+                <a:cs typeface="Times New Roman" panose="02020603050405020304" pitchFamily="18" charset="0"/>
+              </a:rPr>
+              <a:t>SELECT</a:t>
+            </a:r>
+            <a:r>
+              <a:rPr lang="pt-BR" sz="1900" b="1" dirty="0">
+                <a:ea typeface="Calibri" panose="020F0502020204030204" pitchFamily="34" charset="0"/>
+                <a:cs typeface="Times New Roman" panose="02020603050405020304" pitchFamily="18" charset="0"/>
+              </a:rPr>
+              <a:t>:</a:t>
+            </a:r>
+            <a:endParaRPr lang="pt-BR" sz="1900" dirty="0">
+              <a:ea typeface="Calibri" panose="020F0502020204030204" pitchFamily="34" charset="0"/>
+              <a:cs typeface="Times New Roman" panose="02020603050405020304" pitchFamily="18" charset="0"/>
+            </a:endParaRPr>
+          </a:p>
+          <a:p>
+            <a:pPr>
+              <a:lnSpc>
+                <a:spcPct val="107000"/>
+              </a:lnSpc>
+              <a:spcAft>
+                <a:spcPts val="0"/>
+              </a:spcAft>
+            </a:pPr>
+            <a:r>
+              <a:rPr lang="pt-BR" sz="1900" b="1" dirty="0">
+                <a:solidFill>
+                  <a:srgbClr val="0000FF"/>
+                </a:solidFill>
+                <a:latin typeface="Courier New" panose="02070309020205020404" pitchFamily="49" charset="0"/>
+                <a:ea typeface="Times New Roman" panose="02020603050405020304" pitchFamily="18" charset="0"/>
+                <a:cs typeface="Times New Roman" panose="02020603050405020304" pitchFamily="18" charset="0"/>
+              </a:rPr>
+              <a:t>SELECT</a:t>
+            </a:r>
+            <a:r>
+              <a:rPr lang="pt-BR" sz="1900" dirty="0">
+                <a:solidFill>
+                  <a:srgbClr val="000000"/>
+                </a:solidFill>
+                <a:latin typeface="Courier New" panose="02070309020205020404" pitchFamily="49" charset="0"/>
+                <a:ea typeface="Times New Roman" panose="02020603050405020304" pitchFamily="18" charset="0"/>
+                <a:cs typeface="Times New Roman" panose="02020603050405020304" pitchFamily="18" charset="0"/>
+              </a:rPr>
+              <a:t> </a:t>
+            </a:r>
+            <a:r>
+              <a:rPr lang="pt-BR" sz="1900" dirty="0" err="1">
+                <a:solidFill>
+                  <a:srgbClr val="000000"/>
+                </a:solidFill>
+                <a:latin typeface="Courier New" panose="02070309020205020404" pitchFamily="49" charset="0"/>
+                <a:ea typeface="Times New Roman" panose="02020603050405020304" pitchFamily="18" charset="0"/>
+                <a:cs typeface="Times New Roman" panose="02020603050405020304" pitchFamily="18" charset="0"/>
+              </a:rPr>
+              <a:t>nome_cliente</a:t>
+            </a:r>
+            <a:r>
+              <a:rPr lang="pt-BR" sz="1900" b="1" dirty="0">
+                <a:solidFill>
+                  <a:srgbClr val="000080"/>
+                </a:solidFill>
+                <a:latin typeface="Courier New" panose="02070309020205020404" pitchFamily="49" charset="0"/>
+                <a:ea typeface="Times New Roman" panose="02020603050405020304" pitchFamily="18" charset="0"/>
+                <a:cs typeface="Times New Roman" panose="02020603050405020304" pitchFamily="18" charset="0"/>
+              </a:rPr>
+              <a:t>,</a:t>
+            </a:r>
+            <a:r>
+              <a:rPr lang="pt-BR" sz="1900" dirty="0">
+                <a:solidFill>
+                  <a:srgbClr val="000000"/>
+                </a:solidFill>
+                <a:latin typeface="Courier New" panose="02070309020205020404" pitchFamily="49" charset="0"/>
+                <a:ea typeface="Times New Roman" panose="02020603050405020304" pitchFamily="18" charset="0"/>
+                <a:cs typeface="Times New Roman" panose="02020603050405020304" pitchFamily="18" charset="0"/>
+              </a:rPr>
+              <a:t> cidade</a:t>
+            </a:r>
+            <a:r>
+              <a:rPr lang="pt-BR" sz="1900" b="1" dirty="0">
+                <a:solidFill>
+                  <a:srgbClr val="000080"/>
+                </a:solidFill>
+                <a:latin typeface="Courier New" panose="02070309020205020404" pitchFamily="49" charset="0"/>
+                <a:ea typeface="Times New Roman" panose="02020603050405020304" pitchFamily="18" charset="0"/>
+                <a:cs typeface="Times New Roman" panose="02020603050405020304" pitchFamily="18" charset="0"/>
+              </a:rPr>
+              <a:t>,</a:t>
+            </a:r>
+            <a:r>
+              <a:rPr lang="pt-BR" sz="1900" dirty="0">
+                <a:solidFill>
+                  <a:srgbClr val="000000"/>
+                </a:solidFill>
+                <a:latin typeface="Courier New" panose="02070309020205020404" pitchFamily="49" charset="0"/>
+                <a:ea typeface="Times New Roman" panose="02020603050405020304" pitchFamily="18" charset="0"/>
+                <a:cs typeface="Times New Roman" panose="02020603050405020304" pitchFamily="18" charset="0"/>
+              </a:rPr>
+              <a:t> estado </a:t>
+            </a:r>
+            <a:r>
+              <a:rPr lang="pt-BR" sz="1900" b="1" dirty="0">
+                <a:solidFill>
+                  <a:srgbClr val="0000FF"/>
+                </a:solidFill>
+                <a:latin typeface="Courier New" panose="02070309020205020404" pitchFamily="49" charset="0"/>
+                <a:ea typeface="Times New Roman" panose="02020603050405020304" pitchFamily="18" charset="0"/>
+                <a:cs typeface="Times New Roman" panose="02020603050405020304" pitchFamily="18" charset="0"/>
+              </a:rPr>
+              <a:t>FROM</a:t>
+            </a:r>
+            <a:r>
+              <a:rPr lang="pt-BR" sz="1900" dirty="0">
+                <a:solidFill>
+                  <a:srgbClr val="000000"/>
+                </a:solidFill>
+                <a:latin typeface="Courier New" panose="02070309020205020404" pitchFamily="49" charset="0"/>
+                <a:ea typeface="Times New Roman" panose="02020603050405020304" pitchFamily="18" charset="0"/>
+                <a:cs typeface="Times New Roman" panose="02020603050405020304" pitchFamily="18" charset="0"/>
+              </a:rPr>
+              <a:t> clientes </a:t>
+            </a:r>
+            <a:r>
+              <a:rPr lang="pt-BR" sz="1900" b="1" dirty="0">
+                <a:solidFill>
+                  <a:srgbClr val="0000FF"/>
+                </a:solidFill>
+                <a:latin typeface="Courier New" panose="02070309020205020404" pitchFamily="49" charset="0"/>
+                <a:ea typeface="Times New Roman" panose="02020603050405020304" pitchFamily="18" charset="0"/>
+                <a:cs typeface="Times New Roman" panose="02020603050405020304" pitchFamily="18" charset="0"/>
+              </a:rPr>
+              <a:t>WHERE</a:t>
+            </a:r>
+            <a:r>
+              <a:rPr lang="pt-BR" sz="1900" dirty="0">
+                <a:solidFill>
+                  <a:srgbClr val="000000"/>
+                </a:solidFill>
+                <a:latin typeface="Courier New" panose="02070309020205020404" pitchFamily="49" charset="0"/>
+                <a:ea typeface="Times New Roman" panose="02020603050405020304" pitchFamily="18" charset="0"/>
+                <a:cs typeface="Times New Roman" panose="02020603050405020304" pitchFamily="18" charset="0"/>
+              </a:rPr>
+              <a:t> ativo </a:t>
+            </a:r>
+            <a:r>
+              <a:rPr lang="pt-BR" sz="1900" b="1" dirty="0">
+                <a:solidFill>
+                  <a:srgbClr val="000080"/>
+                </a:solidFill>
+                <a:latin typeface="Courier New" panose="02070309020205020404" pitchFamily="49" charset="0"/>
+                <a:ea typeface="Times New Roman" panose="02020603050405020304" pitchFamily="18" charset="0"/>
+                <a:cs typeface="Times New Roman" panose="02020603050405020304" pitchFamily="18" charset="0"/>
+              </a:rPr>
+              <a:t>=</a:t>
+            </a:r>
+            <a:r>
+              <a:rPr lang="pt-BR" sz="1900" dirty="0">
+                <a:solidFill>
+                  <a:srgbClr val="000000"/>
+                </a:solidFill>
+                <a:latin typeface="Courier New" panose="02070309020205020404" pitchFamily="49" charset="0"/>
+                <a:ea typeface="Times New Roman" panose="02020603050405020304" pitchFamily="18" charset="0"/>
+                <a:cs typeface="Times New Roman" panose="02020603050405020304" pitchFamily="18" charset="0"/>
+              </a:rPr>
+              <a:t> </a:t>
+            </a:r>
+            <a:r>
+              <a:rPr lang="pt-BR" sz="1900" dirty="0">
+                <a:solidFill>
+                  <a:srgbClr val="FF8000"/>
+                </a:solidFill>
+                <a:latin typeface="Courier New" panose="02070309020205020404" pitchFamily="49" charset="0"/>
+                <a:ea typeface="Times New Roman" panose="02020603050405020304" pitchFamily="18" charset="0"/>
+                <a:cs typeface="Times New Roman" panose="02020603050405020304" pitchFamily="18" charset="0"/>
+              </a:rPr>
+              <a:t>1</a:t>
+            </a:r>
+            <a:r>
+              <a:rPr lang="pt-BR" sz="1900" b="1" dirty="0">
+                <a:solidFill>
+                  <a:srgbClr val="000080"/>
+                </a:solidFill>
+                <a:latin typeface="Courier New" panose="02070309020205020404" pitchFamily="49" charset="0"/>
+                <a:ea typeface="Times New Roman" panose="02020603050405020304" pitchFamily="18" charset="0"/>
+                <a:cs typeface="Times New Roman" panose="02020603050405020304" pitchFamily="18" charset="0"/>
+              </a:rPr>
+              <a:t>;</a:t>
+            </a:r>
+            <a:endParaRPr lang="pt-BR" sz="1900" dirty="0">
+              <a:latin typeface="Calibri" panose="020F0502020204030204" pitchFamily="34" charset="0"/>
+              <a:ea typeface="Calibri" panose="020F0502020204030204" pitchFamily="34" charset="0"/>
+              <a:cs typeface="Times New Roman" panose="02020603050405020304" pitchFamily="18" charset="0"/>
+            </a:endParaRPr>
+          </a:p>
+          <a:p>
+            <a:pPr>
+              <a:lnSpc>
+                <a:spcPct val="107000"/>
+              </a:lnSpc>
+              <a:spcAft>
+                <a:spcPts val="800"/>
+              </a:spcAft>
+            </a:pPr>
+            <a:endParaRPr lang="pt-BR" sz="1900" dirty="0">
+              <a:latin typeface="Calibri" panose="020F0502020204030204" pitchFamily="34" charset="0"/>
+              <a:ea typeface="Calibri" panose="020F0502020204030204" pitchFamily="34" charset="0"/>
+              <a:cs typeface="Times New Roman" panose="02020603050405020304" pitchFamily="18" charset="0"/>
+            </a:endParaRPr>
+          </a:p>
+          <a:p>
+            <a:pPr>
+              <a:lnSpc>
+                <a:spcPct val="107000"/>
+              </a:lnSpc>
+              <a:spcAft>
+                <a:spcPts val="800"/>
+              </a:spcAft>
+            </a:pPr>
+            <a:r>
+              <a:rPr lang="pt-BR" sz="2000" i="1" dirty="0">
+                <a:ea typeface="Calibri" panose="020F0502020204030204" pitchFamily="34" charset="0"/>
+                <a:cs typeface="Times New Roman" panose="02020603050405020304" pitchFamily="18" charset="0"/>
+              </a:rPr>
+              <a:t>Exercício - INSERT (Aluno):</a:t>
+            </a:r>
+          </a:p>
+          <a:p>
+            <a:pPr>
+              <a:lnSpc>
+                <a:spcPct val="107000"/>
+              </a:lnSpc>
+              <a:spcAft>
+                <a:spcPts val="800"/>
+              </a:spcAft>
+            </a:pPr>
+            <a:r>
+              <a:rPr lang="pt-BR" sz="2000" dirty="0">
+                <a:ea typeface="Calibri" panose="020F0502020204030204" pitchFamily="34" charset="0"/>
+                <a:cs typeface="Times New Roman" panose="02020603050405020304" pitchFamily="18" charset="0"/>
+              </a:rPr>
+              <a:t>Cadastre um novo cliente chamado </a:t>
+            </a:r>
+            <a:r>
+              <a:rPr lang="pt-BR" sz="2000" b="1" dirty="0">
+                <a:ea typeface="Calibri" panose="020F0502020204030204" pitchFamily="34" charset="0"/>
+                <a:cs typeface="Times New Roman" panose="02020603050405020304" pitchFamily="18" charset="0"/>
+              </a:rPr>
+              <a:t>Carlos Almeida</a:t>
+            </a:r>
+            <a:r>
+              <a:rPr lang="pt-BR" sz="2000" dirty="0">
+                <a:ea typeface="Calibri" panose="020F0502020204030204" pitchFamily="34" charset="0"/>
+                <a:cs typeface="Times New Roman" panose="02020603050405020304" pitchFamily="18" charset="0"/>
+              </a:rPr>
+              <a:t>, CPF 98765432100, da cidade </a:t>
+            </a:r>
+            <a:r>
+              <a:rPr lang="pt-BR" sz="2000" b="1" dirty="0">
+                <a:ea typeface="Calibri" panose="020F0502020204030204" pitchFamily="34" charset="0"/>
+                <a:cs typeface="Times New Roman" panose="02020603050405020304" pitchFamily="18" charset="0"/>
+              </a:rPr>
+              <a:t>Rio de Janeiro (RJ)</a:t>
+            </a:r>
+            <a:r>
+              <a:rPr lang="pt-BR" sz="2000" dirty="0">
+                <a:ea typeface="Calibri" panose="020F0502020204030204" pitchFamily="34" charset="0"/>
+                <a:cs typeface="Times New Roman" panose="02020603050405020304" pitchFamily="18" charset="0"/>
+              </a:rPr>
+              <a:t>, telefone (21)98765-4321, ativo.</a:t>
+            </a:r>
+          </a:p>
+          <a:p>
+            <a:pPr>
+              <a:lnSpc>
+                <a:spcPct val="107000"/>
+              </a:lnSpc>
+              <a:spcAft>
+                <a:spcPts val="800"/>
+              </a:spcAft>
+            </a:pPr>
+            <a:endParaRPr lang="pt-BR" sz="2000" dirty="0">
+              <a:ea typeface="Calibri" panose="020F0502020204030204" pitchFamily="34" charset="0"/>
+              <a:cs typeface="Times New Roman" panose="02020603050405020304" pitchFamily="18" charset="0"/>
+            </a:endParaRPr>
+          </a:p>
+          <a:p>
+            <a:r>
+              <a:rPr lang="pt-BR" sz="2000" i="1" dirty="0">
+                <a:ea typeface="Times New Roman" panose="02020603050405020304" pitchFamily="18" charset="0"/>
+              </a:rPr>
+              <a:t>Exercício - SELECT (Aluno):</a:t>
+            </a:r>
+          </a:p>
+          <a:p>
+            <a:r>
+              <a:rPr lang="pt-BR" sz="2000" dirty="0">
+                <a:ea typeface="Times New Roman" panose="02020603050405020304" pitchFamily="18" charset="0"/>
+              </a:rPr>
+              <a:t>Liste o </a:t>
+            </a:r>
+            <a:r>
+              <a:rPr lang="pt-BR" sz="2000" b="1" dirty="0">
+                <a:ea typeface="Times New Roman" panose="02020603050405020304" pitchFamily="18" charset="0"/>
+              </a:rPr>
+              <a:t>nome e telefone</a:t>
+            </a:r>
+            <a:r>
+              <a:rPr lang="pt-BR" sz="2000" dirty="0">
+                <a:ea typeface="Times New Roman" panose="02020603050405020304" pitchFamily="18" charset="0"/>
+              </a:rPr>
+              <a:t> de todos os clientes que são da cidade de </a:t>
+            </a:r>
+            <a:r>
+              <a:rPr lang="pt-BR" sz="2000" b="1" dirty="0">
+                <a:ea typeface="Times New Roman" panose="02020603050405020304" pitchFamily="18" charset="0"/>
+              </a:rPr>
+              <a:t>São Paulo</a:t>
+            </a:r>
+            <a:r>
+              <a:rPr lang="pt-BR" sz="2000" dirty="0">
+                <a:ea typeface="Times New Roman" panose="02020603050405020304" pitchFamily="18" charset="0"/>
+              </a:rPr>
+              <a:t>.</a:t>
+            </a:r>
+          </a:p>
+        </p:txBody>
+      </p:sp>
+      <p:cxnSp>
+        <p:nvCxnSpPr>
+          <p:cNvPr id="9" name="Conector reto 8">
+            <a:extLst>
+              <a:ext uri="{FF2B5EF4-FFF2-40B4-BE49-F238E27FC236}">
+                <a16:creationId xmlns:a16="http://schemas.microsoft.com/office/drawing/2014/main" id="{C661113F-384D-42E8-A105-7BADD0FA15D9}"/>
+              </a:ext>
+            </a:extLst>
+          </p:cNvPr>
+          <p:cNvCxnSpPr>
+            <a:cxnSpLocks/>
+          </p:cNvCxnSpPr>
+          <p:nvPr/>
+        </p:nvCxnSpPr>
+        <p:spPr>
+          <a:xfrm>
+            <a:off x="338844" y="4235115"/>
+            <a:ext cx="10361240" cy="0"/>
+          </a:xfrm>
+          <a:prstGeom prst="line">
+            <a:avLst/>
+          </a:prstGeom>
+        </p:spPr>
+        <p:style>
+          <a:lnRef idx="1">
+            <a:schemeClr val="accent1"/>
+          </a:lnRef>
+          <a:fillRef idx="0">
+            <a:schemeClr val="accent1"/>
+          </a:fillRef>
+          <a:effectRef idx="0">
+            <a:schemeClr val="accent1"/>
+          </a:effectRef>
+          <a:fontRef idx="minor">
+            <a:schemeClr val="tx1"/>
+          </a:fontRef>
+        </p:style>
+      </p:cxnSp>
+    </p:spTree>
+    <p:extLst>
+      <p:ext uri="{BB962C8B-B14F-4D97-AF65-F5344CB8AC3E}">
+        <p14:creationId xmlns:p14="http://schemas.microsoft.com/office/powerpoint/2010/main" val="2806535984"/>
+      </p:ext>
+    </p:extLst>
+  </p:cSld>
+  <p:clrMapOvr>
+    <a:masterClrMapping/>
+  </p:clrMapOvr>
+</p:sld>
+</file>
+
+<file path=ppt/slides/slide16.xml><?xml version="1.0" encoding="utf-8"?>
+<p:sld xmlns:a="http://schemas.openxmlformats.org/drawingml/2006/main" xmlns:r="http://schemas.openxmlformats.org/officeDocument/2006/relationships" xmlns:p="http://schemas.openxmlformats.org/presentationml/2006/main">
+  <p:cSld>
+    <p:spTree>
+      <p:nvGrpSpPr>
+        <p:cNvPr id="1" name=""/>
+        <p:cNvGrpSpPr/>
+        <p:nvPr/>
+      </p:nvGrpSpPr>
+      <p:grpSpPr>
+        <a:xfrm>
+          <a:off x="0" y="0"/>
+          <a:ext cx="0" cy="0"/>
+          <a:chOff x="0" y="0"/>
+          <a:chExt cx="0" cy="0"/>
+        </a:xfrm>
+      </p:grpSpPr>
+      <p:sp>
+        <p:nvSpPr>
+          <p:cNvPr id="2" name="Título 1">
+            <a:extLst>
+              <a:ext uri="{FF2B5EF4-FFF2-40B4-BE49-F238E27FC236}">
+                <a16:creationId xmlns:a16="http://schemas.microsoft.com/office/drawing/2014/main" id="{E1BF4364-A6CD-4460-A48D-6779B48ADDBE}"/>
+              </a:ext>
+            </a:extLst>
+          </p:cNvPr>
+          <p:cNvSpPr>
+            <a:spLocks noGrp="1"/>
+          </p:cNvSpPr>
+          <p:nvPr>
+            <p:ph type="title"/>
+          </p:nvPr>
+        </p:nvSpPr>
+        <p:spPr>
+          <a:xfrm>
+            <a:off x="338845" y="1030102"/>
+            <a:ext cx="9692640" cy="811983"/>
+          </a:xfrm>
+        </p:spPr>
+        <p:txBody>
+          <a:bodyPr>
+            <a:noAutofit/>
+          </a:bodyPr>
+          <a:lstStyle/>
+          <a:p>
+            <a:r>
+              <a:rPr lang="pt-BR" sz="3600" b="1" dirty="0">
+                <a:solidFill>
+                  <a:srgbClr val="00758F"/>
+                </a:solidFill>
+              </a:rPr>
+              <a:t>Exercícios:</a:t>
+            </a:r>
+            <a:br>
+              <a:rPr lang="pt-BR" sz="3600" b="1" dirty="0">
+                <a:solidFill>
+                  <a:srgbClr val="F39211"/>
+                </a:solidFill>
+              </a:rPr>
+            </a:br>
+            <a:r>
+              <a:rPr lang="pt-BR" sz="3600" b="1" dirty="0">
+                <a:solidFill>
+                  <a:srgbClr val="F39211"/>
+                </a:solidFill>
+              </a:rPr>
+              <a:t>1.1 - SELECT e INSERT de informações</a:t>
+            </a:r>
+            <a:br>
+              <a:rPr lang="pt-BR" sz="3600" b="1" dirty="0">
+                <a:solidFill>
+                  <a:srgbClr val="F39211"/>
+                </a:solidFill>
+              </a:rPr>
+            </a:br>
+            <a:endParaRPr lang="pt-BR" sz="3600" i="1" dirty="0">
+              <a:solidFill>
+                <a:srgbClr val="F39211"/>
+              </a:solidFill>
+            </a:endParaRPr>
+          </a:p>
+        </p:txBody>
+      </p:sp>
+      <p:pic>
+        <p:nvPicPr>
+          <p:cNvPr id="4" name="Picture 6" descr="https://www.mysql.com/common/logos/logo-mysql-170x115.png">
+            <a:extLst>
+              <a:ext uri="{FF2B5EF4-FFF2-40B4-BE49-F238E27FC236}">
+                <a16:creationId xmlns:a16="http://schemas.microsoft.com/office/drawing/2014/main" id="{441DFD02-E8A2-4690-9CD7-1CC407F2024E}"/>
+              </a:ext>
+            </a:extLst>
+          </p:cNvPr>
+          <p:cNvPicPr>
+            <a:picLocks noChangeAspect="1" noChangeArrowheads="1"/>
+          </p:cNvPicPr>
+          <p:nvPr/>
+        </p:nvPicPr>
+        <p:blipFill>
+          <a:blip r:embed="rId2">
+            <a:extLst>
+              <a:ext uri="{28A0092B-C50C-407E-A947-70E740481C1C}">
+                <a14:useLocalDpi xmlns:a14="http://schemas.microsoft.com/office/drawing/2010/main" val="0"/>
+              </a:ext>
+            </a:extLst>
+          </a:blip>
+          <a:srcRect/>
+          <a:stretch>
+            <a:fillRect/>
+          </a:stretch>
+        </p:blipFill>
+        <p:spPr bwMode="auto">
+          <a:xfrm>
+            <a:off x="9774793" y="5753675"/>
+            <a:ext cx="1385775" cy="936973"/>
+          </a:xfrm>
+          <a:prstGeom prst="rect">
+            <a:avLst/>
+          </a:prstGeom>
+          <a:noFill/>
+          <a:extLst>
+            <a:ext uri="{909E8E84-426E-40DD-AFC4-6F175D3DCCD1}">
+              <a14:hiddenFill xmlns:a14="http://schemas.microsoft.com/office/drawing/2010/main">
+                <a:solidFill>
+                  <a:srgbClr val="FFFFFF"/>
+                </a:solidFill>
+              </a14:hiddenFill>
+            </a:ext>
+          </a:extLst>
+        </p:spPr>
+      </p:pic>
+      <p:sp>
+        <p:nvSpPr>
+          <p:cNvPr id="5" name="CaixaDeTexto 4">
+            <a:extLst>
+              <a:ext uri="{FF2B5EF4-FFF2-40B4-BE49-F238E27FC236}">
+                <a16:creationId xmlns:a16="http://schemas.microsoft.com/office/drawing/2014/main" id="{890DD339-B99C-43BD-99AF-28040E9B3E9C}"/>
+              </a:ext>
+            </a:extLst>
+          </p:cNvPr>
+          <p:cNvSpPr txBox="1"/>
+          <p:nvPr/>
+        </p:nvSpPr>
+        <p:spPr>
+          <a:xfrm>
+            <a:off x="338844" y="1436093"/>
+            <a:ext cx="10938756" cy="5225790"/>
+          </a:xfrm>
+          <a:prstGeom prst="rect">
+            <a:avLst/>
+          </a:prstGeom>
+          <a:noFill/>
+        </p:spPr>
+        <p:txBody>
+          <a:bodyPr wrap="square" rtlCol="0">
+            <a:spAutoFit/>
+          </a:bodyPr>
+          <a:lstStyle/>
+          <a:p>
+            <a:pPr>
+              <a:lnSpc>
+                <a:spcPct val="107000"/>
+              </a:lnSpc>
+              <a:spcAft>
+                <a:spcPts val="800"/>
+              </a:spcAft>
+            </a:pPr>
+            <a:r>
+              <a:rPr lang="pt-BR" sz="2400" b="1" dirty="0">
+                <a:solidFill>
+                  <a:srgbClr val="000000"/>
+                </a:solidFill>
+                <a:ea typeface="Calibri" panose="020F0502020204030204" pitchFamily="34" charset="0"/>
+                <a:cs typeface="Times New Roman" panose="02020603050405020304" pitchFamily="18" charset="0"/>
+              </a:rPr>
+              <a:t>2 - Tabela: </a:t>
+            </a:r>
+            <a:r>
+              <a:rPr lang="pt-BR" sz="2400" i="1" dirty="0">
+                <a:solidFill>
+                  <a:srgbClr val="000000"/>
+                </a:solidFill>
+                <a:ea typeface="Calibri" panose="020F0502020204030204" pitchFamily="34" charset="0"/>
+                <a:cs typeface="Times New Roman" panose="02020603050405020304" pitchFamily="18" charset="0"/>
+              </a:rPr>
+              <a:t>produtos</a:t>
+            </a:r>
+            <a:endParaRPr lang="pt-BR" sz="2400" dirty="0">
+              <a:ea typeface="Calibri" panose="020F0502020204030204" pitchFamily="34" charset="0"/>
+              <a:cs typeface="Times New Roman" panose="02020603050405020304" pitchFamily="18" charset="0"/>
+            </a:endParaRPr>
+          </a:p>
+          <a:p>
+            <a:pPr>
+              <a:lnSpc>
+                <a:spcPct val="107000"/>
+              </a:lnSpc>
+              <a:spcAft>
+                <a:spcPts val="800"/>
+              </a:spcAft>
+            </a:pPr>
+            <a:r>
+              <a:rPr lang="pt-BR" sz="1900" b="1" dirty="0">
+                <a:ea typeface="Calibri" panose="020F0502020204030204" pitchFamily="34" charset="0"/>
+                <a:cs typeface="Times New Roman" panose="02020603050405020304" pitchFamily="18" charset="0"/>
+              </a:rPr>
+              <a:t>Exemplo de INSERT:</a:t>
+            </a:r>
+          </a:p>
+          <a:p>
+            <a:pPr>
+              <a:lnSpc>
+                <a:spcPct val="107000"/>
+              </a:lnSpc>
+              <a:spcAft>
+                <a:spcPts val="0"/>
+              </a:spcAft>
+            </a:pPr>
+            <a:r>
+              <a:rPr lang="pt-BR" sz="1900" b="1" dirty="0">
+                <a:solidFill>
+                  <a:srgbClr val="0000FF"/>
+                </a:solidFill>
+                <a:latin typeface="Courier New" panose="02070309020205020404" pitchFamily="49" charset="0"/>
+                <a:ea typeface="Times New Roman" panose="02020603050405020304" pitchFamily="18" charset="0"/>
+                <a:cs typeface="Times New Roman" panose="02020603050405020304" pitchFamily="18" charset="0"/>
+              </a:rPr>
+              <a:t>INSERT</a:t>
+            </a:r>
+            <a:r>
+              <a:rPr lang="pt-BR" sz="1900" dirty="0">
+                <a:solidFill>
+                  <a:srgbClr val="000000"/>
+                </a:solidFill>
+                <a:latin typeface="Courier New" panose="02070309020205020404" pitchFamily="49" charset="0"/>
+                <a:ea typeface="Times New Roman" panose="02020603050405020304" pitchFamily="18" charset="0"/>
+                <a:cs typeface="Times New Roman" panose="02020603050405020304" pitchFamily="18" charset="0"/>
+              </a:rPr>
+              <a:t> </a:t>
+            </a:r>
+            <a:r>
+              <a:rPr lang="pt-BR" sz="1900" b="1" dirty="0">
+                <a:solidFill>
+                  <a:srgbClr val="0000FF"/>
+                </a:solidFill>
+                <a:latin typeface="Courier New" panose="02070309020205020404" pitchFamily="49" charset="0"/>
+                <a:ea typeface="Times New Roman" panose="02020603050405020304" pitchFamily="18" charset="0"/>
+                <a:cs typeface="Times New Roman" panose="02020603050405020304" pitchFamily="18" charset="0"/>
+              </a:rPr>
+              <a:t>INTO</a:t>
+            </a:r>
+            <a:r>
+              <a:rPr lang="pt-BR" sz="1900" dirty="0">
+                <a:solidFill>
+                  <a:srgbClr val="000000"/>
+                </a:solidFill>
+                <a:latin typeface="Courier New" panose="02070309020205020404" pitchFamily="49" charset="0"/>
+                <a:ea typeface="Times New Roman" panose="02020603050405020304" pitchFamily="18" charset="0"/>
+                <a:cs typeface="Times New Roman" panose="02020603050405020304" pitchFamily="18" charset="0"/>
+              </a:rPr>
+              <a:t> produtos </a:t>
+            </a:r>
+            <a:r>
+              <a:rPr lang="pt-BR" sz="1900" b="1" dirty="0">
+                <a:solidFill>
+                  <a:srgbClr val="000080"/>
+                </a:solidFill>
+                <a:latin typeface="Courier New" panose="02070309020205020404" pitchFamily="49" charset="0"/>
+                <a:ea typeface="Times New Roman" panose="02020603050405020304" pitchFamily="18" charset="0"/>
+                <a:cs typeface="Times New Roman" panose="02020603050405020304" pitchFamily="18" charset="0"/>
+              </a:rPr>
+              <a:t>(</a:t>
+            </a:r>
+            <a:r>
+              <a:rPr lang="pt-BR" sz="1900" dirty="0" err="1">
+                <a:solidFill>
+                  <a:srgbClr val="000000"/>
+                </a:solidFill>
+                <a:latin typeface="Courier New" panose="02070309020205020404" pitchFamily="49" charset="0"/>
+                <a:ea typeface="Times New Roman" panose="02020603050405020304" pitchFamily="18" charset="0"/>
+                <a:cs typeface="Times New Roman" panose="02020603050405020304" pitchFamily="18" charset="0"/>
+              </a:rPr>
+              <a:t>nome_produto</a:t>
+            </a:r>
+            <a:r>
+              <a:rPr lang="pt-BR" sz="1900" b="1" dirty="0">
+                <a:solidFill>
+                  <a:srgbClr val="000080"/>
+                </a:solidFill>
+                <a:latin typeface="Courier New" panose="02070309020205020404" pitchFamily="49" charset="0"/>
+                <a:ea typeface="Times New Roman" panose="02020603050405020304" pitchFamily="18" charset="0"/>
+                <a:cs typeface="Times New Roman" panose="02020603050405020304" pitchFamily="18" charset="0"/>
+              </a:rPr>
+              <a:t>,</a:t>
+            </a:r>
+            <a:r>
+              <a:rPr lang="pt-BR" sz="1900" dirty="0">
+                <a:solidFill>
+                  <a:srgbClr val="000000"/>
+                </a:solidFill>
+                <a:latin typeface="Courier New" panose="02070309020205020404" pitchFamily="49" charset="0"/>
+                <a:ea typeface="Times New Roman" panose="02020603050405020304" pitchFamily="18" charset="0"/>
+                <a:cs typeface="Times New Roman" panose="02020603050405020304" pitchFamily="18" charset="0"/>
+              </a:rPr>
+              <a:t> </a:t>
+            </a:r>
+            <a:r>
+              <a:rPr lang="pt-BR" sz="1900" dirty="0" err="1">
+                <a:solidFill>
+                  <a:srgbClr val="000000"/>
+                </a:solidFill>
+                <a:latin typeface="Courier New" panose="02070309020205020404" pitchFamily="49" charset="0"/>
+                <a:ea typeface="Times New Roman" panose="02020603050405020304" pitchFamily="18" charset="0"/>
+                <a:cs typeface="Times New Roman" panose="02020603050405020304" pitchFamily="18" charset="0"/>
+              </a:rPr>
+              <a:t>preco_unitario</a:t>
+            </a:r>
+            <a:r>
+              <a:rPr lang="pt-BR" sz="1900" b="1" dirty="0">
+                <a:solidFill>
+                  <a:srgbClr val="000080"/>
+                </a:solidFill>
+                <a:latin typeface="Courier New" panose="02070309020205020404" pitchFamily="49" charset="0"/>
+                <a:ea typeface="Times New Roman" panose="02020603050405020304" pitchFamily="18" charset="0"/>
+                <a:cs typeface="Times New Roman" panose="02020603050405020304" pitchFamily="18" charset="0"/>
+              </a:rPr>
+              <a:t>,</a:t>
+            </a:r>
+            <a:r>
+              <a:rPr lang="pt-BR" sz="1900" dirty="0">
+                <a:solidFill>
+                  <a:srgbClr val="000000"/>
+                </a:solidFill>
+                <a:latin typeface="Courier New" panose="02070309020205020404" pitchFamily="49" charset="0"/>
+                <a:ea typeface="Times New Roman" panose="02020603050405020304" pitchFamily="18" charset="0"/>
+                <a:cs typeface="Times New Roman" panose="02020603050405020304" pitchFamily="18" charset="0"/>
+              </a:rPr>
+              <a:t> estoque</a:t>
+            </a:r>
+            <a:r>
+              <a:rPr lang="pt-BR" sz="1900" b="1" dirty="0">
+                <a:solidFill>
+                  <a:srgbClr val="000080"/>
+                </a:solidFill>
+                <a:latin typeface="Courier New" panose="02070309020205020404" pitchFamily="49" charset="0"/>
+                <a:ea typeface="Times New Roman" panose="02020603050405020304" pitchFamily="18" charset="0"/>
+                <a:cs typeface="Times New Roman" panose="02020603050405020304" pitchFamily="18" charset="0"/>
+              </a:rPr>
+              <a:t>,</a:t>
+            </a:r>
+            <a:r>
+              <a:rPr lang="pt-BR" sz="1900" dirty="0">
+                <a:solidFill>
+                  <a:srgbClr val="000000"/>
+                </a:solidFill>
+                <a:latin typeface="Courier New" panose="02070309020205020404" pitchFamily="49" charset="0"/>
+                <a:ea typeface="Times New Roman" panose="02020603050405020304" pitchFamily="18" charset="0"/>
+                <a:cs typeface="Times New Roman" panose="02020603050405020304" pitchFamily="18" charset="0"/>
+              </a:rPr>
+              <a:t> ativo</a:t>
+            </a:r>
+            <a:r>
+              <a:rPr lang="pt-BR" sz="1900" b="1" dirty="0">
+                <a:solidFill>
+                  <a:srgbClr val="000080"/>
+                </a:solidFill>
+                <a:latin typeface="Courier New" panose="02070309020205020404" pitchFamily="49" charset="0"/>
+                <a:ea typeface="Times New Roman" panose="02020603050405020304" pitchFamily="18" charset="0"/>
+                <a:cs typeface="Times New Roman" panose="02020603050405020304" pitchFamily="18" charset="0"/>
+              </a:rPr>
+              <a:t>)</a:t>
+            </a:r>
+            <a:endParaRPr lang="pt-BR" sz="1900" dirty="0">
+              <a:latin typeface="Calibri" panose="020F0502020204030204" pitchFamily="34" charset="0"/>
+              <a:ea typeface="Calibri" panose="020F0502020204030204" pitchFamily="34" charset="0"/>
+              <a:cs typeface="Times New Roman" panose="02020603050405020304" pitchFamily="18" charset="0"/>
+            </a:endParaRPr>
+          </a:p>
+          <a:p>
+            <a:pPr>
+              <a:lnSpc>
+                <a:spcPct val="107000"/>
+              </a:lnSpc>
+              <a:spcAft>
+                <a:spcPts val="0"/>
+              </a:spcAft>
+            </a:pPr>
+            <a:r>
+              <a:rPr lang="pt-BR" sz="1900" b="1" dirty="0">
+                <a:solidFill>
+                  <a:srgbClr val="0000FF"/>
+                </a:solidFill>
+                <a:latin typeface="Courier New" panose="02070309020205020404" pitchFamily="49" charset="0"/>
+                <a:ea typeface="Times New Roman" panose="02020603050405020304" pitchFamily="18" charset="0"/>
+                <a:cs typeface="Times New Roman" panose="02020603050405020304" pitchFamily="18" charset="0"/>
+              </a:rPr>
+              <a:t>VALUES</a:t>
+            </a:r>
+            <a:r>
+              <a:rPr lang="pt-BR" sz="1900" dirty="0">
+                <a:solidFill>
+                  <a:srgbClr val="000000"/>
+                </a:solidFill>
+                <a:latin typeface="Courier New" panose="02070309020205020404" pitchFamily="49" charset="0"/>
+                <a:ea typeface="Times New Roman" panose="02020603050405020304" pitchFamily="18" charset="0"/>
+                <a:cs typeface="Times New Roman" panose="02020603050405020304" pitchFamily="18" charset="0"/>
+              </a:rPr>
+              <a:t> </a:t>
+            </a:r>
+            <a:r>
+              <a:rPr lang="pt-BR" sz="1900" b="1" dirty="0">
+                <a:solidFill>
+                  <a:srgbClr val="000080"/>
+                </a:solidFill>
+                <a:latin typeface="Courier New" panose="02070309020205020404" pitchFamily="49" charset="0"/>
+                <a:ea typeface="Times New Roman" panose="02020603050405020304" pitchFamily="18" charset="0"/>
+                <a:cs typeface="Times New Roman" panose="02020603050405020304" pitchFamily="18" charset="0"/>
+              </a:rPr>
+              <a:t>(</a:t>
+            </a:r>
+            <a:r>
+              <a:rPr lang="pt-BR" sz="1900" dirty="0">
+                <a:solidFill>
+                  <a:srgbClr val="808080"/>
+                </a:solidFill>
+                <a:latin typeface="Courier New" panose="02070309020205020404" pitchFamily="49" charset="0"/>
+                <a:ea typeface="Times New Roman" panose="02020603050405020304" pitchFamily="18" charset="0"/>
+                <a:cs typeface="Times New Roman" panose="02020603050405020304" pitchFamily="18" charset="0"/>
+              </a:rPr>
+              <a:t>'Monitor LED 24"'</a:t>
+            </a:r>
+            <a:r>
+              <a:rPr lang="pt-BR" sz="1900" b="1" dirty="0">
+                <a:solidFill>
+                  <a:srgbClr val="000080"/>
+                </a:solidFill>
+                <a:latin typeface="Courier New" panose="02070309020205020404" pitchFamily="49" charset="0"/>
+                <a:ea typeface="Times New Roman" panose="02020603050405020304" pitchFamily="18" charset="0"/>
+                <a:cs typeface="Times New Roman" panose="02020603050405020304" pitchFamily="18" charset="0"/>
+              </a:rPr>
+              <a:t>,</a:t>
+            </a:r>
+            <a:r>
+              <a:rPr lang="pt-BR" sz="1900" dirty="0">
+                <a:solidFill>
+                  <a:srgbClr val="000000"/>
+                </a:solidFill>
+                <a:latin typeface="Courier New" panose="02070309020205020404" pitchFamily="49" charset="0"/>
+                <a:ea typeface="Times New Roman" panose="02020603050405020304" pitchFamily="18" charset="0"/>
+                <a:cs typeface="Times New Roman" panose="02020603050405020304" pitchFamily="18" charset="0"/>
+              </a:rPr>
+              <a:t> </a:t>
+            </a:r>
+            <a:r>
+              <a:rPr lang="pt-BR" sz="1900" dirty="0">
+                <a:solidFill>
+                  <a:srgbClr val="FF8000"/>
+                </a:solidFill>
+                <a:latin typeface="Courier New" panose="02070309020205020404" pitchFamily="49" charset="0"/>
+                <a:ea typeface="Times New Roman" panose="02020603050405020304" pitchFamily="18" charset="0"/>
+                <a:cs typeface="Times New Roman" panose="02020603050405020304" pitchFamily="18" charset="0"/>
+              </a:rPr>
+              <a:t>750.00</a:t>
+            </a:r>
+            <a:r>
+              <a:rPr lang="pt-BR" sz="1900" b="1" dirty="0">
+                <a:solidFill>
+                  <a:srgbClr val="000080"/>
+                </a:solidFill>
+                <a:latin typeface="Courier New" panose="02070309020205020404" pitchFamily="49" charset="0"/>
+                <a:ea typeface="Times New Roman" panose="02020603050405020304" pitchFamily="18" charset="0"/>
+                <a:cs typeface="Times New Roman" panose="02020603050405020304" pitchFamily="18" charset="0"/>
+              </a:rPr>
+              <a:t>,</a:t>
+            </a:r>
+            <a:r>
+              <a:rPr lang="pt-BR" sz="1900" dirty="0">
+                <a:solidFill>
+                  <a:srgbClr val="000000"/>
+                </a:solidFill>
+                <a:latin typeface="Courier New" panose="02070309020205020404" pitchFamily="49" charset="0"/>
+                <a:ea typeface="Times New Roman" panose="02020603050405020304" pitchFamily="18" charset="0"/>
+                <a:cs typeface="Times New Roman" panose="02020603050405020304" pitchFamily="18" charset="0"/>
+              </a:rPr>
+              <a:t> </a:t>
+            </a:r>
+            <a:r>
+              <a:rPr lang="pt-BR" sz="1900" dirty="0">
+                <a:solidFill>
+                  <a:srgbClr val="FF8000"/>
+                </a:solidFill>
+                <a:latin typeface="Courier New" panose="02070309020205020404" pitchFamily="49" charset="0"/>
+                <a:ea typeface="Times New Roman" panose="02020603050405020304" pitchFamily="18" charset="0"/>
+                <a:cs typeface="Times New Roman" panose="02020603050405020304" pitchFamily="18" charset="0"/>
+              </a:rPr>
+              <a:t>15</a:t>
+            </a:r>
+            <a:r>
+              <a:rPr lang="pt-BR" sz="1900" b="1" dirty="0">
+                <a:solidFill>
+                  <a:srgbClr val="000080"/>
+                </a:solidFill>
+                <a:latin typeface="Courier New" panose="02070309020205020404" pitchFamily="49" charset="0"/>
+                <a:ea typeface="Times New Roman" panose="02020603050405020304" pitchFamily="18" charset="0"/>
+                <a:cs typeface="Times New Roman" panose="02020603050405020304" pitchFamily="18" charset="0"/>
+              </a:rPr>
+              <a:t>,</a:t>
+            </a:r>
+            <a:r>
+              <a:rPr lang="pt-BR" sz="1900" dirty="0">
+                <a:solidFill>
+                  <a:srgbClr val="000000"/>
+                </a:solidFill>
+                <a:latin typeface="Courier New" panose="02070309020205020404" pitchFamily="49" charset="0"/>
+                <a:ea typeface="Times New Roman" panose="02020603050405020304" pitchFamily="18" charset="0"/>
+                <a:cs typeface="Times New Roman" panose="02020603050405020304" pitchFamily="18" charset="0"/>
+              </a:rPr>
+              <a:t> </a:t>
+            </a:r>
+            <a:r>
+              <a:rPr lang="pt-BR" sz="1900" dirty="0">
+                <a:solidFill>
+                  <a:srgbClr val="FF8000"/>
+                </a:solidFill>
+                <a:latin typeface="Courier New" panose="02070309020205020404" pitchFamily="49" charset="0"/>
+                <a:ea typeface="Times New Roman" panose="02020603050405020304" pitchFamily="18" charset="0"/>
+                <a:cs typeface="Times New Roman" panose="02020603050405020304" pitchFamily="18" charset="0"/>
+              </a:rPr>
+              <a:t>1</a:t>
+            </a:r>
+            <a:r>
+              <a:rPr lang="pt-BR" sz="1900" b="1" dirty="0">
+                <a:solidFill>
+                  <a:srgbClr val="000080"/>
+                </a:solidFill>
+                <a:latin typeface="Courier New" panose="02070309020205020404" pitchFamily="49" charset="0"/>
+                <a:ea typeface="Times New Roman" panose="02020603050405020304" pitchFamily="18" charset="0"/>
+                <a:cs typeface="Times New Roman" panose="02020603050405020304" pitchFamily="18" charset="0"/>
+              </a:rPr>
+              <a:t>);</a:t>
+            </a:r>
+            <a:endParaRPr lang="pt-BR" sz="1900" dirty="0">
+              <a:latin typeface="Calibri" panose="020F0502020204030204" pitchFamily="34" charset="0"/>
+              <a:ea typeface="Calibri" panose="020F0502020204030204" pitchFamily="34" charset="0"/>
+              <a:cs typeface="Times New Roman" panose="02020603050405020304" pitchFamily="18" charset="0"/>
+            </a:endParaRPr>
+          </a:p>
+          <a:p>
+            <a:pPr>
+              <a:lnSpc>
+                <a:spcPct val="107000"/>
+              </a:lnSpc>
+              <a:spcAft>
+                <a:spcPts val="800"/>
+              </a:spcAft>
+            </a:pPr>
+            <a:r>
+              <a:rPr lang="pt-BR" sz="1900" dirty="0">
+                <a:latin typeface="Calibri" panose="020F0502020204030204" pitchFamily="34" charset="0"/>
+                <a:ea typeface="Calibri" panose="020F0502020204030204" pitchFamily="34" charset="0"/>
+                <a:cs typeface="Times New Roman" panose="02020603050405020304" pitchFamily="18" charset="0"/>
+              </a:rPr>
+              <a:t> </a:t>
+            </a:r>
+          </a:p>
+          <a:p>
+            <a:pPr>
+              <a:lnSpc>
+                <a:spcPct val="107000"/>
+              </a:lnSpc>
+              <a:spcAft>
+                <a:spcPts val="800"/>
+              </a:spcAft>
+            </a:pPr>
+            <a:r>
+              <a:rPr lang="pt-BR" sz="1900" b="1" dirty="0">
+                <a:ea typeface="Calibri" panose="020F0502020204030204" pitchFamily="34" charset="0"/>
+                <a:cs typeface="Times New Roman" panose="02020603050405020304" pitchFamily="18" charset="0"/>
+              </a:rPr>
+              <a:t>Exemplo de SELECT:</a:t>
+            </a:r>
+            <a:br>
+              <a:rPr lang="pt-BR" sz="1900" dirty="0">
+                <a:latin typeface="Constantia" panose="02030602050306030303" pitchFamily="18" charset="0"/>
+                <a:ea typeface="Calibri" panose="020F0502020204030204" pitchFamily="34" charset="0"/>
+                <a:cs typeface="Times New Roman" panose="02020603050405020304" pitchFamily="18" charset="0"/>
+              </a:rPr>
+            </a:br>
+            <a:r>
+              <a:rPr lang="pt-BR" sz="1900" b="1" dirty="0">
+                <a:solidFill>
+                  <a:srgbClr val="0000FF"/>
+                </a:solidFill>
+                <a:latin typeface="Courier New" panose="02070309020205020404" pitchFamily="49" charset="0"/>
+                <a:ea typeface="Times New Roman" panose="02020603050405020304" pitchFamily="18" charset="0"/>
+                <a:cs typeface="Times New Roman" panose="02020603050405020304" pitchFamily="18" charset="0"/>
+              </a:rPr>
+              <a:t>SELECT</a:t>
+            </a:r>
+            <a:r>
+              <a:rPr lang="pt-BR" sz="1900" dirty="0">
+                <a:solidFill>
+                  <a:srgbClr val="000000"/>
+                </a:solidFill>
+                <a:latin typeface="Courier New" panose="02070309020205020404" pitchFamily="49" charset="0"/>
+                <a:ea typeface="Times New Roman" panose="02020603050405020304" pitchFamily="18" charset="0"/>
+                <a:cs typeface="Times New Roman" panose="02020603050405020304" pitchFamily="18" charset="0"/>
+              </a:rPr>
+              <a:t> </a:t>
+            </a:r>
+            <a:r>
+              <a:rPr lang="pt-BR" sz="1900" dirty="0" err="1">
+                <a:solidFill>
+                  <a:srgbClr val="000000"/>
+                </a:solidFill>
+                <a:latin typeface="Courier New" panose="02070309020205020404" pitchFamily="49" charset="0"/>
+                <a:ea typeface="Times New Roman" panose="02020603050405020304" pitchFamily="18" charset="0"/>
+                <a:cs typeface="Times New Roman" panose="02020603050405020304" pitchFamily="18" charset="0"/>
+              </a:rPr>
+              <a:t>nome_produto</a:t>
+            </a:r>
+            <a:r>
+              <a:rPr lang="pt-BR" sz="1900" b="1" dirty="0">
+                <a:solidFill>
+                  <a:srgbClr val="000080"/>
+                </a:solidFill>
+                <a:latin typeface="Courier New" panose="02070309020205020404" pitchFamily="49" charset="0"/>
+                <a:ea typeface="Times New Roman" panose="02020603050405020304" pitchFamily="18" charset="0"/>
+                <a:cs typeface="Times New Roman" panose="02020603050405020304" pitchFamily="18" charset="0"/>
+              </a:rPr>
+              <a:t>,</a:t>
+            </a:r>
+            <a:r>
+              <a:rPr lang="pt-BR" sz="1900" dirty="0">
+                <a:solidFill>
+                  <a:srgbClr val="000000"/>
+                </a:solidFill>
+                <a:latin typeface="Courier New" panose="02070309020205020404" pitchFamily="49" charset="0"/>
+                <a:ea typeface="Times New Roman" panose="02020603050405020304" pitchFamily="18" charset="0"/>
+                <a:cs typeface="Times New Roman" panose="02020603050405020304" pitchFamily="18" charset="0"/>
+              </a:rPr>
+              <a:t> </a:t>
+            </a:r>
+            <a:r>
+              <a:rPr lang="pt-BR" sz="1900" dirty="0" err="1">
+                <a:solidFill>
+                  <a:srgbClr val="000000"/>
+                </a:solidFill>
+                <a:latin typeface="Courier New" panose="02070309020205020404" pitchFamily="49" charset="0"/>
+                <a:ea typeface="Times New Roman" panose="02020603050405020304" pitchFamily="18" charset="0"/>
+                <a:cs typeface="Times New Roman" panose="02020603050405020304" pitchFamily="18" charset="0"/>
+              </a:rPr>
+              <a:t>preco_unitario</a:t>
+            </a:r>
+            <a:r>
+              <a:rPr lang="pt-BR" sz="1900" dirty="0">
+                <a:solidFill>
+                  <a:srgbClr val="000000"/>
+                </a:solidFill>
+                <a:latin typeface="Courier New" panose="02070309020205020404" pitchFamily="49" charset="0"/>
+                <a:ea typeface="Times New Roman" panose="02020603050405020304" pitchFamily="18" charset="0"/>
+                <a:cs typeface="Times New Roman" panose="02020603050405020304" pitchFamily="18" charset="0"/>
+              </a:rPr>
+              <a:t> </a:t>
+            </a:r>
+            <a:r>
+              <a:rPr lang="pt-BR" sz="1900" b="1" dirty="0">
+                <a:solidFill>
+                  <a:srgbClr val="0000FF"/>
+                </a:solidFill>
+                <a:latin typeface="Courier New" panose="02070309020205020404" pitchFamily="49" charset="0"/>
+                <a:ea typeface="Times New Roman" panose="02020603050405020304" pitchFamily="18" charset="0"/>
+                <a:cs typeface="Times New Roman" panose="02020603050405020304" pitchFamily="18" charset="0"/>
+              </a:rPr>
+              <a:t>FROM</a:t>
+            </a:r>
+            <a:r>
+              <a:rPr lang="pt-BR" sz="1900" dirty="0">
+                <a:solidFill>
+                  <a:srgbClr val="000000"/>
+                </a:solidFill>
+                <a:latin typeface="Courier New" panose="02070309020205020404" pitchFamily="49" charset="0"/>
+                <a:ea typeface="Times New Roman" panose="02020603050405020304" pitchFamily="18" charset="0"/>
+                <a:cs typeface="Times New Roman" panose="02020603050405020304" pitchFamily="18" charset="0"/>
+              </a:rPr>
+              <a:t> produtos </a:t>
+            </a:r>
+            <a:r>
+              <a:rPr lang="pt-BR" sz="1900" b="1" dirty="0">
+                <a:solidFill>
+                  <a:srgbClr val="0000FF"/>
+                </a:solidFill>
+                <a:latin typeface="Courier New" panose="02070309020205020404" pitchFamily="49" charset="0"/>
+                <a:ea typeface="Times New Roman" panose="02020603050405020304" pitchFamily="18" charset="0"/>
+                <a:cs typeface="Times New Roman" panose="02020603050405020304" pitchFamily="18" charset="0"/>
+              </a:rPr>
+              <a:t>WHERE</a:t>
+            </a:r>
+            <a:r>
+              <a:rPr lang="pt-BR" sz="1900" dirty="0">
+                <a:solidFill>
+                  <a:srgbClr val="000000"/>
+                </a:solidFill>
+                <a:latin typeface="Courier New" panose="02070309020205020404" pitchFamily="49" charset="0"/>
+                <a:ea typeface="Times New Roman" panose="02020603050405020304" pitchFamily="18" charset="0"/>
+                <a:cs typeface="Times New Roman" panose="02020603050405020304" pitchFamily="18" charset="0"/>
+              </a:rPr>
+              <a:t> ativo </a:t>
+            </a:r>
+            <a:r>
+              <a:rPr lang="pt-BR" sz="1900" b="1" dirty="0">
+                <a:solidFill>
+                  <a:srgbClr val="000080"/>
+                </a:solidFill>
+                <a:latin typeface="Courier New" panose="02070309020205020404" pitchFamily="49" charset="0"/>
+                <a:ea typeface="Times New Roman" panose="02020603050405020304" pitchFamily="18" charset="0"/>
+                <a:cs typeface="Times New Roman" panose="02020603050405020304" pitchFamily="18" charset="0"/>
+              </a:rPr>
+              <a:t>=</a:t>
+            </a:r>
+            <a:r>
+              <a:rPr lang="pt-BR" sz="1900" dirty="0">
+                <a:solidFill>
+                  <a:srgbClr val="000000"/>
+                </a:solidFill>
+                <a:latin typeface="Courier New" panose="02070309020205020404" pitchFamily="49" charset="0"/>
+                <a:ea typeface="Times New Roman" panose="02020603050405020304" pitchFamily="18" charset="0"/>
+                <a:cs typeface="Times New Roman" panose="02020603050405020304" pitchFamily="18" charset="0"/>
+              </a:rPr>
+              <a:t> </a:t>
+            </a:r>
+            <a:r>
+              <a:rPr lang="pt-BR" sz="1900" dirty="0">
+                <a:solidFill>
+                  <a:srgbClr val="FF8000"/>
+                </a:solidFill>
+                <a:latin typeface="Courier New" panose="02070309020205020404" pitchFamily="49" charset="0"/>
+                <a:ea typeface="Times New Roman" panose="02020603050405020304" pitchFamily="18" charset="0"/>
+                <a:cs typeface="Times New Roman" panose="02020603050405020304" pitchFamily="18" charset="0"/>
+              </a:rPr>
+              <a:t>1</a:t>
+            </a:r>
+            <a:r>
+              <a:rPr lang="pt-BR" sz="1900" b="1" dirty="0">
+                <a:solidFill>
+                  <a:srgbClr val="000080"/>
+                </a:solidFill>
+                <a:latin typeface="Courier New" panose="02070309020205020404" pitchFamily="49" charset="0"/>
+                <a:ea typeface="Times New Roman" panose="02020603050405020304" pitchFamily="18" charset="0"/>
+                <a:cs typeface="Times New Roman" panose="02020603050405020304" pitchFamily="18" charset="0"/>
+              </a:rPr>
+              <a:t>;</a:t>
+            </a:r>
+            <a:endParaRPr lang="pt-BR" sz="1900" dirty="0">
+              <a:latin typeface="Calibri" panose="020F0502020204030204" pitchFamily="34" charset="0"/>
+              <a:ea typeface="Calibri" panose="020F0502020204030204" pitchFamily="34" charset="0"/>
+              <a:cs typeface="Times New Roman" panose="02020603050405020304" pitchFamily="18" charset="0"/>
+            </a:endParaRPr>
+          </a:p>
+          <a:p>
+            <a:pPr>
+              <a:lnSpc>
+                <a:spcPct val="107000"/>
+              </a:lnSpc>
+              <a:spcAft>
+                <a:spcPts val="0"/>
+              </a:spcAft>
+            </a:pPr>
+            <a:r>
+              <a:rPr lang="pt-BR" sz="1900" dirty="0">
+                <a:latin typeface="Times New Roman" panose="02020603050405020304" pitchFamily="18" charset="0"/>
+                <a:ea typeface="Times New Roman" panose="02020603050405020304" pitchFamily="18" charset="0"/>
+                <a:cs typeface="Times New Roman" panose="02020603050405020304" pitchFamily="18" charset="0"/>
+              </a:rPr>
+              <a:t> </a:t>
+            </a:r>
+            <a:endParaRPr lang="pt-BR" sz="1900" dirty="0">
+              <a:latin typeface="Calibri" panose="020F0502020204030204" pitchFamily="34" charset="0"/>
+              <a:ea typeface="Calibri" panose="020F0502020204030204" pitchFamily="34" charset="0"/>
+              <a:cs typeface="Times New Roman" panose="02020603050405020304" pitchFamily="18" charset="0"/>
+            </a:endParaRPr>
+          </a:p>
+          <a:p>
+            <a:pPr>
+              <a:lnSpc>
+                <a:spcPct val="107000"/>
+              </a:lnSpc>
+              <a:spcAft>
+                <a:spcPts val="800"/>
+              </a:spcAft>
+            </a:pPr>
+            <a:r>
+              <a:rPr lang="pt-BR" sz="2000" i="1" dirty="0">
+                <a:ea typeface="Calibri" panose="020F0502020204030204" pitchFamily="34" charset="0"/>
+                <a:cs typeface="Times New Roman" panose="02020603050405020304" pitchFamily="18" charset="0"/>
+              </a:rPr>
+              <a:t>Exercício - INSERT (Aluno):</a:t>
+            </a:r>
+            <a:br>
+              <a:rPr lang="pt-BR" sz="2000" b="1" dirty="0">
+                <a:ea typeface="Calibri" panose="020F0502020204030204" pitchFamily="34" charset="0"/>
+                <a:cs typeface="Times New Roman" panose="02020603050405020304" pitchFamily="18" charset="0"/>
+              </a:rPr>
+            </a:br>
+            <a:r>
+              <a:rPr lang="pt-BR" sz="2000" dirty="0">
+                <a:ea typeface="Calibri" panose="020F0502020204030204" pitchFamily="34" charset="0"/>
+                <a:cs typeface="Times New Roman" panose="02020603050405020304" pitchFamily="18" charset="0"/>
+              </a:rPr>
+              <a:t>Cadastre o produto </a:t>
+            </a:r>
+            <a:r>
+              <a:rPr lang="pt-BR" sz="2000" b="1" dirty="0">
+                <a:ea typeface="Calibri" panose="020F0502020204030204" pitchFamily="34" charset="0"/>
+                <a:cs typeface="Times New Roman" panose="02020603050405020304" pitchFamily="18" charset="0"/>
+              </a:rPr>
+              <a:t>"Mouse Óptico"</a:t>
+            </a:r>
+            <a:r>
+              <a:rPr lang="pt-BR" sz="2000" dirty="0">
+                <a:ea typeface="Calibri" panose="020F0502020204030204" pitchFamily="34" charset="0"/>
+                <a:cs typeface="Times New Roman" panose="02020603050405020304" pitchFamily="18" charset="0"/>
+              </a:rPr>
+              <a:t>, com preço unitário de </a:t>
+            </a:r>
+            <a:r>
+              <a:rPr lang="pt-BR" sz="2000" b="1" dirty="0">
+                <a:ea typeface="Calibri" panose="020F0502020204030204" pitchFamily="34" charset="0"/>
+                <a:cs typeface="Times New Roman" panose="02020603050405020304" pitchFamily="18" charset="0"/>
+              </a:rPr>
+              <a:t>80.00</a:t>
+            </a:r>
+            <a:r>
+              <a:rPr lang="pt-BR" sz="2000" dirty="0">
+                <a:ea typeface="Calibri" panose="020F0502020204030204" pitchFamily="34" charset="0"/>
+                <a:cs typeface="Times New Roman" panose="02020603050405020304" pitchFamily="18" charset="0"/>
+              </a:rPr>
+              <a:t>, estoque </a:t>
+            </a:r>
+            <a:r>
+              <a:rPr lang="pt-BR" sz="2000" b="1" dirty="0">
+                <a:ea typeface="Calibri" panose="020F0502020204030204" pitchFamily="34" charset="0"/>
+                <a:cs typeface="Times New Roman" panose="02020603050405020304" pitchFamily="18" charset="0"/>
+              </a:rPr>
+              <a:t>50 unidades</a:t>
+            </a:r>
+            <a:r>
+              <a:rPr lang="pt-BR" sz="2000" dirty="0">
+                <a:ea typeface="Calibri" panose="020F0502020204030204" pitchFamily="34" charset="0"/>
+                <a:cs typeface="Times New Roman" panose="02020603050405020304" pitchFamily="18" charset="0"/>
+              </a:rPr>
+              <a:t>, ativo.</a:t>
+            </a:r>
+          </a:p>
+          <a:p>
+            <a:pPr>
+              <a:lnSpc>
+                <a:spcPct val="107000"/>
+              </a:lnSpc>
+              <a:spcAft>
+                <a:spcPts val="800"/>
+              </a:spcAft>
+            </a:pPr>
+            <a:endParaRPr lang="pt-BR" sz="2000" dirty="0">
+              <a:ea typeface="Calibri" panose="020F0502020204030204" pitchFamily="34" charset="0"/>
+              <a:cs typeface="Times New Roman" panose="02020603050405020304" pitchFamily="18" charset="0"/>
+            </a:endParaRPr>
+          </a:p>
+          <a:p>
+            <a:r>
+              <a:rPr lang="pt-BR" sz="2000" i="1" dirty="0">
+                <a:ea typeface="Times New Roman" panose="02020603050405020304" pitchFamily="18" charset="0"/>
+              </a:rPr>
+              <a:t>Exercício - SELECT (Aluno):</a:t>
+            </a:r>
+            <a:br>
+              <a:rPr lang="pt-BR" sz="2000" b="1" dirty="0">
+                <a:ea typeface="Times New Roman" panose="02020603050405020304" pitchFamily="18" charset="0"/>
+              </a:rPr>
+            </a:br>
+            <a:r>
+              <a:rPr lang="pt-BR" sz="2000" b="1" dirty="0">
+                <a:ea typeface="Times New Roman" panose="02020603050405020304" pitchFamily="18" charset="0"/>
+              </a:rPr>
+              <a:t>Liste </a:t>
+            </a:r>
+            <a:r>
+              <a:rPr lang="pt-BR" sz="2000" dirty="0">
+                <a:ea typeface="Times New Roman" panose="02020603050405020304" pitchFamily="18" charset="0"/>
+              </a:rPr>
+              <a:t>todos os produtos com estoque maior que 10 unidades</a:t>
+            </a:r>
+            <a:r>
+              <a:rPr lang="pt-BR" sz="2000" b="1" dirty="0">
+                <a:ea typeface="Times New Roman" panose="02020603050405020304" pitchFamily="18" charset="0"/>
+              </a:rPr>
+              <a:t>.</a:t>
+            </a:r>
+          </a:p>
+        </p:txBody>
+      </p:sp>
+      <p:cxnSp>
+        <p:nvCxnSpPr>
+          <p:cNvPr id="9" name="Conector reto 8">
+            <a:extLst>
+              <a:ext uri="{FF2B5EF4-FFF2-40B4-BE49-F238E27FC236}">
+                <a16:creationId xmlns:a16="http://schemas.microsoft.com/office/drawing/2014/main" id="{C661113F-384D-42E8-A105-7BADD0FA15D9}"/>
+              </a:ext>
+            </a:extLst>
+          </p:cNvPr>
+          <p:cNvCxnSpPr>
+            <a:cxnSpLocks/>
+          </p:cNvCxnSpPr>
+          <p:nvPr/>
+        </p:nvCxnSpPr>
+        <p:spPr>
+          <a:xfrm>
+            <a:off x="338844" y="4170947"/>
+            <a:ext cx="10361240" cy="0"/>
+          </a:xfrm>
+          <a:prstGeom prst="line">
+            <a:avLst/>
+          </a:prstGeom>
+        </p:spPr>
+        <p:style>
+          <a:lnRef idx="1">
+            <a:schemeClr val="accent1"/>
+          </a:lnRef>
+          <a:fillRef idx="0">
+            <a:schemeClr val="accent1"/>
+          </a:fillRef>
+          <a:effectRef idx="0">
+            <a:schemeClr val="accent1"/>
+          </a:effectRef>
+          <a:fontRef idx="minor">
+            <a:schemeClr val="tx1"/>
+          </a:fontRef>
+        </p:style>
+      </p:cxnSp>
+    </p:spTree>
+    <p:extLst>
+      <p:ext uri="{BB962C8B-B14F-4D97-AF65-F5344CB8AC3E}">
+        <p14:creationId xmlns:p14="http://schemas.microsoft.com/office/powerpoint/2010/main" val="4237419148"/>
+      </p:ext>
+    </p:extLst>
+  </p:cSld>
+  <p:clrMapOvr>
+    <a:masterClrMapping/>
+  </p:clrMapOvr>
+</p:sld>
+</file>
+
+<file path=ppt/slides/slide17.xml><?xml version="1.0" encoding="utf-8"?>
+<p:sld xmlns:a="http://schemas.openxmlformats.org/drawingml/2006/main" xmlns:r="http://schemas.openxmlformats.org/officeDocument/2006/relationships" xmlns:p="http://schemas.openxmlformats.org/presentationml/2006/main">
+  <p:cSld>
+    <p:spTree>
+      <p:nvGrpSpPr>
+        <p:cNvPr id="1" name=""/>
+        <p:cNvGrpSpPr/>
+        <p:nvPr/>
+      </p:nvGrpSpPr>
+      <p:grpSpPr>
+        <a:xfrm>
+          <a:off x="0" y="0"/>
+          <a:ext cx="0" cy="0"/>
+          <a:chOff x="0" y="0"/>
+          <a:chExt cx="0" cy="0"/>
+        </a:xfrm>
+      </p:grpSpPr>
+      <p:sp>
+        <p:nvSpPr>
+          <p:cNvPr id="2" name="Título 1">
+            <a:extLst>
+              <a:ext uri="{FF2B5EF4-FFF2-40B4-BE49-F238E27FC236}">
+                <a16:creationId xmlns:a16="http://schemas.microsoft.com/office/drawing/2014/main" id="{E1BF4364-A6CD-4460-A48D-6779B48ADDBE}"/>
+              </a:ext>
+            </a:extLst>
+          </p:cNvPr>
+          <p:cNvSpPr>
+            <a:spLocks noGrp="1"/>
+          </p:cNvSpPr>
+          <p:nvPr>
+            <p:ph type="title"/>
+          </p:nvPr>
+        </p:nvSpPr>
+        <p:spPr>
+          <a:xfrm>
+            <a:off x="338845" y="1030102"/>
+            <a:ext cx="9692640" cy="811983"/>
+          </a:xfrm>
+        </p:spPr>
+        <p:txBody>
+          <a:bodyPr>
+            <a:noAutofit/>
+          </a:bodyPr>
+          <a:lstStyle/>
+          <a:p>
+            <a:r>
+              <a:rPr lang="pt-BR" sz="3600" b="1" dirty="0">
+                <a:solidFill>
+                  <a:srgbClr val="00758F"/>
+                </a:solidFill>
+              </a:rPr>
+              <a:t>Exercícios:</a:t>
+            </a:r>
+            <a:br>
+              <a:rPr lang="pt-BR" sz="3600" b="1" dirty="0">
+                <a:solidFill>
+                  <a:srgbClr val="F39211"/>
+                </a:solidFill>
+              </a:rPr>
+            </a:br>
+            <a:r>
+              <a:rPr lang="pt-BR" sz="3600" b="1" dirty="0">
+                <a:solidFill>
+                  <a:srgbClr val="F39211"/>
+                </a:solidFill>
+              </a:rPr>
+              <a:t>1.2 - SELECT e INSERT de informações</a:t>
+            </a:r>
+            <a:br>
+              <a:rPr lang="pt-BR" sz="3600" b="1" dirty="0">
+                <a:solidFill>
+                  <a:srgbClr val="F39211"/>
+                </a:solidFill>
+              </a:rPr>
+            </a:br>
+            <a:endParaRPr lang="pt-BR" sz="3600" i="1" dirty="0">
+              <a:solidFill>
+                <a:srgbClr val="F39211"/>
+              </a:solidFill>
+            </a:endParaRPr>
+          </a:p>
+        </p:txBody>
+      </p:sp>
+      <p:pic>
+        <p:nvPicPr>
+          <p:cNvPr id="4" name="Picture 6" descr="https://www.mysql.com/common/logos/logo-mysql-170x115.png">
+            <a:extLst>
+              <a:ext uri="{FF2B5EF4-FFF2-40B4-BE49-F238E27FC236}">
+                <a16:creationId xmlns:a16="http://schemas.microsoft.com/office/drawing/2014/main" id="{441DFD02-E8A2-4690-9CD7-1CC407F2024E}"/>
+              </a:ext>
+            </a:extLst>
+          </p:cNvPr>
+          <p:cNvPicPr>
+            <a:picLocks noChangeAspect="1" noChangeArrowheads="1"/>
+          </p:cNvPicPr>
+          <p:nvPr/>
+        </p:nvPicPr>
+        <p:blipFill>
+          <a:blip r:embed="rId2">
+            <a:extLst>
+              <a:ext uri="{28A0092B-C50C-407E-A947-70E740481C1C}">
+                <a14:useLocalDpi xmlns:a14="http://schemas.microsoft.com/office/drawing/2010/main" val="0"/>
+              </a:ext>
+            </a:extLst>
+          </a:blip>
+          <a:srcRect/>
+          <a:stretch>
+            <a:fillRect/>
+          </a:stretch>
+        </p:blipFill>
+        <p:spPr bwMode="auto">
+          <a:xfrm>
+            <a:off x="9774793" y="5753675"/>
+            <a:ext cx="1385775" cy="936973"/>
+          </a:xfrm>
+          <a:prstGeom prst="rect">
+            <a:avLst/>
+          </a:prstGeom>
+          <a:noFill/>
+          <a:extLst>
+            <a:ext uri="{909E8E84-426E-40DD-AFC4-6F175D3DCCD1}">
+              <a14:hiddenFill xmlns:a14="http://schemas.microsoft.com/office/drawing/2010/main">
+                <a:solidFill>
+                  <a:srgbClr val="FFFFFF"/>
+                </a:solidFill>
+              </a14:hiddenFill>
+            </a:ext>
+          </a:extLst>
+        </p:spPr>
+      </p:pic>
+      <p:sp>
+        <p:nvSpPr>
+          <p:cNvPr id="5" name="CaixaDeTexto 4">
+            <a:extLst>
+              <a:ext uri="{FF2B5EF4-FFF2-40B4-BE49-F238E27FC236}">
+                <a16:creationId xmlns:a16="http://schemas.microsoft.com/office/drawing/2014/main" id="{890DD339-B99C-43BD-99AF-28040E9B3E9C}"/>
+              </a:ext>
+            </a:extLst>
+          </p:cNvPr>
+          <p:cNvSpPr txBox="1"/>
+          <p:nvPr/>
+        </p:nvSpPr>
+        <p:spPr>
+          <a:xfrm>
+            <a:off x="338844" y="1436093"/>
+            <a:ext cx="10938756" cy="4913268"/>
+          </a:xfrm>
+          <a:prstGeom prst="rect">
+            <a:avLst/>
+          </a:prstGeom>
+          <a:noFill/>
+        </p:spPr>
+        <p:txBody>
+          <a:bodyPr wrap="square" rtlCol="0">
+            <a:spAutoFit/>
+          </a:bodyPr>
+          <a:lstStyle/>
+          <a:p>
+            <a:pPr>
+              <a:lnSpc>
+                <a:spcPct val="107000"/>
+              </a:lnSpc>
+              <a:spcAft>
+                <a:spcPts val="800"/>
+              </a:spcAft>
+            </a:pPr>
+            <a:r>
+              <a:rPr lang="pt-BR" sz="2400" b="1" dirty="0">
+                <a:solidFill>
+                  <a:srgbClr val="000000"/>
+                </a:solidFill>
+                <a:ea typeface="Calibri" panose="020F0502020204030204" pitchFamily="34" charset="0"/>
+                <a:cs typeface="Times New Roman" panose="02020603050405020304" pitchFamily="18" charset="0"/>
+              </a:rPr>
+              <a:t>3 - Tabela: </a:t>
+            </a:r>
+            <a:r>
+              <a:rPr lang="pt-BR" sz="2400" i="1" dirty="0">
+                <a:solidFill>
+                  <a:srgbClr val="000000"/>
+                </a:solidFill>
+                <a:ea typeface="Calibri" panose="020F0502020204030204" pitchFamily="34" charset="0"/>
+                <a:cs typeface="Times New Roman" panose="02020603050405020304" pitchFamily="18" charset="0"/>
+              </a:rPr>
+              <a:t>vendas</a:t>
+            </a:r>
+            <a:endParaRPr lang="pt-BR" sz="2400" dirty="0">
+              <a:ea typeface="Calibri" panose="020F0502020204030204" pitchFamily="34" charset="0"/>
+              <a:cs typeface="Times New Roman" panose="02020603050405020304" pitchFamily="18" charset="0"/>
+            </a:endParaRPr>
+          </a:p>
+          <a:p>
+            <a:pPr>
+              <a:lnSpc>
+                <a:spcPct val="107000"/>
+              </a:lnSpc>
+              <a:spcAft>
+                <a:spcPts val="800"/>
+              </a:spcAft>
+            </a:pPr>
+            <a:r>
+              <a:rPr lang="pt-BR" sz="1900" b="1" dirty="0">
+                <a:ea typeface="Calibri" panose="020F0502020204030204" pitchFamily="34" charset="0"/>
+                <a:cs typeface="Times New Roman" panose="02020603050405020304" pitchFamily="18" charset="0"/>
+              </a:rPr>
+              <a:t>Exemplo de INSERT:</a:t>
+            </a:r>
+            <a:br>
+              <a:rPr lang="pt-BR" sz="1900" dirty="0">
+                <a:latin typeface="Calibri" panose="020F0502020204030204" pitchFamily="34" charset="0"/>
+                <a:ea typeface="Calibri" panose="020F0502020204030204" pitchFamily="34" charset="0"/>
+                <a:cs typeface="Times New Roman" panose="02020603050405020304" pitchFamily="18" charset="0"/>
+              </a:rPr>
+            </a:br>
+            <a:r>
+              <a:rPr lang="pt-BR" sz="1900" b="1" dirty="0">
+                <a:solidFill>
+                  <a:srgbClr val="0000FF"/>
+                </a:solidFill>
+                <a:latin typeface="Courier New" panose="02070309020205020404" pitchFamily="49" charset="0"/>
+                <a:ea typeface="Times New Roman" panose="02020603050405020304" pitchFamily="18" charset="0"/>
+                <a:cs typeface="Times New Roman" panose="02020603050405020304" pitchFamily="18" charset="0"/>
+              </a:rPr>
+              <a:t>INSERT</a:t>
+            </a:r>
+            <a:r>
+              <a:rPr lang="pt-BR" sz="1900" dirty="0">
+                <a:solidFill>
+                  <a:srgbClr val="000000"/>
+                </a:solidFill>
+                <a:latin typeface="Courier New" panose="02070309020205020404" pitchFamily="49" charset="0"/>
+                <a:ea typeface="Times New Roman" panose="02020603050405020304" pitchFamily="18" charset="0"/>
+                <a:cs typeface="Times New Roman" panose="02020603050405020304" pitchFamily="18" charset="0"/>
+              </a:rPr>
+              <a:t> </a:t>
+            </a:r>
+            <a:r>
+              <a:rPr lang="pt-BR" sz="1900" b="1" dirty="0">
+                <a:solidFill>
+                  <a:srgbClr val="0000FF"/>
+                </a:solidFill>
+                <a:latin typeface="Courier New" panose="02070309020205020404" pitchFamily="49" charset="0"/>
+                <a:ea typeface="Times New Roman" panose="02020603050405020304" pitchFamily="18" charset="0"/>
+                <a:cs typeface="Times New Roman" panose="02020603050405020304" pitchFamily="18" charset="0"/>
+              </a:rPr>
+              <a:t>INTO</a:t>
+            </a:r>
+            <a:r>
+              <a:rPr lang="pt-BR" sz="1900" dirty="0">
+                <a:solidFill>
+                  <a:srgbClr val="000000"/>
+                </a:solidFill>
+                <a:latin typeface="Courier New" panose="02070309020205020404" pitchFamily="49" charset="0"/>
+                <a:ea typeface="Times New Roman" panose="02020603050405020304" pitchFamily="18" charset="0"/>
+                <a:cs typeface="Times New Roman" panose="02020603050405020304" pitchFamily="18" charset="0"/>
+              </a:rPr>
+              <a:t> vendas </a:t>
+            </a:r>
+            <a:r>
+              <a:rPr lang="pt-BR" sz="1900" b="1" dirty="0">
+                <a:solidFill>
+                  <a:srgbClr val="000080"/>
+                </a:solidFill>
+                <a:latin typeface="Courier New" panose="02070309020205020404" pitchFamily="49" charset="0"/>
+                <a:ea typeface="Times New Roman" panose="02020603050405020304" pitchFamily="18" charset="0"/>
+                <a:cs typeface="Times New Roman" panose="02020603050405020304" pitchFamily="18" charset="0"/>
+              </a:rPr>
+              <a:t>(</a:t>
+            </a:r>
+            <a:r>
+              <a:rPr lang="pt-BR" sz="1900" dirty="0" err="1">
+                <a:solidFill>
+                  <a:srgbClr val="000000"/>
+                </a:solidFill>
+                <a:latin typeface="Courier New" panose="02070309020205020404" pitchFamily="49" charset="0"/>
+                <a:ea typeface="Times New Roman" panose="02020603050405020304" pitchFamily="18" charset="0"/>
+                <a:cs typeface="Times New Roman" panose="02020603050405020304" pitchFamily="18" charset="0"/>
+              </a:rPr>
+              <a:t>id_cliente</a:t>
+            </a:r>
+            <a:r>
+              <a:rPr lang="pt-BR" sz="1900" b="1" dirty="0">
+                <a:solidFill>
+                  <a:srgbClr val="000080"/>
+                </a:solidFill>
+                <a:latin typeface="Courier New" panose="02070309020205020404" pitchFamily="49" charset="0"/>
+                <a:ea typeface="Times New Roman" panose="02020603050405020304" pitchFamily="18" charset="0"/>
+                <a:cs typeface="Times New Roman" panose="02020603050405020304" pitchFamily="18" charset="0"/>
+              </a:rPr>
+              <a:t>,</a:t>
+            </a:r>
+            <a:r>
+              <a:rPr lang="pt-BR" sz="1900" dirty="0">
+                <a:solidFill>
+                  <a:srgbClr val="000000"/>
+                </a:solidFill>
+                <a:latin typeface="Courier New" panose="02070309020205020404" pitchFamily="49" charset="0"/>
+                <a:ea typeface="Times New Roman" panose="02020603050405020304" pitchFamily="18" charset="0"/>
+                <a:cs typeface="Times New Roman" panose="02020603050405020304" pitchFamily="18" charset="0"/>
+              </a:rPr>
+              <a:t> </a:t>
+            </a:r>
+            <a:r>
+              <a:rPr lang="pt-BR" sz="1900" dirty="0" err="1">
+                <a:solidFill>
+                  <a:srgbClr val="000000"/>
+                </a:solidFill>
+                <a:latin typeface="Courier New" panose="02070309020205020404" pitchFamily="49" charset="0"/>
+                <a:ea typeface="Times New Roman" panose="02020603050405020304" pitchFamily="18" charset="0"/>
+                <a:cs typeface="Times New Roman" panose="02020603050405020304" pitchFamily="18" charset="0"/>
+              </a:rPr>
+              <a:t>data_venda</a:t>
+            </a:r>
+            <a:r>
+              <a:rPr lang="pt-BR" sz="1900" b="1" dirty="0">
+                <a:solidFill>
+                  <a:srgbClr val="000080"/>
+                </a:solidFill>
+                <a:latin typeface="Courier New" panose="02070309020205020404" pitchFamily="49" charset="0"/>
+                <a:ea typeface="Times New Roman" panose="02020603050405020304" pitchFamily="18" charset="0"/>
+                <a:cs typeface="Times New Roman" panose="02020603050405020304" pitchFamily="18" charset="0"/>
+              </a:rPr>
+              <a:t>,</a:t>
+            </a:r>
+            <a:r>
+              <a:rPr lang="pt-BR" sz="1900" dirty="0">
+                <a:solidFill>
+                  <a:srgbClr val="000000"/>
+                </a:solidFill>
+                <a:latin typeface="Courier New" panose="02070309020205020404" pitchFamily="49" charset="0"/>
+                <a:ea typeface="Times New Roman" panose="02020603050405020304" pitchFamily="18" charset="0"/>
+                <a:cs typeface="Times New Roman" panose="02020603050405020304" pitchFamily="18" charset="0"/>
+              </a:rPr>
+              <a:t> </a:t>
+            </a:r>
+            <a:r>
+              <a:rPr lang="pt-BR" sz="1900" dirty="0" err="1">
+                <a:solidFill>
+                  <a:srgbClr val="000000"/>
+                </a:solidFill>
+                <a:latin typeface="Courier New" panose="02070309020205020404" pitchFamily="49" charset="0"/>
+                <a:ea typeface="Times New Roman" panose="02020603050405020304" pitchFamily="18" charset="0"/>
+                <a:cs typeface="Times New Roman" panose="02020603050405020304" pitchFamily="18" charset="0"/>
+              </a:rPr>
+              <a:t>valor_total</a:t>
+            </a:r>
+            <a:r>
+              <a:rPr lang="pt-BR" sz="1900" b="1" dirty="0">
+                <a:solidFill>
+                  <a:srgbClr val="000080"/>
+                </a:solidFill>
+                <a:latin typeface="Courier New" panose="02070309020205020404" pitchFamily="49" charset="0"/>
+                <a:ea typeface="Times New Roman" panose="02020603050405020304" pitchFamily="18" charset="0"/>
+                <a:cs typeface="Times New Roman" panose="02020603050405020304" pitchFamily="18" charset="0"/>
+              </a:rPr>
+              <a:t>)</a:t>
+            </a:r>
+            <a:br>
+              <a:rPr lang="pt-BR" sz="1900" b="1" dirty="0">
+                <a:solidFill>
+                  <a:srgbClr val="000080"/>
+                </a:solidFill>
+                <a:latin typeface="Courier New" panose="02070309020205020404" pitchFamily="49" charset="0"/>
+                <a:ea typeface="Times New Roman" panose="02020603050405020304" pitchFamily="18" charset="0"/>
+                <a:cs typeface="Times New Roman" panose="02020603050405020304" pitchFamily="18" charset="0"/>
+              </a:rPr>
+            </a:br>
+            <a:r>
+              <a:rPr lang="pt-BR" sz="1900" b="1" dirty="0">
+                <a:solidFill>
+                  <a:srgbClr val="0000FF"/>
+                </a:solidFill>
+                <a:latin typeface="Courier New" panose="02070309020205020404" pitchFamily="49" charset="0"/>
+                <a:ea typeface="Times New Roman" panose="02020603050405020304" pitchFamily="18" charset="0"/>
+                <a:cs typeface="Times New Roman" panose="02020603050405020304" pitchFamily="18" charset="0"/>
+              </a:rPr>
+              <a:t>VALUES</a:t>
+            </a:r>
+            <a:r>
+              <a:rPr lang="pt-BR" sz="1900" dirty="0">
+                <a:solidFill>
+                  <a:srgbClr val="000000"/>
+                </a:solidFill>
+                <a:latin typeface="Courier New" panose="02070309020205020404" pitchFamily="49" charset="0"/>
+                <a:ea typeface="Times New Roman" panose="02020603050405020304" pitchFamily="18" charset="0"/>
+                <a:cs typeface="Times New Roman" panose="02020603050405020304" pitchFamily="18" charset="0"/>
+              </a:rPr>
+              <a:t> </a:t>
+            </a:r>
+            <a:r>
+              <a:rPr lang="pt-BR" sz="1900" b="1" dirty="0">
+                <a:solidFill>
+                  <a:srgbClr val="000080"/>
+                </a:solidFill>
+                <a:latin typeface="Courier New" panose="02070309020205020404" pitchFamily="49" charset="0"/>
+                <a:ea typeface="Times New Roman" panose="02020603050405020304" pitchFamily="18" charset="0"/>
+                <a:cs typeface="Times New Roman" panose="02020603050405020304" pitchFamily="18" charset="0"/>
+              </a:rPr>
+              <a:t>(</a:t>
+            </a:r>
+            <a:r>
+              <a:rPr lang="pt-BR" sz="1900" dirty="0">
+                <a:solidFill>
+                  <a:srgbClr val="FF8000"/>
+                </a:solidFill>
+                <a:latin typeface="Courier New" panose="02070309020205020404" pitchFamily="49" charset="0"/>
+                <a:ea typeface="Times New Roman" panose="02020603050405020304" pitchFamily="18" charset="0"/>
+                <a:cs typeface="Times New Roman" panose="02020603050405020304" pitchFamily="18" charset="0"/>
+              </a:rPr>
+              <a:t>1</a:t>
+            </a:r>
+            <a:r>
+              <a:rPr lang="pt-BR" sz="1900" b="1" dirty="0">
+                <a:solidFill>
+                  <a:srgbClr val="000080"/>
+                </a:solidFill>
+                <a:latin typeface="Courier New" panose="02070309020205020404" pitchFamily="49" charset="0"/>
+                <a:ea typeface="Times New Roman" panose="02020603050405020304" pitchFamily="18" charset="0"/>
+                <a:cs typeface="Times New Roman" panose="02020603050405020304" pitchFamily="18" charset="0"/>
+              </a:rPr>
+              <a:t>,</a:t>
+            </a:r>
+            <a:r>
+              <a:rPr lang="pt-BR" sz="1900" dirty="0">
+                <a:solidFill>
+                  <a:srgbClr val="000000"/>
+                </a:solidFill>
+                <a:latin typeface="Courier New" panose="02070309020205020404" pitchFamily="49" charset="0"/>
+                <a:ea typeface="Times New Roman" panose="02020603050405020304" pitchFamily="18" charset="0"/>
+                <a:cs typeface="Times New Roman" panose="02020603050405020304" pitchFamily="18" charset="0"/>
+              </a:rPr>
+              <a:t> </a:t>
+            </a:r>
+            <a:r>
+              <a:rPr lang="pt-BR" sz="1900" dirty="0">
+                <a:solidFill>
+                  <a:srgbClr val="808080"/>
+                </a:solidFill>
+                <a:latin typeface="Courier New" panose="02070309020205020404" pitchFamily="49" charset="0"/>
+                <a:ea typeface="Times New Roman" panose="02020603050405020304" pitchFamily="18" charset="0"/>
+                <a:cs typeface="Times New Roman" panose="02020603050405020304" pitchFamily="18" charset="0"/>
+              </a:rPr>
+              <a:t>'2025-06-14'</a:t>
+            </a:r>
+            <a:r>
+              <a:rPr lang="pt-BR" sz="1900" b="1" dirty="0">
+                <a:solidFill>
+                  <a:srgbClr val="000080"/>
+                </a:solidFill>
+                <a:latin typeface="Courier New" panose="02070309020205020404" pitchFamily="49" charset="0"/>
+                <a:ea typeface="Times New Roman" panose="02020603050405020304" pitchFamily="18" charset="0"/>
+                <a:cs typeface="Times New Roman" panose="02020603050405020304" pitchFamily="18" charset="0"/>
+              </a:rPr>
+              <a:t>,</a:t>
+            </a:r>
+            <a:r>
+              <a:rPr lang="pt-BR" sz="1900" dirty="0">
+                <a:solidFill>
+                  <a:srgbClr val="000000"/>
+                </a:solidFill>
+                <a:latin typeface="Courier New" panose="02070309020205020404" pitchFamily="49" charset="0"/>
+                <a:ea typeface="Times New Roman" panose="02020603050405020304" pitchFamily="18" charset="0"/>
+                <a:cs typeface="Times New Roman" panose="02020603050405020304" pitchFamily="18" charset="0"/>
+              </a:rPr>
+              <a:t> </a:t>
+            </a:r>
+            <a:r>
+              <a:rPr lang="pt-BR" sz="1900" dirty="0">
+                <a:solidFill>
+                  <a:srgbClr val="FF8000"/>
+                </a:solidFill>
+                <a:latin typeface="Courier New" panose="02070309020205020404" pitchFamily="49" charset="0"/>
+                <a:ea typeface="Times New Roman" panose="02020603050405020304" pitchFamily="18" charset="0"/>
+                <a:cs typeface="Times New Roman" panose="02020603050405020304" pitchFamily="18" charset="0"/>
+              </a:rPr>
+              <a:t>450.00</a:t>
+            </a:r>
+            <a:r>
+              <a:rPr lang="pt-BR" sz="1900" b="1" dirty="0">
+                <a:solidFill>
+                  <a:srgbClr val="000080"/>
+                </a:solidFill>
+                <a:latin typeface="Courier New" panose="02070309020205020404" pitchFamily="49" charset="0"/>
+                <a:ea typeface="Times New Roman" panose="02020603050405020304" pitchFamily="18" charset="0"/>
+                <a:cs typeface="Times New Roman" panose="02020603050405020304" pitchFamily="18" charset="0"/>
+              </a:rPr>
+              <a:t>);</a:t>
+            </a:r>
+            <a:endParaRPr lang="pt-BR" sz="1900" dirty="0">
+              <a:latin typeface="Calibri" panose="020F0502020204030204" pitchFamily="34" charset="0"/>
+              <a:ea typeface="Calibri" panose="020F0502020204030204" pitchFamily="34" charset="0"/>
+              <a:cs typeface="Times New Roman" panose="02020603050405020304" pitchFamily="18" charset="0"/>
+            </a:endParaRPr>
+          </a:p>
+          <a:p>
+            <a:pPr>
+              <a:lnSpc>
+                <a:spcPct val="107000"/>
+              </a:lnSpc>
+              <a:spcAft>
+                <a:spcPts val="800"/>
+              </a:spcAft>
+            </a:pPr>
+            <a:r>
+              <a:rPr lang="pt-BR" sz="1900" b="1" dirty="0">
+                <a:ea typeface="Calibri" panose="020F0502020204030204" pitchFamily="34" charset="0"/>
+                <a:cs typeface="Times New Roman" panose="02020603050405020304" pitchFamily="18" charset="0"/>
+              </a:rPr>
+              <a:t>Exemplo de SELECT:</a:t>
+            </a:r>
+            <a:br>
+              <a:rPr lang="pt-BR" sz="1900" dirty="0">
+                <a:latin typeface="Calibri" panose="020F0502020204030204" pitchFamily="34" charset="0"/>
+                <a:ea typeface="Calibri" panose="020F0502020204030204" pitchFamily="34" charset="0"/>
+                <a:cs typeface="Times New Roman" panose="02020603050405020304" pitchFamily="18" charset="0"/>
+              </a:rPr>
+            </a:br>
+            <a:r>
+              <a:rPr lang="pt-BR" sz="1900" b="1" dirty="0">
+                <a:solidFill>
+                  <a:srgbClr val="0000FF"/>
+                </a:solidFill>
+                <a:latin typeface="Courier New" panose="02070309020205020404" pitchFamily="49" charset="0"/>
+                <a:ea typeface="Times New Roman" panose="02020603050405020304" pitchFamily="18" charset="0"/>
+                <a:cs typeface="Times New Roman" panose="02020603050405020304" pitchFamily="18" charset="0"/>
+              </a:rPr>
+              <a:t>SELECT</a:t>
+            </a:r>
+            <a:r>
+              <a:rPr lang="pt-BR" sz="1900" dirty="0">
+                <a:solidFill>
+                  <a:srgbClr val="000000"/>
+                </a:solidFill>
+                <a:latin typeface="Courier New" panose="02070309020205020404" pitchFamily="49" charset="0"/>
+                <a:ea typeface="Times New Roman" panose="02020603050405020304" pitchFamily="18" charset="0"/>
+                <a:cs typeface="Times New Roman" panose="02020603050405020304" pitchFamily="18" charset="0"/>
+              </a:rPr>
+              <a:t> </a:t>
+            </a:r>
+            <a:r>
+              <a:rPr lang="pt-BR" sz="1900" dirty="0" err="1">
+                <a:solidFill>
+                  <a:srgbClr val="000000"/>
+                </a:solidFill>
+                <a:latin typeface="Courier New" panose="02070309020205020404" pitchFamily="49" charset="0"/>
+                <a:ea typeface="Times New Roman" panose="02020603050405020304" pitchFamily="18" charset="0"/>
+                <a:cs typeface="Times New Roman" panose="02020603050405020304" pitchFamily="18" charset="0"/>
+              </a:rPr>
+              <a:t>id_venda</a:t>
+            </a:r>
+            <a:r>
+              <a:rPr lang="pt-BR" sz="1900" b="1" dirty="0">
+                <a:solidFill>
+                  <a:srgbClr val="000080"/>
+                </a:solidFill>
+                <a:latin typeface="Courier New" panose="02070309020205020404" pitchFamily="49" charset="0"/>
+                <a:ea typeface="Times New Roman" panose="02020603050405020304" pitchFamily="18" charset="0"/>
+                <a:cs typeface="Times New Roman" panose="02020603050405020304" pitchFamily="18" charset="0"/>
+              </a:rPr>
+              <a:t>,</a:t>
+            </a:r>
+            <a:r>
+              <a:rPr lang="pt-BR" sz="1900" dirty="0">
+                <a:solidFill>
+                  <a:srgbClr val="000000"/>
+                </a:solidFill>
+                <a:latin typeface="Courier New" panose="02070309020205020404" pitchFamily="49" charset="0"/>
+                <a:ea typeface="Times New Roman" panose="02020603050405020304" pitchFamily="18" charset="0"/>
+                <a:cs typeface="Times New Roman" panose="02020603050405020304" pitchFamily="18" charset="0"/>
+              </a:rPr>
+              <a:t> </a:t>
+            </a:r>
+            <a:r>
+              <a:rPr lang="pt-BR" sz="1900" dirty="0" err="1">
+                <a:solidFill>
+                  <a:srgbClr val="000000"/>
+                </a:solidFill>
+                <a:latin typeface="Courier New" panose="02070309020205020404" pitchFamily="49" charset="0"/>
+                <a:ea typeface="Times New Roman" panose="02020603050405020304" pitchFamily="18" charset="0"/>
+                <a:cs typeface="Times New Roman" panose="02020603050405020304" pitchFamily="18" charset="0"/>
+              </a:rPr>
+              <a:t>data_venda</a:t>
+            </a:r>
+            <a:r>
+              <a:rPr lang="pt-BR" sz="1900" b="1" dirty="0">
+                <a:solidFill>
+                  <a:srgbClr val="000080"/>
+                </a:solidFill>
+                <a:latin typeface="Courier New" panose="02070309020205020404" pitchFamily="49" charset="0"/>
+                <a:ea typeface="Times New Roman" panose="02020603050405020304" pitchFamily="18" charset="0"/>
+                <a:cs typeface="Times New Roman" panose="02020603050405020304" pitchFamily="18" charset="0"/>
+              </a:rPr>
+              <a:t>,</a:t>
+            </a:r>
+            <a:r>
+              <a:rPr lang="pt-BR" sz="1900" dirty="0">
+                <a:solidFill>
+                  <a:srgbClr val="000000"/>
+                </a:solidFill>
+                <a:latin typeface="Courier New" panose="02070309020205020404" pitchFamily="49" charset="0"/>
+                <a:ea typeface="Times New Roman" panose="02020603050405020304" pitchFamily="18" charset="0"/>
+                <a:cs typeface="Times New Roman" panose="02020603050405020304" pitchFamily="18" charset="0"/>
+              </a:rPr>
+              <a:t> </a:t>
+            </a:r>
+            <a:r>
+              <a:rPr lang="pt-BR" sz="1900" dirty="0" err="1">
+                <a:solidFill>
+                  <a:srgbClr val="000000"/>
+                </a:solidFill>
+                <a:latin typeface="Courier New" panose="02070309020205020404" pitchFamily="49" charset="0"/>
+                <a:ea typeface="Times New Roman" panose="02020603050405020304" pitchFamily="18" charset="0"/>
+                <a:cs typeface="Times New Roman" panose="02020603050405020304" pitchFamily="18" charset="0"/>
+              </a:rPr>
+              <a:t>valor_total</a:t>
+            </a:r>
+            <a:r>
+              <a:rPr lang="pt-BR" sz="1900" dirty="0">
+                <a:solidFill>
+                  <a:srgbClr val="000000"/>
+                </a:solidFill>
+                <a:latin typeface="Courier New" panose="02070309020205020404" pitchFamily="49" charset="0"/>
+                <a:ea typeface="Times New Roman" panose="02020603050405020304" pitchFamily="18" charset="0"/>
+                <a:cs typeface="Times New Roman" panose="02020603050405020304" pitchFamily="18" charset="0"/>
+              </a:rPr>
+              <a:t> </a:t>
+            </a:r>
+            <a:r>
+              <a:rPr lang="pt-BR" sz="1900" b="1" dirty="0">
+                <a:solidFill>
+                  <a:srgbClr val="0000FF"/>
+                </a:solidFill>
+                <a:latin typeface="Courier New" panose="02070309020205020404" pitchFamily="49" charset="0"/>
+                <a:ea typeface="Times New Roman" panose="02020603050405020304" pitchFamily="18" charset="0"/>
+                <a:cs typeface="Times New Roman" panose="02020603050405020304" pitchFamily="18" charset="0"/>
+              </a:rPr>
+              <a:t>FROM</a:t>
+            </a:r>
+            <a:r>
+              <a:rPr lang="pt-BR" sz="1900" dirty="0">
+                <a:solidFill>
+                  <a:srgbClr val="000000"/>
+                </a:solidFill>
+                <a:latin typeface="Courier New" panose="02070309020205020404" pitchFamily="49" charset="0"/>
+                <a:ea typeface="Times New Roman" panose="02020603050405020304" pitchFamily="18" charset="0"/>
+                <a:cs typeface="Times New Roman" panose="02020603050405020304" pitchFamily="18" charset="0"/>
+              </a:rPr>
+              <a:t> vendas </a:t>
+            </a:r>
+            <a:r>
+              <a:rPr lang="pt-BR" sz="1900" b="1" dirty="0">
+                <a:solidFill>
+                  <a:srgbClr val="0000FF"/>
+                </a:solidFill>
+                <a:latin typeface="Courier New" panose="02070309020205020404" pitchFamily="49" charset="0"/>
+                <a:ea typeface="Times New Roman" panose="02020603050405020304" pitchFamily="18" charset="0"/>
+                <a:cs typeface="Times New Roman" panose="02020603050405020304" pitchFamily="18" charset="0"/>
+              </a:rPr>
+              <a:t>WHERE</a:t>
+            </a:r>
+            <a:r>
+              <a:rPr lang="pt-BR" sz="1900" dirty="0">
+                <a:solidFill>
+                  <a:srgbClr val="000000"/>
+                </a:solidFill>
+                <a:latin typeface="Courier New" panose="02070309020205020404" pitchFamily="49" charset="0"/>
+                <a:ea typeface="Times New Roman" panose="02020603050405020304" pitchFamily="18" charset="0"/>
+                <a:cs typeface="Times New Roman" panose="02020603050405020304" pitchFamily="18" charset="0"/>
+              </a:rPr>
+              <a:t> </a:t>
+            </a:r>
+            <a:r>
+              <a:rPr lang="pt-BR" sz="1900" dirty="0" err="1">
+                <a:solidFill>
+                  <a:srgbClr val="000000"/>
+                </a:solidFill>
+                <a:latin typeface="Courier New" panose="02070309020205020404" pitchFamily="49" charset="0"/>
+                <a:ea typeface="Times New Roman" panose="02020603050405020304" pitchFamily="18" charset="0"/>
+                <a:cs typeface="Times New Roman" panose="02020603050405020304" pitchFamily="18" charset="0"/>
+              </a:rPr>
+              <a:t>id_cliente</a:t>
+            </a:r>
+            <a:r>
+              <a:rPr lang="pt-BR" sz="1900" dirty="0">
+                <a:solidFill>
+                  <a:srgbClr val="000000"/>
+                </a:solidFill>
+                <a:latin typeface="Courier New" panose="02070309020205020404" pitchFamily="49" charset="0"/>
+                <a:ea typeface="Times New Roman" panose="02020603050405020304" pitchFamily="18" charset="0"/>
+                <a:cs typeface="Times New Roman" panose="02020603050405020304" pitchFamily="18" charset="0"/>
+              </a:rPr>
+              <a:t> </a:t>
+            </a:r>
+            <a:r>
+              <a:rPr lang="pt-BR" sz="1900" b="1" dirty="0">
+                <a:solidFill>
+                  <a:srgbClr val="000080"/>
+                </a:solidFill>
+                <a:latin typeface="Courier New" panose="02070309020205020404" pitchFamily="49" charset="0"/>
+                <a:ea typeface="Times New Roman" panose="02020603050405020304" pitchFamily="18" charset="0"/>
+                <a:cs typeface="Times New Roman" panose="02020603050405020304" pitchFamily="18" charset="0"/>
+              </a:rPr>
+              <a:t>=</a:t>
+            </a:r>
+            <a:r>
+              <a:rPr lang="pt-BR" sz="1900" dirty="0">
+                <a:solidFill>
+                  <a:srgbClr val="000000"/>
+                </a:solidFill>
+                <a:latin typeface="Courier New" panose="02070309020205020404" pitchFamily="49" charset="0"/>
+                <a:ea typeface="Times New Roman" panose="02020603050405020304" pitchFamily="18" charset="0"/>
+                <a:cs typeface="Times New Roman" panose="02020603050405020304" pitchFamily="18" charset="0"/>
+              </a:rPr>
+              <a:t> </a:t>
+            </a:r>
+            <a:r>
+              <a:rPr lang="pt-BR" sz="1900" dirty="0">
+                <a:solidFill>
+                  <a:srgbClr val="FF8000"/>
+                </a:solidFill>
+                <a:latin typeface="Courier New" panose="02070309020205020404" pitchFamily="49" charset="0"/>
+                <a:ea typeface="Times New Roman" panose="02020603050405020304" pitchFamily="18" charset="0"/>
+                <a:cs typeface="Times New Roman" panose="02020603050405020304" pitchFamily="18" charset="0"/>
+              </a:rPr>
+              <a:t>1</a:t>
+            </a:r>
+            <a:r>
+              <a:rPr lang="pt-BR" sz="1900" b="1" dirty="0">
+                <a:solidFill>
+                  <a:srgbClr val="000080"/>
+                </a:solidFill>
+                <a:latin typeface="Courier New" panose="02070309020205020404" pitchFamily="49" charset="0"/>
+                <a:ea typeface="Times New Roman" panose="02020603050405020304" pitchFamily="18" charset="0"/>
+                <a:cs typeface="Times New Roman" panose="02020603050405020304" pitchFamily="18" charset="0"/>
+              </a:rPr>
+              <a:t>;</a:t>
+            </a:r>
+            <a:endParaRPr lang="pt-BR" sz="1900" dirty="0">
+              <a:latin typeface="Calibri" panose="020F0502020204030204" pitchFamily="34" charset="0"/>
+              <a:ea typeface="Calibri" panose="020F0502020204030204" pitchFamily="34" charset="0"/>
+              <a:cs typeface="Times New Roman" panose="02020603050405020304" pitchFamily="18" charset="0"/>
+            </a:endParaRPr>
+          </a:p>
+          <a:p>
+            <a:pPr>
+              <a:lnSpc>
+                <a:spcPct val="107000"/>
+              </a:lnSpc>
+              <a:spcAft>
+                <a:spcPts val="800"/>
+              </a:spcAft>
+            </a:pPr>
+            <a:r>
+              <a:rPr lang="pt-BR" sz="2000" dirty="0">
+                <a:latin typeface="Calibri" panose="020F0502020204030204" pitchFamily="34" charset="0"/>
+                <a:ea typeface="Calibri" panose="020F0502020204030204" pitchFamily="34" charset="0"/>
+                <a:cs typeface="Times New Roman" panose="02020603050405020304" pitchFamily="18" charset="0"/>
+              </a:rPr>
+              <a:t> </a:t>
+            </a:r>
+          </a:p>
+          <a:p>
+            <a:pPr>
+              <a:lnSpc>
+                <a:spcPct val="107000"/>
+              </a:lnSpc>
+              <a:spcAft>
+                <a:spcPts val="800"/>
+              </a:spcAft>
+            </a:pPr>
+            <a:r>
+              <a:rPr lang="pt-BR" sz="2000" i="1" dirty="0">
+                <a:ea typeface="Calibri" panose="020F0502020204030204" pitchFamily="34" charset="0"/>
+                <a:cs typeface="Times New Roman" panose="02020603050405020304" pitchFamily="18" charset="0"/>
+              </a:rPr>
+              <a:t>1 - Exercício - INSERT (Aluno):</a:t>
+            </a:r>
+            <a:br>
+              <a:rPr lang="pt-BR" sz="2000" b="1" dirty="0">
+                <a:ea typeface="Calibri" panose="020F0502020204030204" pitchFamily="34" charset="0"/>
+                <a:cs typeface="Times New Roman" panose="02020603050405020304" pitchFamily="18" charset="0"/>
+              </a:rPr>
+            </a:br>
+            <a:r>
+              <a:rPr lang="pt-BR" sz="2000" dirty="0">
+                <a:ea typeface="Calibri" panose="020F0502020204030204" pitchFamily="34" charset="0"/>
+                <a:cs typeface="Times New Roman" panose="02020603050405020304" pitchFamily="18" charset="0"/>
+              </a:rPr>
+              <a:t>Cadastre uma nova venda feita pelo cliente com </a:t>
+            </a:r>
+            <a:r>
+              <a:rPr lang="pt-BR" sz="2000" b="1" dirty="0" err="1">
+                <a:ea typeface="Calibri" panose="020F0502020204030204" pitchFamily="34" charset="0"/>
+                <a:cs typeface="Times New Roman" panose="02020603050405020304" pitchFamily="18" charset="0"/>
+              </a:rPr>
+              <a:t>id_cliente</a:t>
+            </a:r>
+            <a:r>
+              <a:rPr lang="pt-BR" sz="2000" b="1" dirty="0">
+                <a:ea typeface="Calibri" panose="020F0502020204030204" pitchFamily="34" charset="0"/>
+                <a:cs typeface="Times New Roman" panose="02020603050405020304" pitchFamily="18" charset="0"/>
+              </a:rPr>
+              <a:t> = 2</a:t>
+            </a:r>
+            <a:r>
+              <a:rPr lang="pt-BR" sz="2000" dirty="0">
+                <a:ea typeface="Calibri" panose="020F0502020204030204" pitchFamily="34" charset="0"/>
+                <a:cs typeface="Times New Roman" panose="02020603050405020304" pitchFamily="18" charset="0"/>
+              </a:rPr>
+              <a:t>, no dia </a:t>
+            </a:r>
+            <a:r>
+              <a:rPr lang="pt-BR" sz="2000" b="1" dirty="0">
+                <a:ea typeface="Calibri" panose="020F0502020204030204" pitchFamily="34" charset="0"/>
+                <a:cs typeface="Times New Roman" panose="02020603050405020304" pitchFamily="18" charset="0"/>
+              </a:rPr>
+              <a:t>2025-06-15</a:t>
+            </a:r>
+            <a:r>
+              <a:rPr lang="pt-BR" sz="2000" dirty="0">
+                <a:ea typeface="Calibri" panose="020F0502020204030204" pitchFamily="34" charset="0"/>
+                <a:cs typeface="Times New Roman" panose="02020603050405020304" pitchFamily="18" charset="0"/>
+              </a:rPr>
+              <a:t>, no valor de </a:t>
+            </a:r>
+            <a:r>
+              <a:rPr lang="pt-BR" sz="2000" b="1" dirty="0">
+                <a:ea typeface="Calibri" panose="020F0502020204030204" pitchFamily="34" charset="0"/>
+                <a:cs typeface="Times New Roman" panose="02020603050405020304" pitchFamily="18" charset="0"/>
+              </a:rPr>
+              <a:t>300.00</a:t>
+            </a:r>
+            <a:r>
+              <a:rPr lang="pt-BR" sz="2000" dirty="0">
+                <a:ea typeface="Calibri" panose="020F0502020204030204" pitchFamily="34" charset="0"/>
+                <a:cs typeface="Times New Roman" panose="02020603050405020304" pitchFamily="18" charset="0"/>
+              </a:rPr>
+              <a:t>.</a:t>
+            </a:r>
+            <a:r>
+              <a:rPr lang="pt-BR" sz="2000" b="1" dirty="0">
+                <a:solidFill>
+                  <a:srgbClr val="000080"/>
+                </a:solidFill>
+                <a:ea typeface="Times New Roman" panose="02020603050405020304" pitchFamily="18" charset="0"/>
+                <a:cs typeface="Times New Roman" panose="02020603050405020304" pitchFamily="18" charset="0"/>
+              </a:rPr>
+              <a:t> </a:t>
+            </a:r>
+          </a:p>
+          <a:p>
+            <a:pPr>
+              <a:lnSpc>
+                <a:spcPct val="107000"/>
+              </a:lnSpc>
+              <a:spcAft>
+                <a:spcPts val="800"/>
+              </a:spcAft>
+            </a:pPr>
+            <a:endParaRPr lang="pt-BR" sz="2000" dirty="0">
+              <a:ea typeface="Calibri" panose="020F0502020204030204" pitchFamily="34" charset="0"/>
+              <a:cs typeface="Times New Roman" panose="02020603050405020304" pitchFamily="18" charset="0"/>
+            </a:endParaRPr>
+          </a:p>
+          <a:p>
+            <a:pPr>
+              <a:lnSpc>
+                <a:spcPct val="107000"/>
+              </a:lnSpc>
+              <a:spcAft>
+                <a:spcPts val="800"/>
+              </a:spcAft>
+            </a:pPr>
+            <a:r>
+              <a:rPr lang="pt-BR" sz="2000" i="1" dirty="0">
+                <a:ea typeface="Times New Roman" panose="02020603050405020304" pitchFamily="18" charset="0"/>
+                <a:cs typeface="Times New Roman" panose="02020603050405020304" pitchFamily="18" charset="0"/>
+              </a:rPr>
+              <a:t>2 - Exercício - SELECT (Aluno):</a:t>
+            </a:r>
+            <a:br>
+              <a:rPr lang="pt-BR" sz="2000" b="1" dirty="0">
+                <a:ea typeface="Times New Roman" panose="02020603050405020304" pitchFamily="18" charset="0"/>
+                <a:cs typeface="Times New Roman" panose="02020603050405020304" pitchFamily="18" charset="0"/>
+              </a:rPr>
+            </a:br>
+            <a:r>
+              <a:rPr lang="pt-BR" sz="2000" dirty="0">
+                <a:ea typeface="Times New Roman" panose="02020603050405020304" pitchFamily="18" charset="0"/>
+                <a:cs typeface="Times New Roman" panose="02020603050405020304" pitchFamily="18" charset="0"/>
+              </a:rPr>
+              <a:t>Liste </a:t>
+            </a:r>
+            <a:r>
+              <a:rPr lang="pt-BR" sz="2000" b="1" dirty="0">
+                <a:ea typeface="Times New Roman" panose="02020603050405020304" pitchFamily="18" charset="0"/>
+                <a:cs typeface="Times New Roman" panose="02020603050405020304" pitchFamily="18" charset="0"/>
+              </a:rPr>
+              <a:t>todas as vendas com valor superior a 400.00</a:t>
+            </a:r>
+            <a:r>
+              <a:rPr lang="pt-BR" sz="2000" dirty="0">
+                <a:ea typeface="Times New Roman" panose="02020603050405020304" pitchFamily="18" charset="0"/>
+                <a:cs typeface="Times New Roman" panose="02020603050405020304" pitchFamily="18" charset="0"/>
+              </a:rPr>
+              <a:t>.</a:t>
+            </a:r>
+            <a:endParaRPr lang="pt-BR" sz="2000" dirty="0">
+              <a:ea typeface="Calibri" panose="020F0502020204030204" pitchFamily="34" charset="0"/>
+              <a:cs typeface="Times New Roman" panose="02020603050405020304" pitchFamily="18" charset="0"/>
+            </a:endParaRPr>
+          </a:p>
+        </p:txBody>
+      </p:sp>
+      <p:cxnSp>
+        <p:nvCxnSpPr>
+          <p:cNvPr id="9" name="Conector reto 8">
+            <a:extLst>
+              <a:ext uri="{FF2B5EF4-FFF2-40B4-BE49-F238E27FC236}">
+                <a16:creationId xmlns:a16="http://schemas.microsoft.com/office/drawing/2014/main" id="{C661113F-384D-42E8-A105-7BADD0FA15D9}"/>
+              </a:ext>
+            </a:extLst>
+          </p:cNvPr>
+          <p:cNvCxnSpPr>
+            <a:cxnSpLocks/>
+          </p:cNvCxnSpPr>
+          <p:nvPr/>
+        </p:nvCxnSpPr>
+        <p:spPr>
+          <a:xfrm>
+            <a:off x="338844" y="3930315"/>
+            <a:ext cx="10361240" cy="0"/>
+          </a:xfrm>
+          <a:prstGeom prst="line">
+            <a:avLst/>
+          </a:prstGeom>
+        </p:spPr>
+        <p:style>
+          <a:lnRef idx="1">
+            <a:schemeClr val="accent1"/>
+          </a:lnRef>
+          <a:fillRef idx="0">
+            <a:schemeClr val="accent1"/>
+          </a:fillRef>
+          <a:effectRef idx="0">
+            <a:schemeClr val="accent1"/>
+          </a:effectRef>
+          <a:fontRef idx="minor">
+            <a:schemeClr val="tx1"/>
+          </a:fontRef>
+        </p:style>
+      </p:cxnSp>
+    </p:spTree>
+    <p:extLst>
+      <p:ext uri="{BB962C8B-B14F-4D97-AF65-F5344CB8AC3E}">
+        <p14:creationId xmlns:p14="http://schemas.microsoft.com/office/powerpoint/2010/main" val="3963355810"/>
+      </p:ext>
+    </p:extLst>
+  </p:cSld>
+  <p:clrMapOvr>
+    <a:masterClrMapping/>
+  </p:clrMapOvr>
+</p:sld>
+</file>
+
+<file path=ppt/slides/slide18.xml><?xml version="1.0" encoding="utf-8"?>
+<p:sld xmlns:a="http://schemas.openxmlformats.org/drawingml/2006/main" xmlns:r="http://schemas.openxmlformats.org/officeDocument/2006/relationships" xmlns:p="http://schemas.openxmlformats.org/presentationml/2006/main">
+  <p:cSld>
+    <p:spTree>
+      <p:nvGrpSpPr>
+        <p:cNvPr id="1" name=""/>
+        <p:cNvGrpSpPr/>
+        <p:nvPr/>
+      </p:nvGrpSpPr>
+      <p:grpSpPr>
+        <a:xfrm>
+          <a:off x="0" y="0"/>
+          <a:ext cx="0" cy="0"/>
+          <a:chOff x="0" y="0"/>
+          <a:chExt cx="0" cy="0"/>
+        </a:xfrm>
+      </p:grpSpPr>
+      <p:sp>
+        <p:nvSpPr>
+          <p:cNvPr id="2" name="Título 1">
+            <a:extLst>
+              <a:ext uri="{FF2B5EF4-FFF2-40B4-BE49-F238E27FC236}">
+                <a16:creationId xmlns:a16="http://schemas.microsoft.com/office/drawing/2014/main" id="{E1BF4364-A6CD-4460-A48D-6779B48ADDBE}"/>
+              </a:ext>
+            </a:extLst>
+          </p:cNvPr>
+          <p:cNvSpPr>
+            <a:spLocks noGrp="1"/>
+          </p:cNvSpPr>
+          <p:nvPr>
+            <p:ph type="title"/>
+          </p:nvPr>
+        </p:nvSpPr>
+        <p:spPr>
+          <a:xfrm>
+            <a:off x="338845" y="1030102"/>
+            <a:ext cx="9692640" cy="811983"/>
+          </a:xfrm>
+        </p:spPr>
+        <p:txBody>
+          <a:bodyPr>
+            <a:noAutofit/>
+          </a:bodyPr>
+          <a:lstStyle/>
+          <a:p>
+            <a:r>
+              <a:rPr lang="pt-BR" sz="3600" b="1" dirty="0">
+                <a:solidFill>
+                  <a:srgbClr val="00758F"/>
+                </a:solidFill>
+              </a:rPr>
+              <a:t>Exercícios:</a:t>
+            </a:r>
+            <a:br>
+              <a:rPr lang="pt-BR" sz="3600" b="1" dirty="0">
+                <a:solidFill>
+                  <a:srgbClr val="F39211"/>
+                </a:solidFill>
+              </a:rPr>
+            </a:br>
+            <a:r>
+              <a:rPr lang="pt-BR" sz="3600" b="1" dirty="0">
+                <a:solidFill>
+                  <a:srgbClr val="F39211"/>
+                </a:solidFill>
+              </a:rPr>
+              <a:t>1.3 - SELECT e INSERT de informações</a:t>
+            </a:r>
+            <a:br>
+              <a:rPr lang="pt-BR" sz="3600" b="1" dirty="0">
+                <a:solidFill>
+                  <a:srgbClr val="F39211"/>
+                </a:solidFill>
+              </a:rPr>
+            </a:br>
+            <a:endParaRPr lang="pt-BR" sz="3600" i="1" dirty="0">
+              <a:solidFill>
+                <a:srgbClr val="F39211"/>
+              </a:solidFill>
+            </a:endParaRPr>
+          </a:p>
+        </p:txBody>
+      </p:sp>
+      <p:pic>
+        <p:nvPicPr>
+          <p:cNvPr id="4" name="Picture 6" descr="https://www.mysql.com/common/logos/logo-mysql-170x115.png">
+            <a:extLst>
+              <a:ext uri="{FF2B5EF4-FFF2-40B4-BE49-F238E27FC236}">
+                <a16:creationId xmlns:a16="http://schemas.microsoft.com/office/drawing/2014/main" id="{441DFD02-E8A2-4690-9CD7-1CC407F2024E}"/>
+              </a:ext>
+            </a:extLst>
+          </p:cNvPr>
+          <p:cNvPicPr>
+            <a:picLocks noChangeAspect="1" noChangeArrowheads="1"/>
+          </p:cNvPicPr>
+          <p:nvPr/>
+        </p:nvPicPr>
+        <p:blipFill>
+          <a:blip r:embed="rId2">
+            <a:extLst>
+              <a:ext uri="{28A0092B-C50C-407E-A947-70E740481C1C}">
+                <a14:useLocalDpi xmlns:a14="http://schemas.microsoft.com/office/drawing/2010/main" val="0"/>
+              </a:ext>
+            </a:extLst>
+          </a:blip>
+          <a:srcRect/>
+          <a:stretch>
+            <a:fillRect/>
+          </a:stretch>
+        </p:blipFill>
+        <p:spPr bwMode="auto">
+          <a:xfrm>
+            <a:off x="9774793" y="5753675"/>
+            <a:ext cx="1385775" cy="936973"/>
+          </a:xfrm>
+          <a:prstGeom prst="rect">
+            <a:avLst/>
+          </a:prstGeom>
+          <a:noFill/>
+          <a:extLst>
+            <a:ext uri="{909E8E84-426E-40DD-AFC4-6F175D3DCCD1}">
+              <a14:hiddenFill xmlns:a14="http://schemas.microsoft.com/office/drawing/2010/main">
+                <a:solidFill>
+                  <a:srgbClr val="FFFFFF"/>
+                </a:solidFill>
+              </a14:hiddenFill>
+            </a:ext>
+          </a:extLst>
+        </p:spPr>
+      </p:pic>
+      <p:sp>
+        <p:nvSpPr>
+          <p:cNvPr id="5" name="CaixaDeTexto 4">
+            <a:extLst>
+              <a:ext uri="{FF2B5EF4-FFF2-40B4-BE49-F238E27FC236}">
+                <a16:creationId xmlns:a16="http://schemas.microsoft.com/office/drawing/2014/main" id="{890DD339-B99C-43BD-99AF-28040E9B3E9C}"/>
+              </a:ext>
+            </a:extLst>
+          </p:cNvPr>
+          <p:cNvSpPr txBox="1"/>
+          <p:nvPr/>
+        </p:nvSpPr>
+        <p:spPr>
+          <a:xfrm>
+            <a:off x="338844" y="1436093"/>
+            <a:ext cx="10938756" cy="5074594"/>
+          </a:xfrm>
+          <a:prstGeom prst="rect">
+            <a:avLst/>
+          </a:prstGeom>
+          <a:noFill/>
+        </p:spPr>
+        <p:txBody>
+          <a:bodyPr wrap="square" rtlCol="0">
+            <a:spAutoFit/>
+          </a:bodyPr>
+          <a:lstStyle/>
+          <a:p>
+            <a:pPr>
+              <a:lnSpc>
+                <a:spcPct val="107000"/>
+              </a:lnSpc>
+              <a:spcAft>
+                <a:spcPts val="800"/>
+              </a:spcAft>
+            </a:pPr>
+            <a:r>
+              <a:rPr lang="pt-BR" sz="2400" dirty="0">
+                <a:ea typeface="Calibri" panose="020F0502020204030204" pitchFamily="34" charset="0"/>
+                <a:cs typeface="Times New Roman" panose="02020603050405020304" pitchFamily="18" charset="0"/>
+              </a:rPr>
+              <a:t>4 - Tabela: </a:t>
+            </a:r>
+            <a:r>
+              <a:rPr lang="pt-BR" sz="2400" i="1" dirty="0" err="1">
+                <a:ea typeface="Calibri" panose="020F0502020204030204" pitchFamily="34" charset="0"/>
+                <a:cs typeface="Times New Roman" panose="02020603050405020304" pitchFamily="18" charset="0"/>
+              </a:rPr>
+              <a:t>itens_venda</a:t>
+            </a:r>
+            <a:endParaRPr lang="pt-BR" sz="2400" dirty="0">
+              <a:ea typeface="Calibri" panose="020F0502020204030204" pitchFamily="34" charset="0"/>
+              <a:cs typeface="Times New Roman" panose="02020603050405020304" pitchFamily="18" charset="0"/>
+            </a:endParaRPr>
+          </a:p>
+          <a:p>
+            <a:pPr>
+              <a:lnSpc>
+                <a:spcPct val="107000"/>
+              </a:lnSpc>
+              <a:spcAft>
+                <a:spcPts val="800"/>
+              </a:spcAft>
+            </a:pPr>
+            <a:r>
+              <a:rPr lang="pt-BR" sz="1900" b="1" dirty="0">
+                <a:ea typeface="Calibri" panose="020F0502020204030204" pitchFamily="34" charset="0"/>
+                <a:cs typeface="Times New Roman" panose="02020603050405020304" pitchFamily="18" charset="0"/>
+              </a:rPr>
+              <a:t>Exemplo de INSERT:</a:t>
+            </a:r>
+            <a:br>
+              <a:rPr lang="pt-BR" sz="1900" dirty="0">
+                <a:latin typeface="Calibri" panose="020F0502020204030204" pitchFamily="34" charset="0"/>
+                <a:ea typeface="Calibri" panose="020F0502020204030204" pitchFamily="34" charset="0"/>
+                <a:cs typeface="Times New Roman" panose="02020603050405020304" pitchFamily="18" charset="0"/>
+              </a:rPr>
+            </a:br>
+            <a:r>
+              <a:rPr lang="pt-BR" sz="1900" b="1" dirty="0">
+                <a:solidFill>
+                  <a:srgbClr val="0000FF"/>
+                </a:solidFill>
+                <a:latin typeface="Courier New" panose="02070309020205020404" pitchFamily="49" charset="0"/>
+                <a:ea typeface="Times New Roman" panose="02020603050405020304" pitchFamily="18" charset="0"/>
+                <a:cs typeface="Times New Roman" panose="02020603050405020304" pitchFamily="18" charset="0"/>
+              </a:rPr>
+              <a:t>INSERT</a:t>
+            </a:r>
+            <a:r>
+              <a:rPr lang="pt-BR" sz="1900" dirty="0">
+                <a:solidFill>
+                  <a:srgbClr val="000000"/>
+                </a:solidFill>
+                <a:latin typeface="Courier New" panose="02070309020205020404" pitchFamily="49" charset="0"/>
+                <a:ea typeface="Times New Roman" panose="02020603050405020304" pitchFamily="18" charset="0"/>
+                <a:cs typeface="Times New Roman" panose="02020603050405020304" pitchFamily="18" charset="0"/>
+              </a:rPr>
+              <a:t> </a:t>
+            </a:r>
+            <a:r>
+              <a:rPr lang="pt-BR" sz="1900" b="1" dirty="0">
+                <a:solidFill>
+                  <a:srgbClr val="0000FF"/>
+                </a:solidFill>
+                <a:latin typeface="Courier New" panose="02070309020205020404" pitchFamily="49" charset="0"/>
+                <a:ea typeface="Times New Roman" panose="02020603050405020304" pitchFamily="18" charset="0"/>
+                <a:cs typeface="Times New Roman" panose="02020603050405020304" pitchFamily="18" charset="0"/>
+              </a:rPr>
+              <a:t>INTO</a:t>
+            </a:r>
+            <a:r>
+              <a:rPr lang="pt-BR" sz="1900" dirty="0">
+                <a:solidFill>
+                  <a:srgbClr val="000000"/>
+                </a:solidFill>
+                <a:latin typeface="Courier New" panose="02070309020205020404" pitchFamily="49" charset="0"/>
+                <a:ea typeface="Times New Roman" panose="02020603050405020304" pitchFamily="18" charset="0"/>
+                <a:cs typeface="Times New Roman" panose="02020603050405020304" pitchFamily="18" charset="0"/>
+              </a:rPr>
+              <a:t> </a:t>
+            </a:r>
+            <a:r>
+              <a:rPr lang="pt-BR" sz="1900" dirty="0" err="1">
+                <a:solidFill>
+                  <a:srgbClr val="000000"/>
+                </a:solidFill>
+                <a:latin typeface="Courier New" panose="02070309020205020404" pitchFamily="49" charset="0"/>
+                <a:ea typeface="Times New Roman" panose="02020603050405020304" pitchFamily="18" charset="0"/>
+                <a:cs typeface="Times New Roman" panose="02020603050405020304" pitchFamily="18" charset="0"/>
+              </a:rPr>
+              <a:t>itens_venda</a:t>
+            </a:r>
+            <a:r>
+              <a:rPr lang="pt-BR" sz="1900" dirty="0">
+                <a:solidFill>
+                  <a:srgbClr val="000000"/>
+                </a:solidFill>
+                <a:latin typeface="Courier New" panose="02070309020205020404" pitchFamily="49" charset="0"/>
+                <a:ea typeface="Times New Roman" panose="02020603050405020304" pitchFamily="18" charset="0"/>
+                <a:cs typeface="Times New Roman" panose="02020603050405020304" pitchFamily="18" charset="0"/>
+              </a:rPr>
+              <a:t> </a:t>
+            </a:r>
+            <a:r>
+              <a:rPr lang="pt-BR" sz="1900" b="1" dirty="0">
+                <a:solidFill>
+                  <a:srgbClr val="000080"/>
+                </a:solidFill>
+                <a:latin typeface="Courier New" panose="02070309020205020404" pitchFamily="49" charset="0"/>
+                <a:ea typeface="Times New Roman" panose="02020603050405020304" pitchFamily="18" charset="0"/>
+                <a:cs typeface="Times New Roman" panose="02020603050405020304" pitchFamily="18" charset="0"/>
+              </a:rPr>
+              <a:t>(</a:t>
+            </a:r>
+            <a:r>
+              <a:rPr lang="pt-BR" sz="1900" dirty="0" err="1">
+                <a:solidFill>
+                  <a:srgbClr val="000000"/>
+                </a:solidFill>
+                <a:latin typeface="Courier New" panose="02070309020205020404" pitchFamily="49" charset="0"/>
+                <a:ea typeface="Times New Roman" panose="02020603050405020304" pitchFamily="18" charset="0"/>
+                <a:cs typeface="Times New Roman" panose="02020603050405020304" pitchFamily="18" charset="0"/>
+              </a:rPr>
+              <a:t>id_venda</a:t>
+            </a:r>
+            <a:r>
+              <a:rPr lang="pt-BR" sz="1900" b="1" dirty="0">
+                <a:solidFill>
+                  <a:srgbClr val="000080"/>
+                </a:solidFill>
+                <a:latin typeface="Courier New" panose="02070309020205020404" pitchFamily="49" charset="0"/>
+                <a:ea typeface="Times New Roman" panose="02020603050405020304" pitchFamily="18" charset="0"/>
+                <a:cs typeface="Times New Roman" panose="02020603050405020304" pitchFamily="18" charset="0"/>
+              </a:rPr>
+              <a:t>,</a:t>
+            </a:r>
+            <a:r>
+              <a:rPr lang="pt-BR" sz="1900" dirty="0">
+                <a:solidFill>
+                  <a:srgbClr val="000000"/>
+                </a:solidFill>
+                <a:latin typeface="Courier New" panose="02070309020205020404" pitchFamily="49" charset="0"/>
+                <a:ea typeface="Times New Roman" panose="02020603050405020304" pitchFamily="18" charset="0"/>
+                <a:cs typeface="Times New Roman" panose="02020603050405020304" pitchFamily="18" charset="0"/>
+              </a:rPr>
+              <a:t> </a:t>
+            </a:r>
+            <a:r>
+              <a:rPr lang="pt-BR" sz="1900" dirty="0" err="1">
+                <a:solidFill>
+                  <a:srgbClr val="000000"/>
+                </a:solidFill>
+                <a:latin typeface="Courier New" panose="02070309020205020404" pitchFamily="49" charset="0"/>
+                <a:ea typeface="Times New Roman" panose="02020603050405020304" pitchFamily="18" charset="0"/>
+                <a:cs typeface="Times New Roman" panose="02020603050405020304" pitchFamily="18" charset="0"/>
+              </a:rPr>
+              <a:t>id_produto</a:t>
+            </a:r>
+            <a:r>
+              <a:rPr lang="pt-BR" sz="1900" b="1" dirty="0">
+                <a:solidFill>
+                  <a:srgbClr val="000080"/>
+                </a:solidFill>
+                <a:latin typeface="Courier New" panose="02070309020205020404" pitchFamily="49" charset="0"/>
+                <a:ea typeface="Times New Roman" panose="02020603050405020304" pitchFamily="18" charset="0"/>
+                <a:cs typeface="Times New Roman" panose="02020603050405020304" pitchFamily="18" charset="0"/>
+              </a:rPr>
+              <a:t>,</a:t>
+            </a:r>
+            <a:r>
+              <a:rPr lang="pt-BR" sz="1900" dirty="0">
+                <a:solidFill>
+                  <a:srgbClr val="000000"/>
+                </a:solidFill>
+                <a:latin typeface="Courier New" panose="02070309020205020404" pitchFamily="49" charset="0"/>
+                <a:ea typeface="Times New Roman" panose="02020603050405020304" pitchFamily="18" charset="0"/>
+                <a:cs typeface="Times New Roman" panose="02020603050405020304" pitchFamily="18" charset="0"/>
+              </a:rPr>
+              <a:t> quantidade</a:t>
+            </a:r>
+            <a:r>
+              <a:rPr lang="pt-BR" sz="1900" b="1" dirty="0">
+                <a:solidFill>
+                  <a:srgbClr val="000080"/>
+                </a:solidFill>
+                <a:latin typeface="Courier New" panose="02070309020205020404" pitchFamily="49" charset="0"/>
+                <a:ea typeface="Times New Roman" panose="02020603050405020304" pitchFamily="18" charset="0"/>
+                <a:cs typeface="Times New Roman" panose="02020603050405020304" pitchFamily="18" charset="0"/>
+              </a:rPr>
+              <a:t>,</a:t>
+            </a:r>
+            <a:r>
+              <a:rPr lang="pt-BR" sz="1900" dirty="0">
+                <a:solidFill>
+                  <a:srgbClr val="000000"/>
+                </a:solidFill>
+                <a:latin typeface="Courier New" panose="02070309020205020404" pitchFamily="49" charset="0"/>
+                <a:ea typeface="Times New Roman" panose="02020603050405020304" pitchFamily="18" charset="0"/>
+                <a:cs typeface="Times New Roman" panose="02020603050405020304" pitchFamily="18" charset="0"/>
+              </a:rPr>
+              <a:t> </a:t>
+            </a:r>
+            <a:r>
+              <a:rPr lang="pt-BR" sz="1900" dirty="0" err="1">
+                <a:solidFill>
+                  <a:srgbClr val="000000"/>
+                </a:solidFill>
+                <a:latin typeface="Courier New" panose="02070309020205020404" pitchFamily="49" charset="0"/>
+                <a:ea typeface="Times New Roman" panose="02020603050405020304" pitchFamily="18" charset="0"/>
+                <a:cs typeface="Times New Roman" panose="02020603050405020304" pitchFamily="18" charset="0"/>
+              </a:rPr>
+              <a:t>preco_unitario</a:t>
+            </a:r>
+            <a:r>
+              <a:rPr lang="pt-BR" sz="1900" b="1" dirty="0">
+                <a:solidFill>
+                  <a:srgbClr val="000080"/>
+                </a:solidFill>
+                <a:latin typeface="Courier New" panose="02070309020205020404" pitchFamily="49" charset="0"/>
+                <a:ea typeface="Times New Roman" panose="02020603050405020304" pitchFamily="18" charset="0"/>
+                <a:cs typeface="Times New Roman" panose="02020603050405020304" pitchFamily="18" charset="0"/>
+              </a:rPr>
+              <a:t>)</a:t>
+            </a:r>
+            <a:br>
+              <a:rPr lang="pt-BR" sz="1900" b="1" dirty="0">
+                <a:solidFill>
+                  <a:srgbClr val="000080"/>
+                </a:solidFill>
+                <a:latin typeface="Courier New" panose="02070309020205020404" pitchFamily="49" charset="0"/>
+                <a:ea typeface="Times New Roman" panose="02020603050405020304" pitchFamily="18" charset="0"/>
+                <a:cs typeface="Times New Roman" panose="02020603050405020304" pitchFamily="18" charset="0"/>
+              </a:rPr>
+            </a:br>
+            <a:r>
+              <a:rPr lang="pt-BR" sz="1900" b="1" dirty="0">
+                <a:solidFill>
+                  <a:srgbClr val="0000FF"/>
+                </a:solidFill>
+                <a:latin typeface="Courier New" panose="02070309020205020404" pitchFamily="49" charset="0"/>
+                <a:ea typeface="Times New Roman" panose="02020603050405020304" pitchFamily="18" charset="0"/>
+                <a:cs typeface="Times New Roman" panose="02020603050405020304" pitchFamily="18" charset="0"/>
+              </a:rPr>
+              <a:t>VALUES</a:t>
+            </a:r>
+            <a:r>
+              <a:rPr lang="pt-BR" sz="1900" dirty="0">
+                <a:solidFill>
+                  <a:srgbClr val="000000"/>
+                </a:solidFill>
+                <a:latin typeface="Courier New" panose="02070309020205020404" pitchFamily="49" charset="0"/>
+                <a:ea typeface="Times New Roman" panose="02020603050405020304" pitchFamily="18" charset="0"/>
+                <a:cs typeface="Times New Roman" panose="02020603050405020304" pitchFamily="18" charset="0"/>
+              </a:rPr>
+              <a:t> </a:t>
+            </a:r>
+            <a:r>
+              <a:rPr lang="pt-BR" sz="1900" b="1" dirty="0">
+                <a:solidFill>
+                  <a:srgbClr val="000080"/>
+                </a:solidFill>
+                <a:latin typeface="Courier New" panose="02070309020205020404" pitchFamily="49" charset="0"/>
+                <a:ea typeface="Times New Roman" panose="02020603050405020304" pitchFamily="18" charset="0"/>
+                <a:cs typeface="Times New Roman" panose="02020603050405020304" pitchFamily="18" charset="0"/>
+              </a:rPr>
+              <a:t>(</a:t>
+            </a:r>
+            <a:r>
+              <a:rPr lang="pt-BR" sz="1900" dirty="0">
+                <a:solidFill>
+                  <a:srgbClr val="FF8000"/>
+                </a:solidFill>
+                <a:latin typeface="Courier New" panose="02070309020205020404" pitchFamily="49" charset="0"/>
+                <a:ea typeface="Times New Roman" panose="02020603050405020304" pitchFamily="18" charset="0"/>
+                <a:cs typeface="Times New Roman" panose="02020603050405020304" pitchFamily="18" charset="0"/>
+              </a:rPr>
+              <a:t>1</a:t>
+            </a:r>
+            <a:r>
+              <a:rPr lang="pt-BR" sz="1900" b="1" dirty="0">
+                <a:solidFill>
+                  <a:srgbClr val="000080"/>
+                </a:solidFill>
+                <a:latin typeface="Courier New" panose="02070309020205020404" pitchFamily="49" charset="0"/>
+                <a:ea typeface="Times New Roman" panose="02020603050405020304" pitchFamily="18" charset="0"/>
+                <a:cs typeface="Times New Roman" panose="02020603050405020304" pitchFamily="18" charset="0"/>
+              </a:rPr>
+              <a:t>,</a:t>
+            </a:r>
+            <a:r>
+              <a:rPr lang="pt-BR" sz="1900" dirty="0">
+                <a:solidFill>
+                  <a:srgbClr val="000000"/>
+                </a:solidFill>
+                <a:latin typeface="Courier New" panose="02070309020205020404" pitchFamily="49" charset="0"/>
+                <a:ea typeface="Times New Roman" panose="02020603050405020304" pitchFamily="18" charset="0"/>
+                <a:cs typeface="Times New Roman" panose="02020603050405020304" pitchFamily="18" charset="0"/>
+              </a:rPr>
+              <a:t> </a:t>
+            </a:r>
+            <a:r>
+              <a:rPr lang="pt-BR" sz="1900" dirty="0">
+                <a:solidFill>
+                  <a:srgbClr val="FF8000"/>
+                </a:solidFill>
+                <a:latin typeface="Courier New" panose="02070309020205020404" pitchFamily="49" charset="0"/>
+                <a:ea typeface="Times New Roman" panose="02020603050405020304" pitchFamily="18" charset="0"/>
+                <a:cs typeface="Times New Roman" panose="02020603050405020304" pitchFamily="18" charset="0"/>
+              </a:rPr>
+              <a:t>1</a:t>
+            </a:r>
+            <a:r>
+              <a:rPr lang="pt-BR" sz="1900" b="1" dirty="0">
+                <a:solidFill>
+                  <a:srgbClr val="000080"/>
+                </a:solidFill>
+                <a:latin typeface="Courier New" panose="02070309020205020404" pitchFamily="49" charset="0"/>
+                <a:ea typeface="Times New Roman" panose="02020603050405020304" pitchFamily="18" charset="0"/>
+                <a:cs typeface="Times New Roman" panose="02020603050405020304" pitchFamily="18" charset="0"/>
+              </a:rPr>
+              <a:t>,</a:t>
+            </a:r>
+            <a:r>
+              <a:rPr lang="pt-BR" sz="1900" dirty="0">
+                <a:solidFill>
+                  <a:srgbClr val="000000"/>
+                </a:solidFill>
+                <a:latin typeface="Courier New" panose="02070309020205020404" pitchFamily="49" charset="0"/>
+                <a:ea typeface="Times New Roman" panose="02020603050405020304" pitchFamily="18" charset="0"/>
+                <a:cs typeface="Times New Roman" panose="02020603050405020304" pitchFamily="18" charset="0"/>
+              </a:rPr>
+              <a:t> </a:t>
+            </a:r>
+            <a:r>
+              <a:rPr lang="pt-BR" sz="1900" dirty="0">
+                <a:solidFill>
+                  <a:srgbClr val="FF8000"/>
+                </a:solidFill>
+                <a:latin typeface="Courier New" panose="02070309020205020404" pitchFamily="49" charset="0"/>
+                <a:ea typeface="Times New Roman" panose="02020603050405020304" pitchFamily="18" charset="0"/>
+                <a:cs typeface="Times New Roman" panose="02020603050405020304" pitchFamily="18" charset="0"/>
+              </a:rPr>
+              <a:t>2</a:t>
+            </a:r>
+            <a:r>
+              <a:rPr lang="pt-BR" sz="1900" b="1" dirty="0">
+                <a:solidFill>
+                  <a:srgbClr val="000080"/>
+                </a:solidFill>
+                <a:latin typeface="Courier New" panose="02070309020205020404" pitchFamily="49" charset="0"/>
+                <a:ea typeface="Times New Roman" panose="02020603050405020304" pitchFamily="18" charset="0"/>
+                <a:cs typeface="Times New Roman" panose="02020603050405020304" pitchFamily="18" charset="0"/>
+              </a:rPr>
+              <a:t>,</a:t>
+            </a:r>
+            <a:r>
+              <a:rPr lang="pt-BR" sz="1900" dirty="0">
+                <a:solidFill>
+                  <a:srgbClr val="000000"/>
+                </a:solidFill>
+                <a:latin typeface="Courier New" panose="02070309020205020404" pitchFamily="49" charset="0"/>
+                <a:ea typeface="Times New Roman" panose="02020603050405020304" pitchFamily="18" charset="0"/>
+                <a:cs typeface="Times New Roman" panose="02020603050405020304" pitchFamily="18" charset="0"/>
+              </a:rPr>
+              <a:t> </a:t>
+            </a:r>
+            <a:r>
+              <a:rPr lang="pt-BR" sz="1900" dirty="0">
+                <a:solidFill>
+                  <a:srgbClr val="FF8000"/>
+                </a:solidFill>
+                <a:latin typeface="Courier New" panose="02070309020205020404" pitchFamily="49" charset="0"/>
+                <a:ea typeface="Times New Roman" panose="02020603050405020304" pitchFamily="18" charset="0"/>
+                <a:cs typeface="Times New Roman" panose="02020603050405020304" pitchFamily="18" charset="0"/>
+              </a:rPr>
+              <a:t>750.00</a:t>
+            </a:r>
+            <a:r>
+              <a:rPr lang="pt-BR" sz="1900" b="1" dirty="0">
+                <a:solidFill>
+                  <a:srgbClr val="000080"/>
+                </a:solidFill>
+                <a:latin typeface="Courier New" panose="02070309020205020404" pitchFamily="49" charset="0"/>
+                <a:ea typeface="Times New Roman" panose="02020603050405020304" pitchFamily="18" charset="0"/>
+                <a:cs typeface="Times New Roman" panose="02020603050405020304" pitchFamily="18" charset="0"/>
+              </a:rPr>
+              <a:t>);</a:t>
+            </a:r>
+            <a:endParaRPr lang="pt-BR" sz="1900" dirty="0">
+              <a:latin typeface="Calibri" panose="020F0502020204030204" pitchFamily="34" charset="0"/>
+              <a:ea typeface="Calibri" panose="020F0502020204030204" pitchFamily="34" charset="0"/>
+              <a:cs typeface="Times New Roman" panose="02020603050405020304" pitchFamily="18" charset="0"/>
+            </a:endParaRPr>
+          </a:p>
+          <a:p>
+            <a:pPr>
+              <a:lnSpc>
+                <a:spcPct val="107000"/>
+              </a:lnSpc>
+              <a:spcAft>
+                <a:spcPts val="800"/>
+              </a:spcAft>
+            </a:pPr>
+            <a:r>
+              <a:rPr lang="pt-BR" sz="1900" b="1" dirty="0">
+                <a:ea typeface="Calibri" panose="020F0502020204030204" pitchFamily="34" charset="0"/>
+                <a:cs typeface="Times New Roman" panose="02020603050405020304" pitchFamily="18" charset="0"/>
+              </a:rPr>
+              <a:t>Exemplo de SELECT:</a:t>
+            </a:r>
+            <a:br>
+              <a:rPr lang="pt-BR" sz="1900" dirty="0">
+                <a:latin typeface="Calibri" panose="020F0502020204030204" pitchFamily="34" charset="0"/>
+                <a:ea typeface="Calibri" panose="020F0502020204030204" pitchFamily="34" charset="0"/>
+                <a:cs typeface="Times New Roman" panose="02020603050405020304" pitchFamily="18" charset="0"/>
+              </a:rPr>
+            </a:br>
+            <a:r>
+              <a:rPr lang="pt-BR" sz="1900" b="1" dirty="0">
+                <a:solidFill>
+                  <a:srgbClr val="0000FF"/>
+                </a:solidFill>
+                <a:latin typeface="Courier New" panose="02070309020205020404" pitchFamily="49" charset="0"/>
+                <a:ea typeface="Times New Roman" panose="02020603050405020304" pitchFamily="18" charset="0"/>
+                <a:cs typeface="Times New Roman" panose="02020603050405020304" pitchFamily="18" charset="0"/>
+              </a:rPr>
+              <a:t>SELECT</a:t>
+            </a:r>
+            <a:r>
+              <a:rPr lang="pt-BR" sz="1900" dirty="0">
+                <a:solidFill>
+                  <a:srgbClr val="000000"/>
+                </a:solidFill>
+                <a:latin typeface="Courier New" panose="02070309020205020404" pitchFamily="49" charset="0"/>
+                <a:ea typeface="Times New Roman" panose="02020603050405020304" pitchFamily="18" charset="0"/>
+                <a:cs typeface="Times New Roman" panose="02020603050405020304" pitchFamily="18" charset="0"/>
+              </a:rPr>
+              <a:t> </a:t>
+            </a:r>
+            <a:r>
+              <a:rPr lang="pt-BR" sz="1900" dirty="0" err="1">
+                <a:solidFill>
+                  <a:srgbClr val="000000"/>
+                </a:solidFill>
+                <a:latin typeface="Courier New" panose="02070309020205020404" pitchFamily="49" charset="0"/>
+                <a:ea typeface="Times New Roman" panose="02020603050405020304" pitchFamily="18" charset="0"/>
+                <a:cs typeface="Times New Roman" panose="02020603050405020304" pitchFamily="18" charset="0"/>
+              </a:rPr>
+              <a:t>id_venda</a:t>
+            </a:r>
+            <a:r>
+              <a:rPr lang="pt-BR" sz="1900" b="1" dirty="0">
+                <a:solidFill>
+                  <a:srgbClr val="000080"/>
+                </a:solidFill>
+                <a:latin typeface="Courier New" panose="02070309020205020404" pitchFamily="49" charset="0"/>
+                <a:ea typeface="Times New Roman" panose="02020603050405020304" pitchFamily="18" charset="0"/>
+                <a:cs typeface="Times New Roman" panose="02020603050405020304" pitchFamily="18" charset="0"/>
+              </a:rPr>
+              <a:t>,</a:t>
+            </a:r>
+            <a:r>
+              <a:rPr lang="pt-BR" sz="1900" dirty="0">
+                <a:solidFill>
+                  <a:srgbClr val="000000"/>
+                </a:solidFill>
+                <a:latin typeface="Courier New" panose="02070309020205020404" pitchFamily="49" charset="0"/>
+                <a:ea typeface="Times New Roman" panose="02020603050405020304" pitchFamily="18" charset="0"/>
+                <a:cs typeface="Times New Roman" panose="02020603050405020304" pitchFamily="18" charset="0"/>
+              </a:rPr>
+              <a:t> </a:t>
+            </a:r>
+            <a:r>
+              <a:rPr lang="pt-BR" sz="1900" dirty="0" err="1">
+                <a:solidFill>
+                  <a:srgbClr val="000000"/>
+                </a:solidFill>
+                <a:latin typeface="Courier New" panose="02070309020205020404" pitchFamily="49" charset="0"/>
+                <a:ea typeface="Times New Roman" panose="02020603050405020304" pitchFamily="18" charset="0"/>
+                <a:cs typeface="Times New Roman" panose="02020603050405020304" pitchFamily="18" charset="0"/>
+              </a:rPr>
+              <a:t>id_produto</a:t>
+            </a:r>
+            <a:r>
+              <a:rPr lang="pt-BR" sz="1900" b="1" dirty="0">
+                <a:solidFill>
+                  <a:srgbClr val="000080"/>
+                </a:solidFill>
+                <a:latin typeface="Courier New" panose="02070309020205020404" pitchFamily="49" charset="0"/>
+                <a:ea typeface="Times New Roman" panose="02020603050405020304" pitchFamily="18" charset="0"/>
+                <a:cs typeface="Times New Roman" panose="02020603050405020304" pitchFamily="18" charset="0"/>
+              </a:rPr>
+              <a:t>,</a:t>
+            </a:r>
+            <a:r>
+              <a:rPr lang="pt-BR" sz="1900" dirty="0">
+                <a:solidFill>
+                  <a:srgbClr val="000000"/>
+                </a:solidFill>
+                <a:latin typeface="Courier New" panose="02070309020205020404" pitchFamily="49" charset="0"/>
+                <a:ea typeface="Times New Roman" panose="02020603050405020304" pitchFamily="18" charset="0"/>
+                <a:cs typeface="Times New Roman" panose="02020603050405020304" pitchFamily="18" charset="0"/>
+              </a:rPr>
+              <a:t> quantidade </a:t>
+            </a:r>
+            <a:r>
+              <a:rPr lang="pt-BR" sz="1900" b="1" dirty="0">
+                <a:solidFill>
+                  <a:srgbClr val="0000FF"/>
+                </a:solidFill>
+                <a:latin typeface="Courier New" panose="02070309020205020404" pitchFamily="49" charset="0"/>
+                <a:ea typeface="Times New Roman" panose="02020603050405020304" pitchFamily="18" charset="0"/>
+                <a:cs typeface="Times New Roman" panose="02020603050405020304" pitchFamily="18" charset="0"/>
+              </a:rPr>
+              <a:t>FROM</a:t>
+            </a:r>
+            <a:r>
+              <a:rPr lang="pt-BR" sz="1900" dirty="0">
+                <a:solidFill>
+                  <a:srgbClr val="000000"/>
+                </a:solidFill>
+                <a:latin typeface="Courier New" panose="02070309020205020404" pitchFamily="49" charset="0"/>
+                <a:ea typeface="Times New Roman" panose="02020603050405020304" pitchFamily="18" charset="0"/>
+                <a:cs typeface="Times New Roman" panose="02020603050405020304" pitchFamily="18" charset="0"/>
+              </a:rPr>
+              <a:t> </a:t>
+            </a:r>
+            <a:r>
+              <a:rPr lang="pt-BR" sz="1900" dirty="0" err="1">
+                <a:solidFill>
+                  <a:srgbClr val="000000"/>
+                </a:solidFill>
+                <a:latin typeface="Courier New" panose="02070309020205020404" pitchFamily="49" charset="0"/>
+                <a:ea typeface="Times New Roman" panose="02020603050405020304" pitchFamily="18" charset="0"/>
+                <a:cs typeface="Times New Roman" panose="02020603050405020304" pitchFamily="18" charset="0"/>
+              </a:rPr>
+              <a:t>itens_venda</a:t>
+            </a:r>
+            <a:r>
+              <a:rPr lang="pt-BR" sz="1900" dirty="0">
+                <a:solidFill>
+                  <a:srgbClr val="000000"/>
+                </a:solidFill>
+                <a:latin typeface="Courier New" panose="02070309020205020404" pitchFamily="49" charset="0"/>
+                <a:ea typeface="Times New Roman" panose="02020603050405020304" pitchFamily="18" charset="0"/>
+                <a:cs typeface="Times New Roman" panose="02020603050405020304" pitchFamily="18" charset="0"/>
+              </a:rPr>
+              <a:t> </a:t>
+            </a:r>
+            <a:r>
+              <a:rPr lang="pt-BR" sz="1900" b="1" dirty="0">
+                <a:solidFill>
+                  <a:srgbClr val="0000FF"/>
+                </a:solidFill>
+                <a:latin typeface="Courier New" panose="02070309020205020404" pitchFamily="49" charset="0"/>
+                <a:ea typeface="Times New Roman" panose="02020603050405020304" pitchFamily="18" charset="0"/>
+                <a:cs typeface="Times New Roman" panose="02020603050405020304" pitchFamily="18" charset="0"/>
+              </a:rPr>
+              <a:t>WHERE</a:t>
+            </a:r>
+            <a:r>
+              <a:rPr lang="pt-BR" sz="1900" dirty="0">
+                <a:solidFill>
+                  <a:srgbClr val="000000"/>
+                </a:solidFill>
+                <a:latin typeface="Courier New" panose="02070309020205020404" pitchFamily="49" charset="0"/>
+                <a:ea typeface="Times New Roman" panose="02020603050405020304" pitchFamily="18" charset="0"/>
+                <a:cs typeface="Times New Roman" panose="02020603050405020304" pitchFamily="18" charset="0"/>
+              </a:rPr>
+              <a:t> </a:t>
+            </a:r>
+            <a:r>
+              <a:rPr lang="pt-BR" sz="1900" dirty="0" err="1">
+                <a:solidFill>
+                  <a:srgbClr val="000000"/>
+                </a:solidFill>
+                <a:latin typeface="Courier New" panose="02070309020205020404" pitchFamily="49" charset="0"/>
+                <a:ea typeface="Times New Roman" panose="02020603050405020304" pitchFamily="18" charset="0"/>
+                <a:cs typeface="Times New Roman" panose="02020603050405020304" pitchFamily="18" charset="0"/>
+              </a:rPr>
+              <a:t>id_venda</a:t>
+            </a:r>
+            <a:r>
+              <a:rPr lang="pt-BR" sz="1900" dirty="0">
+                <a:solidFill>
+                  <a:srgbClr val="000000"/>
+                </a:solidFill>
+                <a:latin typeface="Courier New" panose="02070309020205020404" pitchFamily="49" charset="0"/>
+                <a:ea typeface="Times New Roman" panose="02020603050405020304" pitchFamily="18" charset="0"/>
+                <a:cs typeface="Times New Roman" panose="02020603050405020304" pitchFamily="18" charset="0"/>
+              </a:rPr>
+              <a:t> </a:t>
+            </a:r>
+            <a:r>
+              <a:rPr lang="pt-BR" sz="1900" b="1" dirty="0">
+                <a:solidFill>
+                  <a:srgbClr val="000080"/>
+                </a:solidFill>
+                <a:latin typeface="Courier New" panose="02070309020205020404" pitchFamily="49" charset="0"/>
+                <a:ea typeface="Times New Roman" panose="02020603050405020304" pitchFamily="18" charset="0"/>
+                <a:cs typeface="Times New Roman" panose="02020603050405020304" pitchFamily="18" charset="0"/>
+              </a:rPr>
+              <a:t>=</a:t>
+            </a:r>
+            <a:r>
+              <a:rPr lang="pt-BR" sz="1900" dirty="0">
+                <a:solidFill>
+                  <a:srgbClr val="000000"/>
+                </a:solidFill>
+                <a:latin typeface="Courier New" panose="02070309020205020404" pitchFamily="49" charset="0"/>
+                <a:ea typeface="Times New Roman" panose="02020603050405020304" pitchFamily="18" charset="0"/>
+                <a:cs typeface="Times New Roman" panose="02020603050405020304" pitchFamily="18" charset="0"/>
+              </a:rPr>
+              <a:t> </a:t>
+            </a:r>
+            <a:r>
+              <a:rPr lang="pt-BR" sz="1900" dirty="0">
+                <a:solidFill>
+                  <a:srgbClr val="FF8000"/>
+                </a:solidFill>
+                <a:latin typeface="Courier New" panose="02070309020205020404" pitchFamily="49" charset="0"/>
+                <a:ea typeface="Times New Roman" panose="02020603050405020304" pitchFamily="18" charset="0"/>
+                <a:cs typeface="Times New Roman" panose="02020603050405020304" pitchFamily="18" charset="0"/>
+              </a:rPr>
+              <a:t>1</a:t>
+            </a:r>
+            <a:r>
+              <a:rPr lang="pt-BR" sz="1900" b="1" dirty="0">
+                <a:solidFill>
+                  <a:srgbClr val="000080"/>
+                </a:solidFill>
+                <a:latin typeface="Courier New" panose="02070309020205020404" pitchFamily="49" charset="0"/>
+                <a:ea typeface="Times New Roman" panose="02020603050405020304" pitchFamily="18" charset="0"/>
+                <a:cs typeface="Times New Roman" panose="02020603050405020304" pitchFamily="18" charset="0"/>
+              </a:rPr>
+              <a:t>;</a:t>
+            </a:r>
+            <a:endParaRPr lang="pt-BR" sz="1900" dirty="0">
+              <a:latin typeface="Calibri" panose="020F0502020204030204" pitchFamily="34" charset="0"/>
+              <a:ea typeface="Calibri" panose="020F0502020204030204" pitchFamily="34" charset="0"/>
+              <a:cs typeface="Times New Roman" panose="02020603050405020304" pitchFamily="18" charset="0"/>
+            </a:endParaRPr>
+          </a:p>
+          <a:p>
+            <a:pPr>
+              <a:lnSpc>
+                <a:spcPct val="107000"/>
+              </a:lnSpc>
+              <a:spcAft>
+                <a:spcPts val="800"/>
+              </a:spcAft>
+            </a:pPr>
+            <a:r>
+              <a:rPr lang="pt-BR" sz="1900" dirty="0">
+                <a:solidFill>
+                  <a:srgbClr val="000000"/>
+                </a:solidFill>
+                <a:latin typeface="Courier New" panose="02070309020205020404" pitchFamily="49" charset="0"/>
+                <a:ea typeface="Times New Roman" panose="02020603050405020304" pitchFamily="18" charset="0"/>
+                <a:cs typeface="Times New Roman" panose="02020603050405020304" pitchFamily="18" charset="0"/>
+              </a:rPr>
+              <a:t> </a:t>
+            </a:r>
+            <a:endParaRPr lang="pt-BR" sz="1900" dirty="0">
+              <a:latin typeface="Calibri" panose="020F0502020204030204" pitchFamily="34" charset="0"/>
+              <a:ea typeface="Calibri" panose="020F0502020204030204" pitchFamily="34" charset="0"/>
+              <a:cs typeface="Times New Roman" panose="02020603050405020304" pitchFamily="18" charset="0"/>
+            </a:endParaRPr>
+          </a:p>
+          <a:p>
+            <a:r>
+              <a:rPr lang="pt-BR" sz="2000" i="1" dirty="0">
+                <a:ea typeface="Times New Roman" panose="02020603050405020304" pitchFamily="18" charset="0"/>
+              </a:rPr>
+              <a:t>Exercício - INSERT (Aluno):</a:t>
+            </a:r>
+            <a:br>
+              <a:rPr lang="pt-BR" sz="2000" dirty="0">
+                <a:ea typeface="Times New Roman" panose="02020603050405020304" pitchFamily="18" charset="0"/>
+              </a:rPr>
+            </a:br>
+            <a:r>
+              <a:rPr lang="pt-BR" sz="2000" dirty="0">
+                <a:ea typeface="Times New Roman" panose="02020603050405020304" pitchFamily="18" charset="0"/>
+              </a:rPr>
+              <a:t>Insira um item na venda </a:t>
+            </a:r>
+            <a:r>
+              <a:rPr lang="pt-BR" sz="2000" dirty="0" err="1">
+                <a:ea typeface="Times New Roman" panose="02020603050405020304" pitchFamily="18" charset="0"/>
+              </a:rPr>
+              <a:t>id_venda</a:t>
+            </a:r>
+            <a:r>
+              <a:rPr lang="pt-BR" sz="2000" dirty="0">
+                <a:ea typeface="Times New Roman" panose="02020603050405020304" pitchFamily="18" charset="0"/>
+              </a:rPr>
+              <a:t> = 2, do produto </a:t>
+            </a:r>
+            <a:r>
+              <a:rPr lang="pt-BR" sz="2000" dirty="0" err="1">
+                <a:ea typeface="Times New Roman" panose="02020603050405020304" pitchFamily="18" charset="0"/>
+              </a:rPr>
+              <a:t>id_produto</a:t>
+            </a:r>
+            <a:r>
+              <a:rPr lang="pt-BR" sz="2000" dirty="0">
+                <a:ea typeface="Times New Roman" panose="02020603050405020304" pitchFamily="18" charset="0"/>
+              </a:rPr>
+              <a:t> = 2, com quantidade 3, preço unitário 80.00.</a:t>
+            </a:r>
+            <a:endParaRPr lang="pt-BR" sz="2000" b="1" dirty="0">
+              <a:ea typeface="Times New Roman" panose="02020603050405020304" pitchFamily="18" charset="0"/>
+            </a:endParaRPr>
+          </a:p>
+          <a:p>
+            <a:pPr>
+              <a:lnSpc>
+                <a:spcPct val="107000"/>
+              </a:lnSpc>
+              <a:spcAft>
+                <a:spcPts val="800"/>
+              </a:spcAft>
+            </a:pPr>
+            <a:r>
+              <a:rPr lang="pt-BR" sz="2000" dirty="0">
+                <a:solidFill>
+                  <a:srgbClr val="000080"/>
+                </a:solidFill>
+                <a:ea typeface="Times New Roman" panose="02020603050405020304" pitchFamily="18" charset="0"/>
+                <a:cs typeface="Courier New" panose="02070309020205020404" pitchFamily="49" charset="0"/>
+              </a:rPr>
+              <a:t> </a:t>
+            </a:r>
+            <a:endParaRPr lang="pt-BR" sz="2000" dirty="0">
+              <a:ea typeface="Calibri" panose="020F0502020204030204" pitchFamily="34" charset="0"/>
+              <a:cs typeface="Times New Roman" panose="02020603050405020304" pitchFamily="18" charset="0"/>
+            </a:endParaRPr>
+          </a:p>
+          <a:p>
+            <a:pPr>
+              <a:lnSpc>
+                <a:spcPct val="107000"/>
+              </a:lnSpc>
+              <a:spcAft>
+                <a:spcPts val="800"/>
+              </a:spcAft>
+            </a:pPr>
+            <a:r>
+              <a:rPr lang="pt-BR" sz="2000" i="1" dirty="0">
+                <a:ea typeface="Calibri" panose="020F0502020204030204" pitchFamily="34" charset="0"/>
+                <a:cs typeface="Times New Roman" panose="02020603050405020304" pitchFamily="18" charset="0"/>
+              </a:rPr>
+              <a:t>Exercício - SELECT (Aluno):</a:t>
+            </a:r>
+            <a:br>
+              <a:rPr lang="pt-BR" sz="2000" dirty="0">
+                <a:ea typeface="Calibri" panose="020F0502020204030204" pitchFamily="34" charset="0"/>
+                <a:cs typeface="Times New Roman" panose="02020603050405020304" pitchFamily="18" charset="0"/>
+              </a:rPr>
+            </a:br>
+            <a:r>
+              <a:rPr lang="pt-BR" sz="2000" dirty="0">
+                <a:ea typeface="Calibri" panose="020F0502020204030204" pitchFamily="34" charset="0"/>
+                <a:cs typeface="Times New Roman" panose="02020603050405020304" pitchFamily="18" charset="0"/>
+              </a:rPr>
+              <a:t>Liste os produtos (</a:t>
+            </a:r>
+            <a:r>
+              <a:rPr lang="pt-BR" sz="2000" dirty="0" err="1">
+                <a:ea typeface="Calibri" panose="020F0502020204030204" pitchFamily="34" charset="0"/>
+                <a:cs typeface="Times New Roman" panose="02020603050405020304" pitchFamily="18" charset="0"/>
+              </a:rPr>
+              <a:t>id_produto</a:t>
+            </a:r>
+            <a:r>
+              <a:rPr lang="pt-BR" sz="2000" dirty="0">
+                <a:ea typeface="Calibri" panose="020F0502020204030204" pitchFamily="34" charset="0"/>
+                <a:cs typeface="Times New Roman" panose="02020603050405020304" pitchFamily="18" charset="0"/>
+              </a:rPr>
+              <a:t> e quantidade) vendidos na venda de ID 2.</a:t>
+            </a:r>
+          </a:p>
+        </p:txBody>
+      </p:sp>
+      <p:cxnSp>
+        <p:nvCxnSpPr>
+          <p:cNvPr id="9" name="Conector reto 8">
+            <a:extLst>
+              <a:ext uri="{FF2B5EF4-FFF2-40B4-BE49-F238E27FC236}">
+                <a16:creationId xmlns:a16="http://schemas.microsoft.com/office/drawing/2014/main" id="{C661113F-384D-42E8-A105-7BADD0FA15D9}"/>
+              </a:ext>
+            </a:extLst>
+          </p:cNvPr>
+          <p:cNvCxnSpPr>
+            <a:cxnSpLocks/>
+          </p:cNvCxnSpPr>
+          <p:nvPr/>
+        </p:nvCxnSpPr>
+        <p:spPr>
+          <a:xfrm>
+            <a:off x="338844" y="4170946"/>
+            <a:ext cx="10361240" cy="0"/>
+          </a:xfrm>
+          <a:prstGeom prst="line">
+            <a:avLst/>
+          </a:prstGeom>
+        </p:spPr>
+        <p:style>
+          <a:lnRef idx="1">
+            <a:schemeClr val="accent1"/>
+          </a:lnRef>
+          <a:fillRef idx="0">
+            <a:schemeClr val="accent1"/>
+          </a:fillRef>
+          <a:effectRef idx="0">
+            <a:schemeClr val="accent1"/>
+          </a:effectRef>
+          <a:fontRef idx="minor">
+            <a:schemeClr val="tx1"/>
+          </a:fontRef>
+        </p:style>
+      </p:cxnSp>
+    </p:spTree>
+    <p:extLst>
+      <p:ext uri="{BB962C8B-B14F-4D97-AF65-F5344CB8AC3E}">
+        <p14:creationId xmlns:p14="http://schemas.microsoft.com/office/powerpoint/2010/main" val="3581783887"/>
+      </p:ext>
+    </p:extLst>
+  </p:cSld>
+  <p:clrMapOvr>
+    <a:masterClrMapping/>
+  </p:clrMapOvr>
+</p:sld>
+</file>
+
+<file path=ppt/slides/slide19.xml><?xml version="1.0" encoding="utf-8"?>
+<p:sld xmlns:a="http://schemas.openxmlformats.org/drawingml/2006/main" xmlns:r="http://schemas.openxmlformats.org/officeDocument/2006/relationships" xmlns:p="http://schemas.openxmlformats.org/presentationml/2006/main">
+  <p:cSld>
+    <p:spTree>
+      <p:nvGrpSpPr>
+        <p:cNvPr id="1" name=""/>
+        <p:cNvGrpSpPr/>
+        <p:nvPr/>
+      </p:nvGrpSpPr>
+      <p:grpSpPr>
+        <a:xfrm>
+          <a:off x="0" y="0"/>
+          <a:ext cx="0" cy="0"/>
+          <a:chOff x="0" y="0"/>
+          <a:chExt cx="0" cy="0"/>
+        </a:xfrm>
+      </p:grpSpPr>
+      <p:sp>
+        <p:nvSpPr>
+          <p:cNvPr id="2" name="Título 1">
+            <a:extLst>
+              <a:ext uri="{FF2B5EF4-FFF2-40B4-BE49-F238E27FC236}">
+                <a16:creationId xmlns:a16="http://schemas.microsoft.com/office/drawing/2014/main" id="{E1BF4364-A6CD-4460-A48D-6779B48ADDBE}"/>
+              </a:ext>
+            </a:extLst>
+          </p:cNvPr>
+          <p:cNvSpPr>
+            <a:spLocks noGrp="1"/>
+          </p:cNvSpPr>
+          <p:nvPr>
+            <p:ph type="title"/>
+          </p:nvPr>
+        </p:nvSpPr>
+        <p:spPr>
+          <a:xfrm>
+            <a:off x="338845" y="1030102"/>
+            <a:ext cx="9692640" cy="811983"/>
+          </a:xfrm>
+        </p:spPr>
+        <p:txBody>
+          <a:bodyPr>
+            <a:noAutofit/>
+          </a:bodyPr>
+          <a:lstStyle/>
+          <a:p>
+            <a:r>
+              <a:rPr lang="pt-BR" sz="3600" b="1" dirty="0">
+                <a:solidFill>
+                  <a:srgbClr val="00758F"/>
+                </a:solidFill>
+              </a:rPr>
+              <a:t>Exercícios:</a:t>
+            </a:r>
+            <a:br>
+              <a:rPr lang="pt-BR" sz="3600" b="1" dirty="0">
+                <a:solidFill>
+                  <a:srgbClr val="F39211"/>
+                </a:solidFill>
+              </a:rPr>
+            </a:br>
+            <a:r>
+              <a:rPr lang="pt-BR" sz="3600" b="1" dirty="0">
+                <a:solidFill>
+                  <a:srgbClr val="F39211"/>
+                </a:solidFill>
+              </a:rPr>
+              <a:t>1.3 - SELECT e INSERT de informações</a:t>
+            </a:r>
+            <a:br>
+              <a:rPr lang="pt-BR" sz="3600" b="1" dirty="0">
+                <a:solidFill>
+                  <a:srgbClr val="F39211"/>
+                </a:solidFill>
+              </a:rPr>
+            </a:br>
+            <a:endParaRPr lang="pt-BR" sz="3600" i="1" dirty="0">
+              <a:solidFill>
+                <a:srgbClr val="F39211"/>
+              </a:solidFill>
+            </a:endParaRPr>
+          </a:p>
+        </p:txBody>
+      </p:sp>
+      <p:pic>
+        <p:nvPicPr>
+          <p:cNvPr id="4" name="Picture 6" descr="https://www.mysql.com/common/logos/logo-mysql-170x115.png">
+            <a:extLst>
+              <a:ext uri="{FF2B5EF4-FFF2-40B4-BE49-F238E27FC236}">
+                <a16:creationId xmlns:a16="http://schemas.microsoft.com/office/drawing/2014/main" id="{441DFD02-E8A2-4690-9CD7-1CC407F2024E}"/>
+              </a:ext>
+            </a:extLst>
+          </p:cNvPr>
+          <p:cNvPicPr>
+            <a:picLocks noChangeAspect="1" noChangeArrowheads="1"/>
+          </p:cNvPicPr>
+          <p:nvPr/>
+        </p:nvPicPr>
+        <p:blipFill>
+          <a:blip r:embed="rId2">
+            <a:extLst>
+              <a:ext uri="{28A0092B-C50C-407E-A947-70E740481C1C}">
+                <a14:useLocalDpi xmlns:a14="http://schemas.microsoft.com/office/drawing/2010/main" val="0"/>
+              </a:ext>
+            </a:extLst>
+          </a:blip>
+          <a:srcRect/>
+          <a:stretch>
+            <a:fillRect/>
+          </a:stretch>
+        </p:blipFill>
+        <p:spPr bwMode="auto">
+          <a:xfrm>
+            <a:off x="9774793" y="5753675"/>
+            <a:ext cx="1385775" cy="936973"/>
+          </a:xfrm>
+          <a:prstGeom prst="rect">
+            <a:avLst/>
+          </a:prstGeom>
+          <a:noFill/>
+          <a:extLst>
+            <a:ext uri="{909E8E84-426E-40DD-AFC4-6F175D3DCCD1}">
+              <a14:hiddenFill xmlns:a14="http://schemas.microsoft.com/office/drawing/2010/main">
+                <a:solidFill>
+                  <a:srgbClr val="FFFFFF"/>
+                </a:solidFill>
+              </a14:hiddenFill>
+            </a:ext>
+          </a:extLst>
+        </p:spPr>
+      </p:pic>
+      <p:sp>
+        <p:nvSpPr>
+          <p:cNvPr id="5" name="CaixaDeTexto 4">
+            <a:extLst>
+              <a:ext uri="{FF2B5EF4-FFF2-40B4-BE49-F238E27FC236}">
+                <a16:creationId xmlns:a16="http://schemas.microsoft.com/office/drawing/2014/main" id="{890DD339-B99C-43BD-99AF-28040E9B3E9C}"/>
+              </a:ext>
+            </a:extLst>
+          </p:cNvPr>
+          <p:cNvSpPr txBox="1"/>
+          <p:nvPr/>
+        </p:nvSpPr>
+        <p:spPr>
+          <a:xfrm>
+            <a:off x="338844" y="1436093"/>
+            <a:ext cx="10938756" cy="5399876"/>
+          </a:xfrm>
+          <a:prstGeom prst="rect">
+            <a:avLst/>
+          </a:prstGeom>
+          <a:noFill/>
+        </p:spPr>
+        <p:txBody>
+          <a:bodyPr wrap="square" rtlCol="0">
+            <a:spAutoFit/>
+          </a:bodyPr>
+          <a:lstStyle/>
+          <a:p>
+            <a:pPr>
+              <a:lnSpc>
+                <a:spcPct val="107000"/>
+              </a:lnSpc>
+              <a:spcAft>
+                <a:spcPts val="800"/>
+              </a:spcAft>
+            </a:pPr>
+            <a:r>
+              <a:rPr lang="pt-BR" sz="2400" dirty="0">
+                <a:latin typeface="Constantia" panose="02030602050306030303" pitchFamily="18" charset="0"/>
+                <a:ea typeface="Calibri" panose="020F0502020204030204" pitchFamily="34" charset="0"/>
+                <a:cs typeface="Times New Roman" panose="02020603050405020304" pitchFamily="18" charset="0"/>
+              </a:rPr>
+              <a:t>5 - Tabela: </a:t>
+            </a:r>
+            <a:r>
+              <a:rPr lang="pt-BR" sz="2400" i="1" dirty="0">
+                <a:latin typeface="Constantia" panose="02030602050306030303" pitchFamily="18" charset="0"/>
+                <a:ea typeface="Calibri" panose="020F0502020204030204" pitchFamily="34" charset="0"/>
+                <a:cs typeface="Times New Roman" panose="02020603050405020304" pitchFamily="18" charset="0"/>
+              </a:rPr>
+              <a:t>pagamentos</a:t>
+            </a:r>
+            <a:endParaRPr lang="pt-BR" sz="2400" dirty="0">
+              <a:latin typeface="Calibri" panose="020F0502020204030204" pitchFamily="34" charset="0"/>
+              <a:ea typeface="Calibri" panose="020F0502020204030204" pitchFamily="34" charset="0"/>
+              <a:cs typeface="Times New Roman" panose="02020603050405020304" pitchFamily="18" charset="0"/>
+            </a:endParaRPr>
+          </a:p>
+          <a:p>
+            <a:pPr>
+              <a:lnSpc>
+                <a:spcPct val="107000"/>
+              </a:lnSpc>
+              <a:spcAft>
+                <a:spcPts val="800"/>
+              </a:spcAft>
+            </a:pPr>
+            <a:r>
+              <a:rPr lang="pt-BR" sz="1900" b="1" dirty="0">
+                <a:latin typeface="Constantia" panose="02030602050306030303" pitchFamily="18" charset="0"/>
+                <a:ea typeface="Calibri" panose="020F0502020204030204" pitchFamily="34" charset="0"/>
+                <a:cs typeface="Times New Roman" panose="02020603050405020304" pitchFamily="18" charset="0"/>
+              </a:rPr>
+              <a:t>Exemplo de INSERT:</a:t>
+            </a:r>
+            <a:br>
+              <a:rPr lang="pt-BR" sz="1900" dirty="0">
+                <a:latin typeface="Calibri" panose="020F0502020204030204" pitchFamily="34" charset="0"/>
+                <a:ea typeface="Calibri" panose="020F0502020204030204" pitchFamily="34" charset="0"/>
+                <a:cs typeface="Times New Roman" panose="02020603050405020304" pitchFamily="18" charset="0"/>
+              </a:rPr>
+            </a:br>
+            <a:r>
+              <a:rPr lang="pt-BR" sz="1900" b="1" dirty="0">
+                <a:solidFill>
+                  <a:srgbClr val="0000FF"/>
+                </a:solidFill>
+                <a:latin typeface="Courier New" panose="02070309020205020404" pitchFamily="49" charset="0"/>
+                <a:ea typeface="Times New Roman" panose="02020603050405020304" pitchFamily="18" charset="0"/>
+                <a:cs typeface="Times New Roman" panose="02020603050405020304" pitchFamily="18" charset="0"/>
+              </a:rPr>
+              <a:t>INSERT</a:t>
+            </a:r>
+            <a:r>
+              <a:rPr lang="pt-BR" sz="1900" dirty="0">
+                <a:solidFill>
+                  <a:srgbClr val="000000"/>
+                </a:solidFill>
+                <a:latin typeface="Courier New" panose="02070309020205020404" pitchFamily="49" charset="0"/>
+                <a:ea typeface="Times New Roman" panose="02020603050405020304" pitchFamily="18" charset="0"/>
+                <a:cs typeface="Times New Roman" panose="02020603050405020304" pitchFamily="18" charset="0"/>
+              </a:rPr>
+              <a:t> </a:t>
+            </a:r>
+            <a:r>
+              <a:rPr lang="pt-BR" sz="1900" b="1" dirty="0">
+                <a:solidFill>
+                  <a:srgbClr val="0000FF"/>
+                </a:solidFill>
+                <a:latin typeface="Courier New" panose="02070309020205020404" pitchFamily="49" charset="0"/>
+                <a:ea typeface="Times New Roman" panose="02020603050405020304" pitchFamily="18" charset="0"/>
+                <a:cs typeface="Times New Roman" panose="02020603050405020304" pitchFamily="18" charset="0"/>
+              </a:rPr>
+              <a:t>INTO</a:t>
+            </a:r>
+            <a:r>
+              <a:rPr lang="pt-BR" sz="1900" dirty="0">
+                <a:solidFill>
+                  <a:srgbClr val="000000"/>
+                </a:solidFill>
+                <a:latin typeface="Courier New" panose="02070309020205020404" pitchFamily="49" charset="0"/>
+                <a:ea typeface="Times New Roman" panose="02020603050405020304" pitchFamily="18" charset="0"/>
+                <a:cs typeface="Times New Roman" panose="02020603050405020304" pitchFamily="18" charset="0"/>
+              </a:rPr>
+              <a:t> pagamentos </a:t>
+            </a:r>
+            <a:r>
+              <a:rPr lang="pt-BR" sz="1900" b="1" dirty="0">
+                <a:solidFill>
+                  <a:srgbClr val="000080"/>
+                </a:solidFill>
+                <a:latin typeface="Courier New" panose="02070309020205020404" pitchFamily="49" charset="0"/>
+                <a:ea typeface="Times New Roman" panose="02020603050405020304" pitchFamily="18" charset="0"/>
+                <a:cs typeface="Times New Roman" panose="02020603050405020304" pitchFamily="18" charset="0"/>
+              </a:rPr>
+              <a:t>(</a:t>
+            </a:r>
+            <a:r>
+              <a:rPr lang="pt-BR" sz="1900" dirty="0" err="1">
+                <a:solidFill>
+                  <a:srgbClr val="000000"/>
+                </a:solidFill>
+                <a:latin typeface="Courier New" panose="02070309020205020404" pitchFamily="49" charset="0"/>
+                <a:ea typeface="Times New Roman" panose="02020603050405020304" pitchFamily="18" charset="0"/>
+                <a:cs typeface="Times New Roman" panose="02020603050405020304" pitchFamily="18" charset="0"/>
+              </a:rPr>
+              <a:t>id_venda</a:t>
+            </a:r>
+            <a:r>
+              <a:rPr lang="pt-BR" sz="1900" b="1" dirty="0">
+                <a:solidFill>
+                  <a:srgbClr val="000080"/>
+                </a:solidFill>
+                <a:latin typeface="Courier New" panose="02070309020205020404" pitchFamily="49" charset="0"/>
+                <a:ea typeface="Times New Roman" panose="02020603050405020304" pitchFamily="18" charset="0"/>
+                <a:cs typeface="Times New Roman" panose="02020603050405020304" pitchFamily="18" charset="0"/>
+              </a:rPr>
+              <a:t>,</a:t>
+            </a:r>
+            <a:r>
+              <a:rPr lang="pt-BR" sz="1900" dirty="0">
+                <a:solidFill>
+                  <a:srgbClr val="000000"/>
+                </a:solidFill>
+                <a:latin typeface="Courier New" panose="02070309020205020404" pitchFamily="49" charset="0"/>
+                <a:ea typeface="Times New Roman" panose="02020603050405020304" pitchFamily="18" charset="0"/>
+                <a:cs typeface="Times New Roman" panose="02020603050405020304" pitchFamily="18" charset="0"/>
+              </a:rPr>
+              <a:t> </a:t>
+            </a:r>
+            <a:r>
+              <a:rPr lang="pt-BR" sz="1900" dirty="0" err="1">
+                <a:solidFill>
+                  <a:srgbClr val="000000"/>
+                </a:solidFill>
+                <a:latin typeface="Courier New" panose="02070309020205020404" pitchFamily="49" charset="0"/>
+                <a:ea typeface="Times New Roman" panose="02020603050405020304" pitchFamily="18" charset="0"/>
+                <a:cs typeface="Times New Roman" panose="02020603050405020304" pitchFamily="18" charset="0"/>
+              </a:rPr>
+              <a:t>data_pagamento</a:t>
+            </a:r>
+            <a:r>
+              <a:rPr lang="pt-BR" sz="1900" b="1" dirty="0">
+                <a:solidFill>
+                  <a:srgbClr val="000080"/>
+                </a:solidFill>
+                <a:latin typeface="Courier New" panose="02070309020205020404" pitchFamily="49" charset="0"/>
+                <a:ea typeface="Times New Roman" panose="02020603050405020304" pitchFamily="18" charset="0"/>
+                <a:cs typeface="Times New Roman" panose="02020603050405020304" pitchFamily="18" charset="0"/>
+              </a:rPr>
+              <a:t>,</a:t>
+            </a:r>
+            <a:r>
+              <a:rPr lang="pt-BR" sz="1900" dirty="0">
+                <a:solidFill>
+                  <a:srgbClr val="000000"/>
+                </a:solidFill>
+                <a:latin typeface="Courier New" panose="02070309020205020404" pitchFamily="49" charset="0"/>
+                <a:ea typeface="Times New Roman" panose="02020603050405020304" pitchFamily="18" charset="0"/>
+                <a:cs typeface="Times New Roman" panose="02020603050405020304" pitchFamily="18" charset="0"/>
+              </a:rPr>
+              <a:t> </a:t>
+            </a:r>
+            <a:r>
+              <a:rPr lang="pt-BR" sz="1900" dirty="0" err="1">
+                <a:solidFill>
+                  <a:srgbClr val="000000"/>
+                </a:solidFill>
+                <a:latin typeface="Courier New" panose="02070309020205020404" pitchFamily="49" charset="0"/>
+                <a:ea typeface="Times New Roman" panose="02020603050405020304" pitchFamily="18" charset="0"/>
+                <a:cs typeface="Times New Roman" panose="02020603050405020304" pitchFamily="18" charset="0"/>
+              </a:rPr>
+              <a:t>valor_pago</a:t>
+            </a:r>
+            <a:r>
+              <a:rPr lang="pt-BR" sz="1900" b="1" dirty="0">
+                <a:solidFill>
+                  <a:srgbClr val="000080"/>
+                </a:solidFill>
+                <a:latin typeface="Courier New" panose="02070309020205020404" pitchFamily="49" charset="0"/>
+                <a:ea typeface="Times New Roman" panose="02020603050405020304" pitchFamily="18" charset="0"/>
+                <a:cs typeface="Times New Roman" panose="02020603050405020304" pitchFamily="18" charset="0"/>
+              </a:rPr>
+              <a:t>,</a:t>
+            </a:r>
+            <a:r>
+              <a:rPr lang="pt-BR" sz="1900" dirty="0">
+                <a:solidFill>
+                  <a:srgbClr val="000000"/>
+                </a:solidFill>
+                <a:latin typeface="Courier New" panose="02070309020205020404" pitchFamily="49" charset="0"/>
+                <a:ea typeface="Times New Roman" panose="02020603050405020304" pitchFamily="18" charset="0"/>
+                <a:cs typeface="Times New Roman" panose="02020603050405020304" pitchFamily="18" charset="0"/>
+              </a:rPr>
+              <a:t> </a:t>
+            </a:r>
+            <a:r>
+              <a:rPr lang="pt-BR" sz="1900" dirty="0" err="1">
+                <a:solidFill>
+                  <a:srgbClr val="000000"/>
+                </a:solidFill>
+                <a:latin typeface="Courier New" panose="02070309020205020404" pitchFamily="49" charset="0"/>
+                <a:ea typeface="Times New Roman" panose="02020603050405020304" pitchFamily="18" charset="0"/>
+                <a:cs typeface="Times New Roman" panose="02020603050405020304" pitchFamily="18" charset="0"/>
+              </a:rPr>
+              <a:t>forma_pagamento</a:t>
+            </a:r>
+            <a:r>
+              <a:rPr lang="pt-BR" sz="1900" b="1" dirty="0">
+                <a:solidFill>
+                  <a:srgbClr val="000080"/>
+                </a:solidFill>
+                <a:latin typeface="Courier New" panose="02070309020205020404" pitchFamily="49" charset="0"/>
+                <a:ea typeface="Times New Roman" panose="02020603050405020304" pitchFamily="18" charset="0"/>
+                <a:cs typeface="Times New Roman" panose="02020603050405020304" pitchFamily="18" charset="0"/>
+              </a:rPr>
+              <a:t>)</a:t>
+            </a:r>
+            <a:br>
+              <a:rPr lang="pt-BR" sz="1900" b="1" dirty="0">
+                <a:solidFill>
+                  <a:srgbClr val="000080"/>
+                </a:solidFill>
+                <a:latin typeface="Courier New" panose="02070309020205020404" pitchFamily="49" charset="0"/>
+                <a:ea typeface="Times New Roman" panose="02020603050405020304" pitchFamily="18" charset="0"/>
+                <a:cs typeface="Times New Roman" panose="02020603050405020304" pitchFamily="18" charset="0"/>
+              </a:rPr>
+            </a:br>
+            <a:r>
+              <a:rPr lang="pt-BR" sz="1900" b="1" dirty="0">
+                <a:solidFill>
+                  <a:srgbClr val="0000FF"/>
+                </a:solidFill>
+                <a:latin typeface="Courier New" panose="02070309020205020404" pitchFamily="49" charset="0"/>
+                <a:ea typeface="Times New Roman" panose="02020603050405020304" pitchFamily="18" charset="0"/>
+                <a:cs typeface="Times New Roman" panose="02020603050405020304" pitchFamily="18" charset="0"/>
+              </a:rPr>
+              <a:t>VALUES</a:t>
+            </a:r>
+            <a:r>
+              <a:rPr lang="pt-BR" sz="1900" dirty="0">
+                <a:solidFill>
+                  <a:srgbClr val="000000"/>
+                </a:solidFill>
+                <a:latin typeface="Courier New" panose="02070309020205020404" pitchFamily="49" charset="0"/>
+                <a:ea typeface="Times New Roman" panose="02020603050405020304" pitchFamily="18" charset="0"/>
+                <a:cs typeface="Times New Roman" panose="02020603050405020304" pitchFamily="18" charset="0"/>
+              </a:rPr>
+              <a:t> </a:t>
+            </a:r>
+            <a:r>
+              <a:rPr lang="pt-BR" sz="1900" b="1" dirty="0">
+                <a:solidFill>
+                  <a:srgbClr val="000080"/>
+                </a:solidFill>
+                <a:latin typeface="Courier New" panose="02070309020205020404" pitchFamily="49" charset="0"/>
+                <a:ea typeface="Times New Roman" panose="02020603050405020304" pitchFamily="18" charset="0"/>
+                <a:cs typeface="Times New Roman" panose="02020603050405020304" pitchFamily="18" charset="0"/>
+              </a:rPr>
+              <a:t>(</a:t>
+            </a:r>
+            <a:r>
+              <a:rPr lang="pt-BR" sz="1900" dirty="0">
+                <a:solidFill>
+                  <a:srgbClr val="FF8000"/>
+                </a:solidFill>
+                <a:latin typeface="Courier New" panose="02070309020205020404" pitchFamily="49" charset="0"/>
+                <a:ea typeface="Times New Roman" panose="02020603050405020304" pitchFamily="18" charset="0"/>
+                <a:cs typeface="Times New Roman" panose="02020603050405020304" pitchFamily="18" charset="0"/>
+              </a:rPr>
+              <a:t>1</a:t>
+            </a:r>
+            <a:r>
+              <a:rPr lang="pt-BR" sz="1900" b="1" dirty="0">
+                <a:solidFill>
+                  <a:srgbClr val="000080"/>
+                </a:solidFill>
+                <a:latin typeface="Courier New" panose="02070309020205020404" pitchFamily="49" charset="0"/>
+                <a:ea typeface="Times New Roman" panose="02020603050405020304" pitchFamily="18" charset="0"/>
+                <a:cs typeface="Times New Roman" panose="02020603050405020304" pitchFamily="18" charset="0"/>
+              </a:rPr>
+              <a:t>,</a:t>
+            </a:r>
+            <a:r>
+              <a:rPr lang="pt-BR" sz="1900" dirty="0">
+                <a:solidFill>
+                  <a:srgbClr val="000000"/>
+                </a:solidFill>
+                <a:latin typeface="Courier New" panose="02070309020205020404" pitchFamily="49" charset="0"/>
+                <a:ea typeface="Times New Roman" panose="02020603050405020304" pitchFamily="18" charset="0"/>
+                <a:cs typeface="Times New Roman" panose="02020603050405020304" pitchFamily="18" charset="0"/>
+              </a:rPr>
+              <a:t> </a:t>
+            </a:r>
+            <a:r>
+              <a:rPr lang="pt-BR" sz="1900" dirty="0">
+                <a:solidFill>
+                  <a:srgbClr val="808080"/>
+                </a:solidFill>
+                <a:latin typeface="Courier New" panose="02070309020205020404" pitchFamily="49" charset="0"/>
+                <a:ea typeface="Times New Roman" panose="02020603050405020304" pitchFamily="18" charset="0"/>
+                <a:cs typeface="Times New Roman" panose="02020603050405020304" pitchFamily="18" charset="0"/>
+              </a:rPr>
+              <a:t>'2025-06-15'</a:t>
+            </a:r>
+            <a:r>
+              <a:rPr lang="pt-BR" sz="1900" b="1" dirty="0">
+                <a:solidFill>
+                  <a:srgbClr val="000080"/>
+                </a:solidFill>
+                <a:latin typeface="Courier New" panose="02070309020205020404" pitchFamily="49" charset="0"/>
+                <a:ea typeface="Times New Roman" panose="02020603050405020304" pitchFamily="18" charset="0"/>
+                <a:cs typeface="Times New Roman" panose="02020603050405020304" pitchFamily="18" charset="0"/>
+              </a:rPr>
+              <a:t>,</a:t>
+            </a:r>
+            <a:r>
+              <a:rPr lang="pt-BR" sz="1900" dirty="0">
+                <a:solidFill>
+                  <a:srgbClr val="000000"/>
+                </a:solidFill>
+                <a:latin typeface="Courier New" panose="02070309020205020404" pitchFamily="49" charset="0"/>
+                <a:ea typeface="Times New Roman" panose="02020603050405020304" pitchFamily="18" charset="0"/>
+                <a:cs typeface="Times New Roman" panose="02020603050405020304" pitchFamily="18" charset="0"/>
+              </a:rPr>
+              <a:t> </a:t>
+            </a:r>
+            <a:r>
+              <a:rPr lang="pt-BR" sz="1900" dirty="0">
+                <a:solidFill>
+                  <a:srgbClr val="FF8000"/>
+                </a:solidFill>
+                <a:latin typeface="Courier New" panose="02070309020205020404" pitchFamily="49" charset="0"/>
+                <a:ea typeface="Times New Roman" panose="02020603050405020304" pitchFamily="18" charset="0"/>
+                <a:cs typeface="Times New Roman" panose="02020603050405020304" pitchFamily="18" charset="0"/>
+              </a:rPr>
+              <a:t>450.00</a:t>
+            </a:r>
+            <a:r>
+              <a:rPr lang="pt-BR" sz="1900" b="1" dirty="0">
+                <a:solidFill>
+                  <a:srgbClr val="000080"/>
+                </a:solidFill>
+                <a:latin typeface="Courier New" panose="02070309020205020404" pitchFamily="49" charset="0"/>
+                <a:ea typeface="Times New Roman" panose="02020603050405020304" pitchFamily="18" charset="0"/>
+                <a:cs typeface="Times New Roman" panose="02020603050405020304" pitchFamily="18" charset="0"/>
+              </a:rPr>
+              <a:t>,</a:t>
+            </a:r>
+            <a:r>
+              <a:rPr lang="pt-BR" sz="1900" dirty="0">
+                <a:solidFill>
+                  <a:srgbClr val="000000"/>
+                </a:solidFill>
+                <a:latin typeface="Courier New" panose="02070309020205020404" pitchFamily="49" charset="0"/>
+                <a:ea typeface="Times New Roman" panose="02020603050405020304" pitchFamily="18" charset="0"/>
+                <a:cs typeface="Times New Roman" panose="02020603050405020304" pitchFamily="18" charset="0"/>
+              </a:rPr>
+              <a:t> </a:t>
+            </a:r>
+            <a:r>
+              <a:rPr lang="pt-BR" sz="1900" dirty="0">
+                <a:solidFill>
+                  <a:srgbClr val="808080"/>
+                </a:solidFill>
+                <a:latin typeface="Courier New" panose="02070309020205020404" pitchFamily="49" charset="0"/>
+                <a:ea typeface="Times New Roman" panose="02020603050405020304" pitchFamily="18" charset="0"/>
+                <a:cs typeface="Times New Roman" panose="02020603050405020304" pitchFamily="18" charset="0"/>
+              </a:rPr>
+              <a:t>'Cartão'</a:t>
+            </a:r>
+            <a:r>
+              <a:rPr lang="pt-BR" sz="1900" b="1" dirty="0">
+                <a:solidFill>
+                  <a:srgbClr val="000080"/>
+                </a:solidFill>
+                <a:latin typeface="Courier New" panose="02070309020205020404" pitchFamily="49" charset="0"/>
+                <a:ea typeface="Times New Roman" panose="02020603050405020304" pitchFamily="18" charset="0"/>
+                <a:cs typeface="Times New Roman" panose="02020603050405020304" pitchFamily="18" charset="0"/>
+              </a:rPr>
+              <a:t>);</a:t>
+            </a:r>
+            <a:endParaRPr lang="pt-BR" sz="1900" dirty="0">
+              <a:latin typeface="Calibri" panose="020F0502020204030204" pitchFamily="34" charset="0"/>
+              <a:ea typeface="Calibri" panose="020F0502020204030204" pitchFamily="34" charset="0"/>
+              <a:cs typeface="Times New Roman" panose="02020603050405020304" pitchFamily="18" charset="0"/>
+            </a:endParaRPr>
+          </a:p>
+          <a:p>
+            <a:pPr>
+              <a:lnSpc>
+                <a:spcPct val="107000"/>
+              </a:lnSpc>
+              <a:spcAft>
+                <a:spcPts val="800"/>
+              </a:spcAft>
+            </a:pPr>
+            <a:r>
+              <a:rPr lang="pt-BR" sz="1900" b="1" dirty="0">
+                <a:latin typeface="Constantia" panose="02030602050306030303" pitchFamily="18" charset="0"/>
+                <a:ea typeface="Calibri" panose="020F0502020204030204" pitchFamily="34" charset="0"/>
+                <a:cs typeface="Times New Roman" panose="02020603050405020304" pitchFamily="18" charset="0"/>
+              </a:rPr>
+              <a:t>Exemplo de SELECT:</a:t>
+            </a:r>
+            <a:br>
+              <a:rPr lang="pt-BR" sz="1900" dirty="0">
+                <a:latin typeface="Calibri" panose="020F0502020204030204" pitchFamily="34" charset="0"/>
+                <a:ea typeface="Calibri" panose="020F0502020204030204" pitchFamily="34" charset="0"/>
+                <a:cs typeface="Times New Roman" panose="02020603050405020304" pitchFamily="18" charset="0"/>
+              </a:rPr>
+            </a:br>
+            <a:r>
+              <a:rPr lang="pt-BR" sz="1900" b="1" dirty="0">
+                <a:solidFill>
+                  <a:srgbClr val="0000FF"/>
+                </a:solidFill>
+                <a:latin typeface="Courier New" panose="02070309020205020404" pitchFamily="49" charset="0"/>
+                <a:ea typeface="Times New Roman" panose="02020603050405020304" pitchFamily="18" charset="0"/>
+                <a:cs typeface="Times New Roman" panose="02020603050405020304" pitchFamily="18" charset="0"/>
+              </a:rPr>
+              <a:t>SELECT</a:t>
+            </a:r>
+            <a:r>
+              <a:rPr lang="pt-BR" sz="1900" dirty="0">
+                <a:solidFill>
+                  <a:srgbClr val="000000"/>
+                </a:solidFill>
+                <a:latin typeface="Courier New" panose="02070309020205020404" pitchFamily="49" charset="0"/>
+                <a:ea typeface="Times New Roman" panose="02020603050405020304" pitchFamily="18" charset="0"/>
+                <a:cs typeface="Times New Roman" panose="02020603050405020304" pitchFamily="18" charset="0"/>
+              </a:rPr>
+              <a:t> </a:t>
+            </a:r>
+            <a:r>
+              <a:rPr lang="pt-BR" sz="1900" dirty="0" err="1">
+                <a:solidFill>
+                  <a:srgbClr val="000000"/>
+                </a:solidFill>
+                <a:latin typeface="Courier New" panose="02070309020205020404" pitchFamily="49" charset="0"/>
+                <a:ea typeface="Times New Roman" panose="02020603050405020304" pitchFamily="18" charset="0"/>
+                <a:cs typeface="Times New Roman" panose="02020603050405020304" pitchFamily="18" charset="0"/>
+              </a:rPr>
+              <a:t>id_venda</a:t>
+            </a:r>
+            <a:r>
+              <a:rPr lang="pt-BR" sz="1900" b="1" dirty="0">
+                <a:solidFill>
+                  <a:srgbClr val="000080"/>
+                </a:solidFill>
+                <a:latin typeface="Courier New" panose="02070309020205020404" pitchFamily="49" charset="0"/>
+                <a:ea typeface="Times New Roman" panose="02020603050405020304" pitchFamily="18" charset="0"/>
+                <a:cs typeface="Times New Roman" panose="02020603050405020304" pitchFamily="18" charset="0"/>
+              </a:rPr>
+              <a:t>,</a:t>
+            </a:r>
+            <a:r>
+              <a:rPr lang="pt-BR" sz="1900" dirty="0">
+                <a:solidFill>
+                  <a:srgbClr val="000000"/>
+                </a:solidFill>
+                <a:latin typeface="Courier New" panose="02070309020205020404" pitchFamily="49" charset="0"/>
+                <a:ea typeface="Times New Roman" panose="02020603050405020304" pitchFamily="18" charset="0"/>
+                <a:cs typeface="Times New Roman" panose="02020603050405020304" pitchFamily="18" charset="0"/>
+              </a:rPr>
+              <a:t> </a:t>
+            </a:r>
+            <a:r>
+              <a:rPr lang="pt-BR" sz="1900" dirty="0" err="1">
+                <a:solidFill>
+                  <a:srgbClr val="000000"/>
+                </a:solidFill>
+                <a:latin typeface="Courier New" panose="02070309020205020404" pitchFamily="49" charset="0"/>
+                <a:ea typeface="Times New Roman" panose="02020603050405020304" pitchFamily="18" charset="0"/>
+                <a:cs typeface="Times New Roman" panose="02020603050405020304" pitchFamily="18" charset="0"/>
+              </a:rPr>
+              <a:t>valor_pago</a:t>
+            </a:r>
+            <a:r>
+              <a:rPr lang="pt-BR" sz="1900" b="1" dirty="0">
+                <a:solidFill>
+                  <a:srgbClr val="000080"/>
+                </a:solidFill>
+                <a:latin typeface="Courier New" panose="02070309020205020404" pitchFamily="49" charset="0"/>
+                <a:ea typeface="Times New Roman" panose="02020603050405020304" pitchFamily="18" charset="0"/>
+                <a:cs typeface="Times New Roman" panose="02020603050405020304" pitchFamily="18" charset="0"/>
+              </a:rPr>
+              <a:t>,</a:t>
+            </a:r>
+            <a:r>
+              <a:rPr lang="pt-BR" sz="1900" dirty="0">
+                <a:solidFill>
+                  <a:srgbClr val="000000"/>
+                </a:solidFill>
+                <a:latin typeface="Courier New" panose="02070309020205020404" pitchFamily="49" charset="0"/>
+                <a:ea typeface="Times New Roman" panose="02020603050405020304" pitchFamily="18" charset="0"/>
+                <a:cs typeface="Times New Roman" panose="02020603050405020304" pitchFamily="18" charset="0"/>
+              </a:rPr>
+              <a:t> </a:t>
+            </a:r>
+            <a:r>
+              <a:rPr lang="pt-BR" sz="1900" dirty="0" err="1">
+                <a:solidFill>
+                  <a:srgbClr val="000000"/>
+                </a:solidFill>
+                <a:latin typeface="Courier New" panose="02070309020205020404" pitchFamily="49" charset="0"/>
+                <a:ea typeface="Times New Roman" panose="02020603050405020304" pitchFamily="18" charset="0"/>
+                <a:cs typeface="Times New Roman" panose="02020603050405020304" pitchFamily="18" charset="0"/>
+              </a:rPr>
+              <a:t>forma_pagamento</a:t>
+            </a:r>
+            <a:r>
+              <a:rPr lang="pt-BR" sz="1900" dirty="0">
+                <a:solidFill>
+                  <a:srgbClr val="000000"/>
+                </a:solidFill>
+                <a:latin typeface="Courier New" panose="02070309020205020404" pitchFamily="49" charset="0"/>
+                <a:ea typeface="Times New Roman" panose="02020603050405020304" pitchFamily="18" charset="0"/>
+                <a:cs typeface="Times New Roman" panose="02020603050405020304" pitchFamily="18" charset="0"/>
+              </a:rPr>
+              <a:t> </a:t>
+            </a:r>
+            <a:r>
+              <a:rPr lang="pt-BR" sz="1900" b="1" dirty="0">
+                <a:solidFill>
+                  <a:srgbClr val="0000FF"/>
+                </a:solidFill>
+                <a:latin typeface="Courier New" panose="02070309020205020404" pitchFamily="49" charset="0"/>
+                <a:ea typeface="Times New Roman" panose="02020603050405020304" pitchFamily="18" charset="0"/>
+                <a:cs typeface="Times New Roman" panose="02020603050405020304" pitchFamily="18" charset="0"/>
+              </a:rPr>
+              <a:t>FROM</a:t>
+            </a:r>
+            <a:r>
+              <a:rPr lang="pt-BR" sz="1900" dirty="0">
+                <a:solidFill>
+                  <a:srgbClr val="000000"/>
+                </a:solidFill>
+                <a:latin typeface="Courier New" panose="02070309020205020404" pitchFamily="49" charset="0"/>
+                <a:ea typeface="Times New Roman" panose="02020603050405020304" pitchFamily="18" charset="0"/>
+                <a:cs typeface="Times New Roman" panose="02020603050405020304" pitchFamily="18" charset="0"/>
+              </a:rPr>
+              <a:t> pagamentos </a:t>
+            </a:r>
+            <a:r>
+              <a:rPr lang="pt-BR" sz="1900" b="1" dirty="0">
+                <a:solidFill>
+                  <a:srgbClr val="0000FF"/>
+                </a:solidFill>
+                <a:latin typeface="Courier New" panose="02070309020205020404" pitchFamily="49" charset="0"/>
+                <a:ea typeface="Times New Roman" panose="02020603050405020304" pitchFamily="18" charset="0"/>
+                <a:cs typeface="Times New Roman" panose="02020603050405020304" pitchFamily="18" charset="0"/>
+              </a:rPr>
+              <a:t>WHERE</a:t>
+            </a:r>
+            <a:r>
+              <a:rPr lang="pt-BR" sz="1900" dirty="0">
+                <a:solidFill>
+                  <a:srgbClr val="000000"/>
+                </a:solidFill>
+                <a:latin typeface="Courier New" panose="02070309020205020404" pitchFamily="49" charset="0"/>
+                <a:ea typeface="Times New Roman" panose="02020603050405020304" pitchFamily="18" charset="0"/>
+                <a:cs typeface="Times New Roman" panose="02020603050405020304" pitchFamily="18" charset="0"/>
+              </a:rPr>
+              <a:t> </a:t>
+            </a:r>
+            <a:r>
+              <a:rPr lang="pt-BR" sz="1900" dirty="0" err="1">
+                <a:solidFill>
+                  <a:srgbClr val="000000"/>
+                </a:solidFill>
+                <a:latin typeface="Courier New" panose="02070309020205020404" pitchFamily="49" charset="0"/>
+                <a:ea typeface="Times New Roman" panose="02020603050405020304" pitchFamily="18" charset="0"/>
+                <a:cs typeface="Times New Roman" panose="02020603050405020304" pitchFamily="18" charset="0"/>
+              </a:rPr>
+              <a:t>forma_pagamento</a:t>
+            </a:r>
+            <a:r>
+              <a:rPr lang="pt-BR" sz="1900" dirty="0">
+                <a:solidFill>
+                  <a:srgbClr val="000000"/>
+                </a:solidFill>
+                <a:latin typeface="Courier New" panose="02070309020205020404" pitchFamily="49" charset="0"/>
+                <a:ea typeface="Times New Roman" panose="02020603050405020304" pitchFamily="18" charset="0"/>
+                <a:cs typeface="Times New Roman" panose="02020603050405020304" pitchFamily="18" charset="0"/>
+              </a:rPr>
+              <a:t> </a:t>
+            </a:r>
+            <a:r>
+              <a:rPr lang="pt-BR" sz="1900" b="1" dirty="0">
+                <a:solidFill>
+                  <a:srgbClr val="000080"/>
+                </a:solidFill>
+                <a:latin typeface="Courier New" panose="02070309020205020404" pitchFamily="49" charset="0"/>
+                <a:ea typeface="Times New Roman" panose="02020603050405020304" pitchFamily="18" charset="0"/>
+                <a:cs typeface="Times New Roman" panose="02020603050405020304" pitchFamily="18" charset="0"/>
+              </a:rPr>
+              <a:t>=</a:t>
+            </a:r>
+            <a:r>
+              <a:rPr lang="pt-BR" sz="1900" dirty="0">
+                <a:solidFill>
+                  <a:srgbClr val="000000"/>
+                </a:solidFill>
+                <a:latin typeface="Courier New" panose="02070309020205020404" pitchFamily="49" charset="0"/>
+                <a:ea typeface="Times New Roman" panose="02020603050405020304" pitchFamily="18" charset="0"/>
+                <a:cs typeface="Times New Roman" panose="02020603050405020304" pitchFamily="18" charset="0"/>
+              </a:rPr>
+              <a:t> </a:t>
+            </a:r>
+            <a:r>
+              <a:rPr lang="pt-BR" sz="1900" dirty="0">
+                <a:solidFill>
+                  <a:srgbClr val="808080"/>
+                </a:solidFill>
+                <a:latin typeface="Courier New" panose="02070309020205020404" pitchFamily="49" charset="0"/>
+                <a:ea typeface="Times New Roman" panose="02020603050405020304" pitchFamily="18" charset="0"/>
+                <a:cs typeface="Times New Roman" panose="02020603050405020304" pitchFamily="18" charset="0"/>
+              </a:rPr>
+              <a:t>'Cartão'</a:t>
+            </a:r>
+            <a:r>
+              <a:rPr lang="pt-BR" sz="1900" b="1" dirty="0">
+                <a:solidFill>
+                  <a:srgbClr val="000080"/>
+                </a:solidFill>
+                <a:latin typeface="Courier New" panose="02070309020205020404" pitchFamily="49" charset="0"/>
+                <a:ea typeface="Times New Roman" panose="02020603050405020304" pitchFamily="18" charset="0"/>
+                <a:cs typeface="Times New Roman" panose="02020603050405020304" pitchFamily="18" charset="0"/>
+              </a:rPr>
+              <a:t>;</a:t>
+            </a:r>
+            <a:endParaRPr lang="pt-BR" sz="1900" dirty="0">
+              <a:latin typeface="Calibri" panose="020F0502020204030204" pitchFamily="34" charset="0"/>
+              <a:ea typeface="Calibri" panose="020F0502020204030204" pitchFamily="34" charset="0"/>
+              <a:cs typeface="Times New Roman" panose="02020603050405020304" pitchFamily="18" charset="0"/>
+            </a:endParaRPr>
+          </a:p>
+          <a:p>
+            <a:pPr>
+              <a:lnSpc>
+                <a:spcPct val="107000"/>
+              </a:lnSpc>
+              <a:spcAft>
+                <a:spcPts val="800"/>
+              </a:spcAft>
+            </a:pPr>
+            <a:r>
+              <a:rPr lang="pt-BR" sz="1900" dirty="0">
+                <a:solidFill>
+                  <a:srgbClr val="000000"/>
+                </a:solidFill>
+                <a:latin typeface="Courier New" panose="02070309020205020404" pitchFamily="49" charset="0"/>
+                <a:ea typeface="Times New Roman" panose="02020603050405020304" pitchFamily="18" charset="0"/>
+                <a:cs typeface="Times New Roman" panose="02020603050405020304" pitchFamily="18" charset="0"/>
+              </a:rPr>
+              <a:t> </a:t>
+            </a:r>
+            <a:endParaRPr lang="pt-BR" sz="1900" dirty="0">
+              <a:latin typeface="Calibri" panose="020F0502020204030204" pitchFamily="34" charset="0"/>
+              <a:ea typeface="Calibri" panose="020F0502020204030204" pitchFamily="34" charset="0"/>
+              <a:cs typeface="Times New Roman" panose="02020603050405020304" pitchFamily="18" charset="0"/>
+            </a:endParaRPr>
+          </a:p>
+          <a:p>
+            <a:r>
+              <a:rPr lang="pt-BR" sz="2000" i="1" dirty="0">
+                <a:latin typeface="Constantia" panose="02030602050306030303" pitchFamily="18" charset="0"/>
+                <a:ea typeface="Times New Roman" panose="02020603050405020304" pitchFamily="18" charset="0"/>
+              </a:rPr>
+              <a:t>Exercício - INSERT (Aluno):</a:t>
+            </a:r>
+            <a:br>
+              <a:rPr lang="pt-BR" sz="2000" b="1" dirty="0">
+                <a:latin typeface="Constantia" panose="02030602050306030303" pitchFamily="18" charset="0"/>
+                <a:ea typeface="Times New Roman" panose="02020603050405020304" pitchFamily="18" charset="0"/>
+              </a:rPr>
+            </a:br>
+            <a:r>
+              <a:rPr lang="pt-BR" sz="2000" b="1" dirty="0">
+                <a:latin typeface="Constantia" panose="02030602050306030303" pitchFamily="18" charset="0"/>
+                <a:ea typeface="Times New Roman" panose="02020603050405020304" pitchFamily="18" charset="0"/>
+              </a:rPr>
+              <a:t>Cadastre um pagamento para a </a:t>
+            </a:r>
+            <a:r>
+              <a:rPr lang="pt-BR" sz="2000" dirty="0">
+                <a:latin typeface="Constantia" panose="02030602050306030303" pitchFamily="18" charset="0"/>
+                <a:ea typeface="Times New Roman" panose="02020603050405020304" pitchFamily="18" charset="0"/>
+              </a:rPr>
+              <a:t>venda id = 2</a:t>
+            </a:r>
+            <a:r>
+              <a:rPr lang="pt-BR" sz="2000" b="1" dirty="0">
+                <a:latin typeface="Constantia" panose="02030602050306030303" pitchFamily="18" charset="0"/>
+                <a:ea typeface="Times New Roman" panose="02020603050405020304" pitchFamily="18" charset="0"/>
+              </a:rPr>
+              <a:t>, com data </a:t>
+            </a:r>
+            <a:r>
+              <a:rPr lang="pt-BR" sz="2000" dirty="0">
+                <a:latin typeface="Constantia" panose="02030602050306030303" pitchFamily="18" charset="0"/>
+                <a:ea typeface="Times New Roman" panose="02020603050405020304" pitchFamily="18" charset="0"/>
+              </a:rPr>
+              <a:t>2025-06-16</a:t>
+            </a:r>
+            <a:r>
+              <a:rPr lang="pt-BR" sz="2000" b="1" dirty="0">
+                <a:latin typeface="Constantia" panose="02030602050306030303" pitchFamily="18" charset="0"/>
+                <a:ea typeface="Times New Roman" panose="02020603050405020304" pitchFamily="18" charset="0"/>
+              </a:rPr>
+              <a:t>, valor </a:t>
+            </a:r>
+            <a:r>
+              <a:rPr lang="pt-BR" sz="2000" dirty="0">
+                <a:latin typeface="Constantia" panose="02030602050306030303" pitchFamily="18" charset="0"/>
+                <a:ea typeface="Times New Roman" panose="02020603050405020304" pitchFamily="18" charset="0"/>
+              </a:rPr>
+              <a:t>300.00</a:t>
+            </a:r>
+            <a:r>
+              <a:rPr lang="pt-BR" sz="2000" b="1" dirty="0">
+                <a:latin typeface="Constantia" panose="02030602050306030303" pitchFamily="18" charset="0"/>
+                <a:ea typeface="Times New Roman" panose="02020603050405020304" pitchFamily="18" charset="0"/>
+              </a:rPr>
+              <a:t>, forma de pagamento </a:t>
+            </a:r>
+            <a:r>
+              <a:rPr lang="pt-BR" sz="2000" dirty="0">
+                <a:latin typeface="Constantia" panose="02030602050306030303" pitchFamily="18" charset="0"/>
+                <a:ea typeface="Times New Roman" panose="02020603050405020304" pitchFamily="18" charset="0"/>
+              </a:rPr>
+              <a:t>Dinheiro</a:t>
+            </a:r>
+            <a:r>
+              <a:rPr lang="pt-BR" sz="2000" b="1" dirty="0">
+                <a:latin typeface="Constantia" panose="02030602050306030303" pitchFamily="18" charset="0"/>
+                <a:ea typeface="Times New Roman" panose="02020603050405020304" pitchFamily="18" charset="0"/>
+              </a:rPr>
+              <a:t>.</a:t>
+            </a:r>
+            <a:endParaRPr lang="pt-BR" sz="2000" b="1" dirty="0">
+              <a:latin typeface="Times New Roman" panose="02020603050405020304" pitchFamily="18" charset="0"/>
+              <a:ea typeface="Times New Roman" panose="02020603050405020304" pitchFamily="18" charset="0"/>
+            </a:endParaRPr>
+          </a:p>
+          <a:p>
+            <a:pPr>
+              <a:lnSpc>
+                <a:spcPct val="107000"/>
+              </a:lnSpc>
+              <a:spcAft>
+                <a:spcPts val="800"/>
+              </a:spcAft>
+            </a:pPr>
+            <a:endParaRPr lang="pt-BR" sz="2000" i="1" dirty="0">
+              <a:latin typeface="Constantia" panose="02030602050306030303" pitchFamily="18" charset="0"/>
+              <a:ea typeface="Calibri" panose="020F0502020204030204" pitchFamily="34" charset="0"/>
+              <a:cs typeface="Times New Roman" panose="02020603050405020304" pitchFamily="18" charset="0"/>
+            </a:endParaRPr>
+          </a:p>
+          <a:p>
+            <a:pPr>
+              <a:lnSpc>
+                <a:spcPct val="107000"/>
+              </a:lnSpc>
+              <a:spcAft>
+                <a:spcPts val="800"/>
+              </a:spcAft>
+            </a:pPr>
+            <a:r>
+              <a:rPr lang="pt-BR" sz="2000" i="1" dirty="0">
+                <a:latin typeface="Constantia" panose="02030602050306030303" pitchFamily="18" charset="0"/>
+                <a:ea typeface="Calibri" panose="020F0502020204030204" pitchFamily="34" charset="0"/>
+                <a:cs typeface="Times New Roman" panose="02020603050405020304" pitchFamily="18" charset="0"/>
+              </a:rPr>
+              <a:t>Exercício - SELECT (Aluno):</a:t>
+            </a:r>
+            <a:br>
+              <a:rPr lang="pt-BR" sz="2000" dirty="0">
+                <a:latin typeface="Constantia" panose="02030602050306030303" pitchFamily="18" charset="0"/>
+                <a:ea typeface="Calibri" panose="020F0502020204030204" pitchFamily="34" charset="0"/>
+                <a:cs typeface="Times New Roman" panose="02020603050405020304" pitchFamily="18" charset="0"/>
+              </a:rPr>
+            </a:br>
+            <a:r>
+              <a:rPr lang="pt-BR" sz="2000" dirty="0">
+                <a:latin typeface="Constantia" panose="02030602050306030303" pitchFamily="18" charset="0"/>
+                <a:ea typeface="Calibri" panose="020F0502020204030204" pitchFamily="34" charset="0"/>
+                <a:cs typeface="Times New Roman" panose="02020603050405020304" pitchFamily="18" charset="0"/>
+              </a:rPr>
+              <a:t>Liste </a:t>
+            </a:r>
+            <a:r>
+              <a:rPr lang="pt-BR" sz="2000" b="1" dirty="0">
+                <a:latin typeface="Constantia" panose="02030602050306030303" pitchFamily="18" charset="0"/>
+                <a:ea typeface="Calibri" panose="020F0502020204030204" pitchFamily="34" charset="0"/>
+                <a:cs typeface="Times New Roman" panose="02020603050405020304" pitchFamily="18" charset="0"/>
+              </a:rPr>
+              <a:t>todos os pagamentos feitos após o dia 2025-06-14</a:t>
+            </a:r>
+            <a:r>
+              <a:rPr lang="pt-BR" sz="2000" dirty="0">
+                <a:latin typeface="Constantia" panose="02030602050306030303" pitchFamily="18" charset="0"/>
+                <a:ea typeface="Calibri" panose="020F0502020204030204" pitchFamily="34" charset="0"/>
+                <a:cs typeface="Times New Roman" panose="02020603050405020304" pitchFamily="18" charset="0"/>
+              </a:rPr>
+              <a:t>.</a:t>
+            </a:r>
+            <a:endParaRPr lang="pt-BR" sz="2000" dirty="0">
+              <a:latin typeface="Calibri" panose="020F0502020204030204" pitchFamily="34" charset="0"/>
+              <a:ea typeface="Calibri" panose="020F0502020204030204" pitchFamily="34" charset="0"/>
+              <a:cs typeface="Times New Roman" panose="02020603050405020304" pitchFamily="18" charset="0"/>
+            </a:endParaRPr>
+          </a:p>
+        </p:txBody>
+      </p:sp>
+      <p:cxnSp>
+        <p:nvCxnSpPr>
+          <p:cNvPr id="9" name="Conector reto 8">
+            <a:extLst>
+              <a:ext uri="{FF2B5EF4-FFF2-40B4-BE49-F238E27FC236}">
+                <a16:creationId xmlns:a16="http://schemas.microsoft.com/office/drawing/2014/main" id="{C661113F-384D-42E8-A105-7BADD0FA15D9}"/>
+              </a:ext>
+            </a:extLst>
+          </p:cNvPr>
+          <p:cNvCxnSpPr>
+            <a:cxnSpLocks/>
+          </p:cNvCxnSpPr>
+          <p:nvPr/>
+        </p:nvCxnSpPr>
+        <p:spPr>
+          <a:xfrm>
+            <a:off x="338844" y="4491788"/>
+            <a:ext cx="10361240" cy="0"/>
+          </a:xfrm>
+          <a:prstGeom prst="line">
+            <a:avLst/>
+          </a:prstGeom>
+        </p:spPr>
+        <p:style>
+          <a:lnRef idx="1">
+            <a:schemeClr val="accent1"/>
+          </a:lnRef>
+          <a:fillRef idx="0">
+            <a:schemeClr val="accent1"/>
+          </a:fillRef>
+          <a:effectRef idx="0">
+            <a:schemeClr val="accent1"/>
+          </a:effectRef>
+          <a:fontRef idx="minor">
+            <a:schemeClr val="tx1"/>
+          </a:fontRef>
+        </p:style>
+      </p:cxnSp>
+    </p:spTree>
+    <p:extLst>
+      <p:ext uri="{BB962C8B-B14F-4D97-AF65-F5344CB8AC3E}">
+        <p14:creationId xmlns:p14="http://schemas.microsoft.com/office/powerpoint/2010/main" val="2947498946"/>
       </p:ext>
     </p:extLst>
   </p:cSld>
